--- a/Documents/Factory-Second-Meeting.pptx
+++ b/Documents/Factory-Second-Meeting.pptx
@@ -4,18 +4,21 @@
   <p:sldMasterIdLst>
     <p:sldMasterId id="2147483648" r:id="rId1"/>
   </p:sldMasterIdLst>
+  <p:notesMasterIdLst>
+    <p:notesMasterId r:id="rId11"/>
+  </p:notesMasterIdLst>
   <p:sldIdLst>
-    <p:sldId id="256" r:id="rId7"/>
-    <p:sldId id="257" r:id="rId9"/>
-    <p:sldId id="258" r:id="rId10"/>
-    <p:sldId id="259" r:id="rId11"/>
-    <p:sldId id="260" r:id="rId12"/>
-    <p:sldId id="261" r:id="rId13"/>
-    <p:sldId id="262" r:id="rId14"/>
-    <p:sldId id="263" r:id="rId15"/>
-    <p:sldId id="264" r:id="rId16"/>
+    <p:sldId id="256" r:id="rId2"/>
+    <p:sldId id="257" r:id="rId3"/>
+    <p:sldId id="258" r:id="rId4"/>
+    <p:sldId id="259" r:id="rId5"/>
+    <p:sldId id="260" r:id="rId6"/>
+    <p:sldId id="261" r:id="rId7"/>
+    <p:sldId id="262" r:id="rId8"/>
+    <p:sldId id="263" r:id="rId9"/>
+    <p:sldId id="264" r:id="rId10"/>
   </p:sldIdLst>
-  <p:sldSz cx="12191695" cy="6858000" type="screen4x3"/>
+  <p:sldSz cx="12192000" cy="6858000"/>
   <p:notesSz cx="6858000" cy="9144000"/>
   <p:defaultTextStyle>
     <a:defPPr>
@@ -112,11 +115,27 @@
       </a:defRPr>
     </a:lvl9pPr>
   </p:defaultTextStyle>
+  <p:extLst>
+    <p:ext uri="{EFAFB233-063F-42B5-8137-9DF3F51BA10A}">
+      <p15:sldGuideLst xmlns:p15="http://schemas.microsoft.com/office/powerpoint/2012/main">
+        <p15:guide id="1" orient="horz" pos="2160">
+          <p15:clr>
+            <a:srgbClr val="A4A3A4"/>
+          </p15:clr>
+        </p15:guide>
+        <p15:guide id="2" pos="2880">
+          <p15:clr>
+            <a:srgbClr val="A4A3A4"/>
+          </p15:clr>
+        </p15:guide>
+      </p15:sldGuideLst>
+    </p:ext>
+  </p:extLst>
 </p:presentation>
 </file>
 
 <file path=ppt/notesMasters/notesMaster1.xml><?xml version="1.0" encoding="utf-8"?>
-<p:notesMaster xmlns:a="http://schemas.openxmlformats.org/drawingml/2006/main" xmlns:p="http://schemas.openxmlformats.org/presentationml/2006/main" xmlns:r="http://schemas.openxmlformats.org/officeDocument/2006/relationships">
+<p:notesMaster xmlns:a="http://schemas.openxmlformats.org/drawingml/2006/main" xmlns:r="http://schemas.openxmlformats.org/officeDocument/2006/relationships" xmlns:p="http://schemas.openxmlformats.org/presentationml/2006/main">
   <p:cSld>
     <p:bg>
       <p:bgRef idx="1001">
@@ -137,241 +156,16 @@
           <a:chExt cx="0" cy="0"/>
         </a:xfrm>
       </p:grpSpPr>
-      <p:sp>
-        <p:nvSpPr>
-          <p:cNvPr id="2" name="Header Placeholder 1"/>
-          <p:cNvSpPr>
-            <a:spLocks noGrp="1"/>
-          </p:cNvSpPr>
-          <p:nvPr>
-            <p:ph type="hdr" sz="quarter"/>
-          </p:nvPr>
-        </p:nvSpPr>
-        <p:spPr>
-          <a:xfrm>
-            <a:off x="0" y="0"/>
-            <a:ext cx="2971800" cy="457200"/>
-          </a:xfrm>
-          <a:prstGeom prst="rect">
-            <a:avLst/>
-          </a:prstGeom>
-        </p:spPr>
-        <p:txBody>
-          <a:bodyPr vert="horz" lIns="91440" tIns="45720" rIns="91440" bIns="45720" rtlCol="0"/>
-          <a:lstStyle>
-            <a:lvl1pPr algn="l">
-              <a:defRPr sz="1200"/>
-            </a:lvl1pPr>
-          </a:lstStyle>
-          <a:p>
-            <a:endParaRPr lang="en-US"/>
-          </a:p>
-        </p:txBody>
-      </p:sp>
-      <p:sp>
-        <p:nvSpPr>
-          <p:cNvPr id="3" name="Date Placeholder 2"/>
-          <p:cNvSpPr>
-            <a:spLocks noGrp="1"/>
-          </p:cNvSpPr>
-          <p:nvPr>
-            <p:ph type="dt" idx="1"/>
-          </p:nvPr>
-        </p:nvSpPr>
-        <p:spPr>
-          <a:xfrm>
-            <a:off x="3884613" y="0"/>
-            <a:ext cx="2971800" cy="457200"/>
-          </a:xfrm>
-          <a:prstGeom prst="rect">
-            <a:avLst/>
-          </a:prstGeom>
-        </p:spPr>
-        <p:txBody>
-          <a:bodyPr vert="horz" lIns="91440" tIns="45720" rIns="91440" bIns="45720" rtlCol="0"/>
-          <a:lstStyle>
-            <a:lvl1pPr algn="r">
-              <a:defRPr sz="1200"/>
-            </a:lvl1pPr>
-          </a:lstStyle>
-          <a:p>
-            <a:fld id="{0F89C1C7-3DCD-1040-A9CF-14679D8B5DDD}" type="datetimeFigureOut">
-              <a:rPr lang="en-US" smtClean="0"/>
-              <a:t>10/17/16</a:t>
-            </a:fld>
-            <a:endParaRPr lang="en-US"/>
-          </a:p>
-        </p:txBody>
-      </p:sp>
-      <p:sp>
-        <p:nvSpPr>
-          <p:cNvPr id="4" name="Slide Image Placeholder 3"/>
-          <p:cNvSpPr>
-            <a:spLocks noGrp="1" noRot="1" noChangeAspect="1"/>
-          </p:cNvSpPr>
-          <p:nvPr>
-            <p:ph type="sldImg" idx="2"/>
-          </p:nvPr>
-        </p:nvSpPr>
-        <p:spPr>
-          <a:xfrm>
-            <a:off x="1143000" y="685800"/>
-            <a:ext cx="4572000" cy="3429000"/>
-          </a:xfrm>
-          <a:prstGeom prst="rect">
-            <a:avLst/>
-          </a:prstGeom>
-          <a:noFill/>
-          <a:ln w="12700">
-            <a:solidFill>
-              <a:prstClr val="black"/>
-            </a:solidFill>
-          </a:ln>
-        </p:spPr>
-        <p:txBody>
-          <a:bodyPr vert="horz" lIns="91440" tIns="45720" rIns="91440" bIns="45720" rtlCol="0" anchor="ctr"/>
-          <a:lstStyle/>
-          <a:p>
-            <a:endParaRPr lang="en-US"/>
-          </a:p>
-        </p:txBody>
-      </p:sp>
-      <p:sp>
-        <p:nvSpPr>
-          <p:cNvPr id="5" name="Notes Placeholder 4"/>
-          <p:cNvSpPr>
-            <a:spLocks noGrp="1"/>
-          </p:cNvSpPr>
-          <p:nvPr>
-            <p:ph type="body" sz="quarter" idx="3"/>
-          </p:nvPr>
-        </p:nvSpPr>
-        <p:spPr>
-          <a:xfrm>
-            <a:off x="685800" y="4343400"/>
-            <a:ext cx="5486400" cy="4114800"/>
-          </a:xfrm>
-          <a:prstGeom prst="rect">
-            <a:avLst/>
-          </a:prstGeom>
-        </p:spPr>
-        <p:txBody>
-          <a:bodyPr vert="horz" lIns="91440" tIns="45720" rIns="91440" bIns="45720" rtlCol="0"/>
-          <a:lstStyle/>
-          <a:p>
-            <a:pPr lvl="0"/>
-            <a:r>
-              <a:rPr lang="en-US" smtClean="0"/>
-              <a:t>Click to edit Master text styles</a:t>
-            </a:r>
-          </a:p>
-          <a:p>
-            <a:pPr lvl="1"/>
-            <a:r>
-              <a:rPr lang="en-US" smtClean="0"/>
-              <a:t>Second level</a:t>
-            </a:r>
-          </a:p>
-          <a:p>
-            <a:pPr lvl="2"/>
-            <a:r>
-              <a:rPr lang="en-US" smtClean="0"/>
-              <a:t>Third level</a:t>
-            </a:r>
-          </a:p>
-          <a:p>
-            <a:pPr lvl="3"/>
-            <a:r>
-              <a:rPr lang="en-US" smtClean="0"/>
-              <a:t>Fourth level</a:t>
-            </a:r>
-          </a:p>
-          <a:p>
-            <a:pPr lvl="4"/>
-            <a:r>
-              <a:rPr lang="en-US" smtClean="0"/>
-              <a:t>Fifth level</a:t>
-            </a:r>
-            <a:endParaRPr lang="en-US"/>
-          </a:p>
-        </p:txBody>
-      </p:sp>
-      <p:sp>
-        <p:nvSpPr>
-          <p:cNvPr id="6" name="Footer Placeholder 5"/>
-          <p:cNvSpPr>
-            <a:spLocks noGrp="1"/>
-          </p:cNvSpPr>
-          <p:nvPr>
-            <p:ph type="ftr" sz="quarter" idx="4"/>
-          </p:nvPr>
-        </p:nvSpPr>
-        <p:spPr>
-          <a:xfrm>
-            <a:off x="0" y="8685213"/>
-            <a:ext cx="2971800" cy="457200"/>
-          </a:xfrm>
-          <a:prstGeom prst="rect">
-            <a:avLst/>
-          </a:prstGeom>
-        </p:spPr>
-        <p:txBody>
-          <a:bodyPr vert="horz" lIns="91440" tIns="45720" rIns="91440" bIns="45720" rtlCol="0" anchor="b"/>
-          <a:lstStyle>
-            <a:lvl1pPr algn="l">
-              <a:defRPr sz="1200"/>
-            </a:lvl1pPr>
-          </a:lstStyle>
-          <a:p>
-            <a:endParaRPr lang="en-US"/>
-          </a:p>
-        </p:txBody>
-      </p:sp>
-      <p:sp>
-        <p:nvSpPr>
-          <p:cNvPr id="7" name="Slide Number Placeholder 6"/>
-          <p:cNvSpPr>
-            <a:spLocks noGrp="1"/>
-          </p:cNvSpPr>
-          <p:nvPr>
-            <p:ph type="sldNum" sz="quarter" idx="5"/>
-          </p:nvPr>
-        </p:nvSpPr>
-        <p:spPr>
-          <a:xfrm>
-            <a:off x="3884613" y="8685213"/>
-            <a:ext cx="2971800" cy="457200"/>
-          </a:xfrm>
-          <a:prstGeom prst="rect">
-            <a:avLst/>
-          </a:prstGeom>
-        </p:spPr>
-        <p:txBody>
-          <a:bodyPr vert="horz" lIns="91440" tIns="45720" rIns="91440" bIns="45720" rtlCol="0" anchor="b"/>
-          <a:lstStyle>
-            <a:lvl1pPr algn="r">
-              <a:defRPr sz="1200"/>
-            </a:lvl1pPr>
-          </a:lstStyle>
-          <a:p>
-            <a:fld id="{BB5E49A5-4136-284D-997B-48E1D791AD67}" type="slidenum">
-              <a:rPr lang="en-US" smtClean="0"/>
-              <a:t>‹#›</a:t>
-            </a:fld>
-            <a:endParaRPr lang="en-US"/>
-          </a:p>
-        </p:txBody>
-      </p:sp>
     </p:spTree>
     <p:extLst>
       <p:ext uri="{BB962C8B-B14F-4D97-AF65-F5344CB8AC3E}">
-        <p14:creationId xmlns:p14="http://schemas.microsoft.com/office/powerpoint/2010/main" val="2623252185"/>
+        <p14:creationId xmlns:p14="http://schemas.microsoft.com/office/powerpoint/2010/main" val="3668840149"/>
       </p:ext>
     </p:extLst>
   </p:cSld>
   <p:clrMap bg1="lt1" tx1="dk1" bg2="lt2" tx2="dk2" accent1="accent1" accent2="accent2" accent3="accent3" accent4="accent4" accent5="accent5" accent6="accent6" hlink="hlink" folHlink="folHlink"/>
   <p:notesStyle>
-    <a:lvl1pPr marL="0" algn="l" defTabSz="457200" rtl="0" eaLnBrk="1" latinLnBrk="0" hangingPunct="1">
+    <a:lvl1pPr marL="0" algn="l" defTabSz="914400" rtl="0" eaLnBrk="1" latinLnBrk="0" hangingPunct="1">
       <a:defRPr sz="1200" kern="1200">
         <a:solidFill>
           <a:schemeClr val="tx1"/>
@@ -381,7 +175,7 @@
         <a:cs typeface="+mn-cs"/>
       </a:defRPr>
     </a:lvl1pPr>
-    <a:lvl2pPr marL="457200" algn="l" defTabSz="457200" rtl="0" eaLnBrk="1" latinLnBrk="0" hangingPunct="1">
+    <a:lvl2pPr marL="457200" algn="l" defTabSz="914400" rtl="0" eaLnBrk="1" latinLnBrk="0" hangingPunct="1">
       <a:defRPr sz="1200" kern="1200">
         <a:solidFill>
           <a:schemeClr val="tx1"/>
@@ -391,7 +185,7 @@
         <a:cs typeface="+mn-cs"/>
       </a:defRPr>
     </a:lvl2pPr>
-    <a:lvl3pPr marL="914400" algn="l" defTabSz="457200" rtl="0" eaLnBrk="1" latinLnBrk="0" hangingPunct="1">
+    <a:lvl3pPr marL="914400" algn="l" defTabSz="914400" rtl="0" eaLnBrk="1" latinLnBrk="0" hangingPunct="1">
       <a:defRPr sz="1200" kern="1200">
         <a:solidFill>
           <a:schemeClr val="tx1"/>
@@ -401,7 +195,7 @@
         <a:cs typeface="+mn-cs"/>
       </a:defRPr>
     </a:lvl3pPr>
-    <a:lvl4pPr marL="1371600" algn="l" defTabSz="457200" rtl="0" eaLnBrk="1" latinLnBrk="0" hangingPunct="1">
+    <a:lvl4pPr marL="1371600" algn="l" defTabSz="914400" rtl="0" eaLnBrk="1" latinLnBrk="0" hangingPunct="1">
       <a:defRPr sz="1200" kern="1200">
         <a:solidFill>
           <a:schemeClr val="tx1"/>
@@ -411,7 +205,7 @@
         <a:cs typeface="+mn-cs"/>
       </a:defRPr>
     </a:lvl4pPr>
-    <a:lvl5pPr marL="1828800" algn="l" defTabSz="457200" rtl="0" eaLnBrk="1" latinLnBrk="0" hangingPunct="1">
+    <a:lvl5pPr marL="1828800" algn="l" defTabSz="914400" rtl="0" eaLnBrk="1" latinLnBrk="0" hangingPunct="1">
       <a:defRPr sz="1200" kern="1200">
         <a:solidFill>
           <a:schemeClr val="tx1"/>
@@ -421,7 +215,7 @@
         <a:cs typeface="+mn-cs"/>
       </a:defRPr>
     </a:lvl5pPr>
-    <a:lvl6pPr marL="2286000" algn="l" defTabSz="457200" rtl="0" eaLnBrk="1" latinLnBrk="0" hangingPunct="1">
+    <a:lvl6pPr marL="2286000" algn="l" defTabSz="914400" rtl="0" eaLnBrk="1" latinLnBrk="0" hangingPunct="1">
       <a:defRPr sz="1200" kern="1200">
         <a:solidFill>
           <a:schemeClr val="tx1"/>
@@ -431,7 +225,7 @@
         <a:cs typeface="+mn-cs"/>
       </a:defRPr>
     </a:lvl6pPr>
-    <a:lvl7pPr marL="2743200" algn="l" defTabSz="457200" rtl="0" eaLnBrk="1" latinLnBrk="0" hangingPunct="1">
+    <a:lvl7pPr marL="2743200" algn="l" defTabSz="914400" rtl="0" eaLnBrk="1" latinLnBrk="0" hangingPunct="1">
       <a:defRPr sz="1200" kern="1200">
         <a:solidFill>
           <a:schemeClr val="tx1"/>
@@ -441,7 +235,7 @@
         <a:cs typeface="+mn-cs"/>
       </a:defRPr>
     </a:lvl7pPr>
-    <a:lvl8pPr marL="3200400" algn="l" defTabSz="457200" rtl="0" eaLnBrk="1" latinLnBrk="0" hangingPunct="1">
+    <a:lvl8pPr marL="3200400" algn="l" defTabSz="914400" rtl="0" eaLnBrk="1" latinLnBrk="0" hangingPunct="1">
       <a:defRPr sz="1200" kern="1200">
         <a:solidFill>
           <a:schemeClr val="tx1"/>
@@ -451,7 +245,7 @@
         <a:cs typeface="+mn-cs"/>
       </a:defRPr>
     </a:lvl8pPr>
-    <a:lvl9pPr marL="3657600" algn="l" defTabSz="457200" rtl="0" eaLnBrk="1" latinLnBrk="0" hangingPunct="1">
+    <a:lvl9pPr marL="3657600" algn="l" defTabSz="914400" rtl="0" eaLnBrk="1" latinLnBrk="0" hangingPunct="1">
       <a:defRPr sz="1200" kern="1200">
         <a:solidFill>
           <a:schemeClr val="tx1"/>
@@ -466,7 +260,7 @@
 </file>
 
 <file path=ppt/notesSlides/notesSlide1.xml><?xml version="1.0" encoding="utf-8"?>
-<p:notes xmlns:a="http://schemas.openxmlformats.org/drawingml/2006/main" xmlns:p="http://schemas.openxmlformats.org/presentationml/2006/main" xmlns:r="http://schemas.openxmlformats.org/officeDocument/2006/relationships">
+<p:notes xmlns:a="http://schemas.openxmlformats.org/drawingml/2006/main" xmlns:r="http://schemas.openxmlformats.org/officeDocument/2006/relationships" xmlns:p="http://schemas.openxmlformats.org/presentationml/2006/main">
   <p:cSld>
     <p:spTree>
       <p:nvGrpSpPr>
@@ -486,7 +280,7 @@
         <p:nvSpPr>
           <p:cNvPr id="2" name="Slide Image Placeholder 1"/>
           <p:cNvSpPr>
-            <a:spLocks noGrp="1"/>
+            <a:spLocks noGrp="1" noRot="1" noChangeAspect="1"/>
           </p:cNvSpPr>
           <p:nvPr>
             <p:ph type="sldImg" idx="2"/>
@@ -501,7 +295,7 @@
             <a:spLocks noGrp="1"/>
           </p:cNvSpPr>
           <p:nvPr>
-            <p:ph type="body" idx="3" sz="quarter"/>
+            <p:ph type="body" sz="quarter" idx="3"/>
           </p:nvPr>
         </p:nvSpPr>
         <p:spPr/>
@@ -522,7 +316,7 @@
             <a:spLocks noGrp="1"/>
           </p:cNvSpPr>
           <p:nvPr>
-            <p:ph type="sldNum" idx="5" sz="quarter"/>
+            <p:ph type="sldNum" sz="quarter" idx="5"/>
           </p:nvPr>
         </p:nvSpPr>
         <p:spPr/>
@@ -536,7 +330,7 @@
 </file>
 
 <file path=ppt/notesSlides/notesSlide2.xml><?xml version="1.0" encoding="utf-8"?>
-<p:notes xmlns:a="http://schemas.openxmlformats.org/drawingml/2006/main" xmlns:p="http://schemas.openxmlformats.org/presentationml/2006/main" xmlns:r="http://schemas.openxmlformats.org/officeDocument/2006/relationships">
+<p:notes xmlns:a="http://schemas.openxmlformats.org/drawingml/2006/main" xmlns:r="http://schemas.openxmlformats.org/officeDocument/2006/relationships" xmlns:p="http://schemas.openxmlformats.org/presentationml/2006/main">
   <p:cSld>
     <p:spTree>
       <p:nvGrpSpPr>
@@ -556,7 +350,7 @@
         <p:nvSpPr>
           <p:cNvPr id="2" name="Slide Image Placeholder 1"/>
           <p:cNvSpPr>
-            <a:spLocks noGrp="1"/>
+            <a:spLocks noGrp="1" noRot="1" noChangeAspect="1"/>
           </p:cNvSpPr>
           <p:nvPr>
             <p:ph type="sldImg" idx="2"/>
@@ -571,7 +365,7 @@
             <a:spLocks noGrp="1"/>
           </p:cNvSpPr>
           <p:nvPr>
-            <p:ph type="body" idx="3" sz="quarter"/>
+            <p:ph type="body" sz="quarter" idx="3"/>
           </p:nvPr>
         </p:nvSpPr>
         <p:spPr/>
@@ -592,7 +386,7 @@
             <a:spLocks noGrp="1"/>
           </p:cNvSpPr>
           <p:nvPr>
-            <p:ph type="sldNum" idx="5" sz="quarter"/>
+            <p:ph type="sldNum" sz="quarter" idx="5"/>
           </p:nvPr>
         </p:nvSpPr>
         <p:spPr/>
@@ -606,7 +400,7 @@
 </file>
 
 <file path=ppt/notesSlides/notesSlide3.xml><?xml version="1.0" encoding="utf-8"?>
-<p:notes xmlns:a="http://schemas.openxmlformats.org/drawingml/2006/main" xmlns:p="http://schemas.openxmlformats.org/presentationml/2006/main" xmlns:r="http://schemas.openxmlformats.org/officeDocument/2006/relationships">
+<p:notes xmlns:a="http://schemas.openxmlformats.org/drawingml/2006/main" xmlns:r="http://schemas.openxmlformats.org/officeDocument/2006/relationships" xmlns:p="http://schemas.openxmlformats.org/presentationml/2006/main">
   <p:cSld>
     <p:spTree>
       <p:nvGrpSpPr>
@@ -626,7 +420,7 @@
         <p:nvSpPr>
           <p:cNvPr id="2" name="Slide Image Placeholder 1"/>
           <p:cNvSpPr>
-            <a:spLocks noGrp="1"/>
+            <a:spLocks noGrp="1" noRot="1" noChangeAspect="1"/>
           </p:cNvSpPr>
           <p:nvPr>
             <p:ph type="sldImg" idx="2"/>
@@ -641,7 +435,7 @@
             <a:spLocks noGrp="1"/>
           </p:cNvSpPr>
           <p:nvPr>
-            <p:ph type="body" idx="3" sz="quarter"/>
+            <p:ph type="body" sz="quarter" idx="3"/>
           </p:nvPr>
         </p:nvSpPr>
         <p:spPr/>
@@ -662,7 +456,7 @@
             <a:spLocks noGrp="1"/>
           </p:cNvSpPr>
           <p:nvPr>
-            <p:ph type="sldNum" idx="5" sz="quarter"/>
+            <p:ph type="sldNum" sz="quarter" idx="5"/>
           </p:nvPr>
         </p:nvSpPr>
         <p:spPr/>
@@ -676,7 +470,7 @@
 </file>
 
 <file path=ppt/notesSlides/notesSlide4.xml><?xml version="1.0" encoding="utf-8"?>
-<p:notes xmlns:a="http://schemas.openxmlformats.org/drawingml/2006/main" xmlns:p="http://schemas.openxmlformats.org/presentationml/2006/main" xmlns:r="http://schemas.openxmlformats.org/officeDocument/2006/relationships">
+<p:notes xmlns:a="http://schemas.openxmlformats.org/drawingml/2006/main" xmlns:r="http://schemas.openxmlformats.org/officeDocument/2006/relationships" xmlns:p="http://schemas.openxmlformats.org/presentationml/2006/main">
   <p:cSld>
     <p:spTree>
       <p:nvGrpSpPr>
@@ -696,7 +490,7 @@
         <p:nvSpPr>
           <p:cNvPr id="2" name="Slide Image Placeholder 1"/>
           <p:cNvSpPr>
-            <a:spLocks noGrp="1"/>
+            <a:spLocks noGrp="1" noRot="1" noChangeAspect="1"/>
           </p:cNvSpPr>
           <p:nvPr>
             <p:ph type="sldImg" idx="2"/>
@@ -711,7 +505,7 @@
             <a:spLocks noGrp="1"/>
           </p:cNvSpPr>
           <p:nvPr>
-            <p:ph type="body" idx="3" sz="quarter"/>
+            <p:ph type="body" sz="quarter" idx="3"/>
           </p:nvPr>
         </p:nvSpPr>
         <p:spPr/>
@@ -732,7 +526,7 @@
             <a:spLocks noGrp="1"/>
           </p:cNvSpPr>
           <p:nvPr>
-            <p:ph type="sldNum" idx="5" sz="quarter"/>
+            <p:ph type="sldNum" sz="quarter" idx="5"/>
           </p:nvPr>
         </p:nvSpPr>
         <p:spPr/>
@@ -746,7 +540,7 @@
 </file>
 
 <file path=ppt/notesSlides/notesSlide5.xml><?xml version="1.0" encoding="utf-8"?>
-<p:notes xmlns:a="http://schemas.openxmlformats.org/drawingml/2006/main" xmlns:p="http://schemas.openxmlformats.org/presentationml/2006/main" xmlns:r="http://schemas.openxmlformats.org/officeDocument/2006/relationships">
+<p:notes xmlns:a="http://schemas.openxmlformats.org/drawingml/2006/main" xmlns:r="http://schemas.openxmlformats.org/officeDocument/2006/relationships" xmlns:p="http://schemas.openxmlformats.org/presentationml/2006/main">
   <p:cSld>
     <p:spTree>
       <p:nvGrpSpPr>
@@ -766,7 +560,7 @@
         <p:nvSpPr>
           <p:cNvPr id="2" name="Slide Image Placeholder 1"/>
           <p:cNvSpPr>
-            <a:spLocks noGrp="1"/>
+            <a:spLocks noGrp="1" noRot="1" noChangeAspect="1"/>
           </p:cNvSpPr>
           <p:nvPr>
             <p:ph type="sldImg" idx="2"/>
@@ -781,7 +575,7 @@
             <a:spLocks noGrp="1"/>
           </p:cNvSpPr>
           <p:nvPr>
-            <p:ph type="body" idx="3" sz="quarter"/>
+            <p:ph type="body" sz="quarter" idx="3"/>
           </p:nvPr>
         </p:nvSpPr>
         <p:spPr/>
@@ -802,7 +596,7 @@
             <a:spLocks noGrp="1"/>
           </p:cNvSpPr>
           <p:nvPr>
-            <p:ph type="sldNum" idx="5" sz="quarter"/>
+            <p:ph type="sldNum" sz="quarter" idx="5"/>
           </p:nvPr>
         </p:nvSpPr>
         <p:spPr/>
@@ -816,7 +610,7 @@
 </file>
 
 <file path=ppt/notesSlides/notesSlide6.xml><?xml version="1.0" encoding="utf-8"?>
-<p:notes xmlns:a="http://schemas.openxmlformats.org/drawingml/2006/main" xmlns:p="http://schemas.openxmlformats.org/presentationml/2006/main" xmlns:r="http://schemas.openxmlformats.org/officeDocument/2006/relationships">
+<p:notes xmlns:a="http://schemas.openxmlformats.org/drawingml/2006/main" xmlns:r="http://schemas.openxmlformats.org/officeDocument/2006/relationships" xmlns:p="http://schemas.openxmlformats.org/presentationml/2006/main">
   <p:cSld>
     <p:spTree>
       <p:nvGrpSpPr>
@@ -836,7 +630,7 @@
         <p:nvSpPr>
           <p:cNvPr id="2" name="Slide Image Placeholder 1"/>
           <p:cNvSpPr>
-            <a:spLocks noGrp="1"/>
+            <a:spLocks noGrp="1" noRot="1" noChangeAspect="1"/>
           </p:cNvSpPr>
           <p:nvPr>
             <p:ph type="sldImg" idx="2"/>
@@ -851,7 +645,7 @@
             <a:spLocks noGrp="1"/>
           </p:cNvSpPr>
           <p:nvPr>
-            <p:ph type="body" idx="3" sz="quarter"/>
+            <p:ph type="body" sz="quarter" idx="3"/>
           </p:nvPr>
         </p:nvSpPr>
         <p:spPr/>
@@ -872,7 +666,7 @@
             <a:spLocks noGrp="1"/>
           </p:cNvSpPr>
           <p:nvPr>
-            <p:ph type="sldNum" idx="5" sz="quarter"/>
+            <p:ph type="sldNum" sz="quarter" idx="5"/>
           </p:nvPr>
         </p:nvSpPr>
         <p:spPr/>
@@ -886,7 +680,7 @@
 </file>
 
 <file path=ppt/notesSlides/notesSlide7.xml><?xml version="1.0" encoding="utf-8"?>
-<p:notes xmlns:a="http://schemas.openxmlformats.org/drawingml/2006/main" xmlns:p="http://schemas.openxmlformats.org/presentationml/2006/main" xmlns:r="http://schemas.openxmlformats.org/officeDocument/2006/relationships">
+<p:notes xmlns:a="http://schemas.openxmlformats.org/drawingml/2006/main" xmlns:r="http://schemas.openxmlformats.org/officeDocument/2006/relationships" xmlns:p="http://schemas.openxmlformats.org/presentationml/2006/main">
   <p:cSld>
     <p:spTree>
       <p:nvGrpSpPr>
@@ -906,7 +700,7 @@
         <p:nvSpPr>
           <p:cNvPr id="2" name="Slide Image Placeholder 1"/>
           <p:cNvSpPr>
-            <a:spLocks noGrp="1"/>
+            <a:spLocks noGrp="1" noRot="1" noChangeAspect="1"/>
           </p:cNvSpPr>
           <p:nvPr>
             <p:ph type="sldImg" idx="2"/>
@@ -921,7 +715,7 @@
             <a:spLocks noGrp="1"/>
           </p:cNvSpPr>
           <p:nvPr>
-            <p:ph type="body" idx="3" sz="quarter"/>
+            <p:ph type="body" sz="quarter" idx="3"/>
           </p:nvPr>
         </p:nvSpPr>
         <p:spPr/>
@@ -942,7 +736,7 @@
             <a:spLocks noGrp="1"/>
           </p:cNvSpPr>
           <p:nvPr>
-            <p:ph type="sldNum" idx="5" sz="quarter"/>
+            <p:ph type="sldNum" sz="quarter" idx="5"/>
           </p:nvPr>
         </p:nvSpPr>
         <p:spPr/>
@@ -956,7 +750,7 @@
 </file>
 
 <file path=ppt/notesSlides/notesSlide8.xml><?xml version="1.0" encoding="utf-8"?>
-<p:notes xmlns:a="http://schemas.openxmlformats.org/drawingml/2006/main" xmlns:p="http://schemas.openxmlformats.org/presentationml/2006/main" xmlns:r="http://schemas.openxmlformats.org/officeDocument/2006/relationships">
+<p:notes xmlns:a="http://schemas.openxmlformats.org/drawingml/2006/main" xmlns:r="http://schemas.openxmlformats.org/officeDocument/2006/relationships" xmlns:p="http://schemas.openxmlformats.org/presentationml/2006/main">
   <p:cSld>
     <p:spTree>
       <p:nvGrpSpPr>
@@ -976,7 +770,7 @@
         <p:nvSpPr>
           <p:cNvPr id="2" name="Slide Image Placeholder 1"/>
           <p:cNvSpPr>
-            <a:spLocks noGrp="1"/>
+            <a:spLocks noGrp="1" noRot="1" noChangeAspect="1"/>
           </p:cNvSpPr>
           <p:nvPr>
             <p:ph type="sldImg" idx="2"/>
@@ -991,7 +785,7 @@
             <a:spLocks noGrp="1"/>
           </p:cNvSpPr>
           <p:nvPr>
-            <p:ph type="body" idx="3" sz="quarter"/>
+            <p:ph type="body" sz="quarter" idx="3"/>
           </p:nvPr>
         </p:nvSpPr>
         <p:spPr/>
@@ -1012,7 +806,7 @@
             <a:spLocks noGrp="1"/>
           </p:cNvSpPr>
           <p:nvPr>
-            <p:ph type="sldNum" idx="5" sz="quarter"/>
+            <p:ph type="sldNum" sz="quarter" idx="5"/>
           </p:nvPr>
         </p:nvSpPr>
         <p:spPr/>
@@ -1026,7 +820,7 @@
 </file>
 
 <file path=ppt/notesSlides/notesSlide9.xml><?xml version="1.0" encoding="utf-8"?>
-<p:notes xmlns:a="http://schemas.openxmlformats.org/drawingml/2006/main" xmlns:p="http://schemas.openxmlformats.org/presentationml/2006/main" xmlns:r="http://schemas.openxmlformats.org/officeDocument/2006/relationships">
+<p:notes xmlns:a="http://schemas.openxmlformats.org/drawingml/2006/main" xmlns:r="http://schemas.openxmlformats.org/officeDocument/2006/relationships" xmlns:p="http://schemas.openxmlformats.org/presentationml/2006/main">
   <p:cSld>
     <p:spTree>
       <p:nvGrpSpPr>
@@ -1046,7 +840,7 @@
         <p:nvSpPr>
           <p:cNvPr id="2" name="Slide Image Placeholder 1"/>
           <p:cNvSpPr>
-            <a:spLocks noGrp="1"/>
+            <a:spLocks noGrp="1" noRot="1" noChangeAspect="1"/>
           </p:cNvSpPr>
           <p:nvPr>
             <p:ph type="sldImg" idx="2"/>
@@ -1061,7 +855,7 @@
             <a:spLocks noGrp="1"/>
           </p:cNvSpPr>
           <p:nvPr>
-            <p:ph type="body" idx="3" sz="quarter"/>
+            <p:ph type="body" sz="quarter" idx="3"/>
           </p:nvPr>
         </p:nvSpPr>
         <p:spPr/>
@@ -1082,7 +876,7 @@
             <a:spLocks noGrp="1"/>
           </p:cNvSpPr>
           <p:nvPr>
-            <p:ph type="sldNum" idx="5" sz="quarter"/>
+            <p:ph type="sldNum" sz="quarter" idx="5"/>
           </p:nvPr>
         </p:nvSpPr>
         <p:spPr/>
@@ -1133,10 +927,9 @@
           <a:lstStyle/>
           <a:p>
             <a:r>
-              <a:rPr lang="en-US" smtClean="0"/>
+              <a:rPr lang="en-US"/>
               <a:t>Click to edit Master title style</a:t>
             </a:r>
-            <a:endParaRPr lang="en-US"/>
           </a:p>
         </p:txBody>
       </p:sp>
@@ -1252,10 +1045,9 @@
           </a:lstStyle>
           <a:p>
             <a:r>
-              <a:rPr lang="en-US" smtClean="0"/>
+              <a:rPr lang="en-US"/>
               <a:t>Click to edit Master subtitle style</a:t>
             </a:r>
-            <a:endParaRPr lang="en-US"/>
           </a:p>
         </p:txBody>
       </p:sp>
@@ -1276,7 +1068,7 @@
           <a:p>
             <a:fld id="{5BCAD085-E8A6-8845-BD4E-CB4CCA059FC4}" type="datetimeFigureOut">
               <a:rPr lang="en-US" smtClean="0"/>
-              <a:t>1/27/13</a:t>
+              <a:t>10/28/26</a:t>
             </a:fld>
             <a:endParaRPr lang="en-US"/>
           </a:p>
@@ -1370,10 +1162,9 @@
           <a:lstStyle/>
           <a:p>
             <a:r>
-              <a:rPr lang="en-US" smtClean="0"/>
+              <a:rPr lang="en-US"/>
               <a:t>Click to edit Master title style</a:t>
             </a:r>
-            <a:endParaRPr lang="en-US"/>
           </a:p>
         </p:txBody>
       </p:sp>
@@ -1394,38 +1185,37 @@
           <a:p>
             <a:pPr lvl="0"/>
             <a:r>
-              <a:rPr lang="en-US" smtClean="0"/>
+              <a:rPr lang="en-US"/>
               <a:t>Click to edit Master text styles</a:t>
             </a:r>
           </a:p>
           <a:p>
             <a:pPr lvl="1"/>
             <a:r>
-              <a:rPr lang="en-US" smtClean="0"/>
+              <a:rPr lang="en-US"/>
               <a:t>Second level</a:t>
             </a:r>
           </a:p>
           <a:p>
             <a:pPr lvl="2"/>
             <a:r>
-              <a:rPr lang="en-US" smtClean="0"/>
+              <a:rPr lang="en-US"/>
               <a:t>Third level</a:t>
             </a:r>
           </a:p>
           <a:p>
             <a:pPr lvl="3"/>
             <a:r>
-              <a:rPr lang="en-US" smtClean="0"/>
+              <a:rPr lang="en-US"/>
               <a:t>Fourth level</a:t>
             </a:r>
           </a:p>
           <a:p>
             <a:pPr lvl="4"/>
             <a:r>
-              <a:rPr lang="en-US" smtClean="0"/>
+              <a:rPr lang="en-US"/>
               <a:t>Fifth level</a:t>
             </a:r>
-            <a:endParaRPr lang="en-US"/>
           </a:p>
         </p:txBody>
       </p:sp>
@@ -1446,7 +1236,7 @@
           <a:p>
             <a:fld id="{5BCAD085-E8A6-8845-BD4E-CB4CCA059FC4}" type="datetimeFigureOut">
               <a:rPr lang="en-US" smtClean="0"/>
-              <a:t>1/27/13</a:t>
+              <a:t>10/28/26</a:t>
             </a:fld>
             <a:endParaRPr lang="en-US"/>
           </a:p>
@@ -1545,10 +1335,9 @@
           <a:lstStyle/>
           <a:p>
             <a:r>
-              <a:rPr lang="en-US" smtClean="0"/>
+              <a:rPr lang="en-US"/>
               <a:t>Click to edit Master title style</a:t>
             </a:r>
-            <a:endParaRPr lang="en-US"/>
           </a:p>
         </p:txBody>
       </p:sp>
@@ -1574,38 +1363,37 @@
           <a:p>
             <a:pPr lvl="0"/>
             <a:r>
-              <a:rPr lang="en-US" smtClean="0"/>
+              <a:rPr lang="en-US"/>
               <a:t>Click to edit Master text styles</a:t>
             </a:r>
           </a:p>
           <a:p>
             <a:pPr lvl="1"/>
             <a:r>
-              <a:rPr lang="en-US" smtClean="0"/>
+              <a:rPr lang="en-US"/>
               <a:t>Second level</a:t>
             </a:r>
           </a:p>
           <a:p>
             <a:pPr lvl="2"/>
             <a:r>
-              <a:rPr lang="en-US" smtClean="0"/>
+              <a:rPr lang="en-US"/>
               <a:t>Third level</a:t>
             </a:r>
           </a:p>
           <a:p>
             <a:pPr lvl="3"/>
             <a:r>
-              <a:rPr lang="en-US" smtClean="0"/>
+              <a:rPr lang="en-US"/>
               <a:t>Fourth level</a:t>
             </a:r>
           </a:p>
           <a:p>
             <a:pPr lvl="4"/>
             <a:r>
-              <a:rPr lang="en-US" smtClean="0"/>
+              <a:rPr lang="en-US"/>
               <a:t>Fifth level</a:t>
             </a:r>
-            <a:endParaRPr lang="en-US"/>
           </a:p>
         </p:txBody>
       </p:sp>
@@ -1626,7 +1414,7 @@
           <a:p>
             <a:fld id="{5BCAD085-E8A6-8845-BD4E-CB4CCA059FC4}" type="datetimeFigureOut">
               <a:rPr lang="en-US" smtClean="0"/>
-              <a:t>1/27/13</a:t>
+              <a:t>10/28/26</a:t>
             </a:fld>
             <a:endParaRPr lang="en-US"/>
           </a:p>
@@ -1720,10 +1508,9 @@
           <a:lstStyle/>
           <a:p>
             <a:r>
-              <a:rPr lang="en-US" smtClean="0"/>
+              <a:rPr lang="en-US"/>
               <a:t>Click to edit Master title style</a:t>
             </a:r>
-            <a:endParaRPr lang="en-US"/>
           </a:p>
         </p:txBody>
       </p:sp>
@@ -1744,38 +1531,37 @@
           <a:p>
             <a:pPr lvl="0"/>
             <a:r>
-              <a:rPr lang="en-US" smtClean="0"/>
+              <a:rPr lang="en-US"/>
               <a:t>Click to edit Master text styles</a:t>
             </a:r>
           </a:p>
           <a:p>
             <a:pPr lvl="1"/>
             <a:r>
-              <a:rPr lang="en-US" smtClean="0"/>
+              <a:rPr lang="en-US"/>
               <a:t>Second level</a:t>
             </a:r>
           </a:p>
           <a:p>
             <a:pPr lvl="2"/>
             <a:r>
-              <a:rPr lang="en-US" smtClean="0"/>
+              <a:rPr lang="en-US"/>
               <a:t>Third level</a:t>
             </a:r>
           </a:p>
           <a:p>
             <a:pPr lvl="3"/>
             <a:r>
-              <a:rPr lang="en-US" smtClean="0"/>
+              <a:rPr lang="en-US"/>
               <a:t>Fourth level</a:t>
             </a:r>
           </a:p>
           <a:p>
             <a:pPr lvl="4"/>
             <a:r>
-              <a:rPr lang="en-US" smtClean="0"/>
+              <a:rPr lang="en-US"/>
               <a:t>Fifth level</a:t>
             </a:r>
-            <a:endParaRPr lang="en-US"/>
           </a:p>
         </p:txBody>
       </p:sp>
@@ -1796,7 +1582,7 @@
           <a:p>
             <a:fld id="{5BCAD085-E8A6-8845-BD4E-CB4CCA059FC4}" type="datetimeFigureOut">
               <a:rPr lang="en-US" smtClean="0"/>
-              <a:t>1/27/13</a:t>
+              <a:t>10/28/26</a:t>
             </a:fld>
             <a:endParaRPr lang="en-US"/>
           </a:p>
@@ -1899,10 +1685,9 @@
           </a:lstStyle>
           <a:p>
             <a:r>
-              <a:rPr lang="en-US" smtClean="0"/>
+              <a:rPr lang="en-US"/>
               <a:t>Click to edit Master title style</a:t>
             </a:r>
-            <a:endParaRPr lang="en-US"/>
           </a:p>
         </p:txBody>
       </p:sp>
@@ -2019,7 +1804,7 @@
           <a:p>
             <a:pPr lvl="0"/>
             <a:r>
-              <a:rPr lang="en-US" smtClean="0"/>
+              <a:rPr lang="en-US"/>
               <a:t>Click to edit Master text styles</a:t>
             </a:r>
           </a:p>
@@ -2042,7 +1827,7 @@
           <a:p>
             <a:fld id="{5BCAD085-E8A6-8845-BD4E-CB4CCA059FC4}" type="datetimeFigureOut">
               <a:rPr lang="en-US" smtClean="0"/>
-              <a:t>1/27/13</a:t>
+              <a:t>10/28/26</a:t>
             </a:fld>
             <a:endParaRPr lang="en-US"/>
           </a:p>
@@ -2136,10 +1921,9 @@
           <a:lstStyle/>
           <a:p>
             <a:r>
-              <a:rPr lang="en-US" smtClean="0"/>
+              <a:rPr lang="en-US"/>
               <a:t>Click to edit Master title style</a:t>
             </a:r>
-            <a:endParaRPr lang="en-US"/>
           </a:p>
         </p:txBody>
       </p:sp>
@@ -2193,38 +1977,37 @@
           <a:p>
             <a:pPr lvl="0"/>
             <a:r>
-              <a:rPr lang="en-US" smtClean="0"/>
+              <a:rPr lang="en-US"/>
               <a:t>Click to edit Master text styles</a:t>
             </a:r>
           </a:p>
           <a:p>
             <a:pPr lvl="1"/>
             <a:r>
-              <a:rPr lang="en-US" smtClean="0"/>
+              <a:rPr lang="en-US"/>
               <a:t>Second level</a:t>
             </a:r>
           </a:p>
           <a:p>
             <a:pPr lvl="2"/>
             <a:r>
-              <a:rPr lang="en-US" smtClean="0"/>
+              <a:rPr lang="en-US"/>
               <a:t>Third level</a:t>
             </a:r>
           </a:p>
           <a:p>
             <a:pPr lvl="3"/>
             <a:r>
-              <a:rPr lang="en-US" smtClean="0"/>
+              <a:rPr lang="en-US"/>
               <a:t>Fourth level</a:t>
             </a:r>
           </a:p>
           <a:p>
             <a:pPr lvl="4"/>
             <a:r>
-              <a:rPr lang="en-US" smtClean="0"/>
+              <a:rPr lang="en-US"/>
               <a:t>Fifth level</a:t>
             </a:r>
-            <a:endParaRPr lang="en-US"/>
           </a:p>
         </p:txBody>
       </p:sp>
@@ -2278,38 +2061,37 @@
           <a:p>
             <a:pPr lvl="0"/>
             <a:r>
-              <a:rPr lang="en-US" smtClean="0"/>
+              <a:rPr lang="en-US"/>
               <a:t>Click to edit Master text styles</a:t>
             </a:r>
           </a:p>
           <a:p>
             <a:pPr lvl="1"/>
             <a:r>
-              <a:rPr lang="en-US" smtClean="0"/>
+              <a:rPr lang="en-US"/>
               <a:t>Second level</a:t>
             </a:r>
           </a:p>
           <a:p>
             <a:pPr lvl="2"/>
             <a:r>
-              <a:rPr lang="en-US" smtClean="0"/>
+              <a:rPr lang="en-US"/>
               <a:t>Third level</a:t>
             </a:r>
           </a:p>
           <a:p>
             <a:pPr lvl="3"/>
             <a:r>
-              <a:rPr lang="en-US" smtClean="0"/>
+              <a:rPr lang="en-US"/>
               <a:t>Fourth level</a:t>
             </a:r>
           </a:p>
           <a:p>
             <a:pPr lvl="4"/>
             <a:r>
-              <a:rPr lang="en-US" smtClean="0"/>
+              <a:rPr lang="en-US"/>
               <a:t>Fifth level</a:t>
             </a:r>
-            <a:endParaRPr lang="en-US"/>
           </a:p>
         </p:txBody>
       </p:sp>
@@ -2330,7 +2112,7 @@
           <a:p>
             <a:fld id="{5BCAD085-E8A6-8845-BD4E-CB4CCA059FC4}" type="datetimeFigureOut">
               <a:rPr lang="en-US" smtClean="0"/>
-              <a:t>1/27/13</a:t>
+              <a:t>10/28/26</a:t>
             </a:fld>
             <a:endParaRPr lang="en-US"/>
           </a:p>
@@ -2428,10 +2210,9 @@
           </a:lstStyle>
           <a:p>
             <a:r>
-              <a:rPr lang="en-US" smtClean="0"/>
+              <a:rPr lang="en-US"/>
               <a:t>Click to edit Master title style</a:t>
             </a:r>
-            <a:endParaRPr lang="en-US"/>
           </a:p>
         </p:txBody>
       </p:sp>
@@ -2494,7 +2275,7 @@
           <a:p>
             <a:pPr lvl="0"/>
             <a:r>
-              <a:rPr lang="en-US" smtClean="0"/>
+              <a:rPr lang="en-US"/>
               <a:t>Click to edit Master text styles</a:t>
             </a:r>
           </a:p>
@@ -2550,38 +2331,37 @@
           <a:p>
             <a:pPr lvl="0"/>
             <a:r>
-              <a:rPr lang="en-US" smtClean="0"/>
+              <a:rPr lang="en-US"/>
               <a:t>Click to edit Master text styles</a:t>
             </a:r>
           </a:p>
           <a:p>
             <a:pPr lvl="1"/>
             <a:r>
-              <a:rPr lang="en-US" smtClean="0"/>
+              <a:rPr lang="en-US"/>
               <a:t>Second level</a:t>
             </a:r>
           </a:p>
           <a:p>
             <a:pPr lvl="2"/>
             <a:r>
-              <a:rPr lang="en-US" smtClean="0"/>
+              <a:rPr lang="en-US"/>
               <a:t>Third level</a:t>
             </a:r>
           </a:p>
           <a:p>
             <a:pPr lvl="3"/>
             <a:r>
-              <a:rPr lang="en-US" smtClean="0"/>
+              <a:rPr lang="en-US"/>
               <a:t>Fourth level</a:t>
             </a:r>
           </a:p>
           <a:p>
             <a:pPr lvl="4"/>
             <a:r>
-              <a:rPr lang="en-US" smtClean="0"/>
+              <a:rPr lang="en-US"/>
               <a:t>Fifth level</a:t>
             </a:r>
-            <a:endParaRPr lang="en-US"/>
           </a:p>
         </p:txBody>
       </p:sp>
@@ -2644,7 +2424,7 @@
           <a:p>
             <a:pPr lvl="0"/>
             <a:r>
-              <a:rPr lang="en-US" smtClean="0"/>
+              <a:rPr lang="en-US"/>
               <a:t>Click to edit Master text styles</a:t>
             </a:r>
           </a:p>
@@ -2700,38 +2480,37 @@
           <a:p>
             <a:pPr lvl="0"/>
             <a:r>
-              <a:rPr lang="en-US" smtClean="0"/>
+              <a:rPr lang="en-US"/>
               <a:t>Click to edit Master text styles</a:t>
             </a:r>
           </a:p>
           <a:p>
             <a:pPr lvl="1"/>
             <a:r>
-              <a:rPr lang="en-US" smtClean="0"/>
+              <a:rPr lang="en-US"/>
               <a:t>Second level</a:t>
             </a:r>
           </a:p>
           <a:p>
             <a:pPr lvl="2"/>
             <a:r>
-              <a:rPr lang="en-US" smtClean="0"/>
+              <a:rPr lang="en-US"/>
               <a:t>Third level</a:t>
             </a:r>
           </a:p>
           <a:p>
             <a:pPr lvl="3"/>
             <a:r>
-              <a:rPr lang="en-US" smtClean="0"/>
+              <a:rPr lang="en-US"/>
               <a:t>Fourth level</a:t>
             </a:r>
           </a:p>
           <a:p>
             <a:pPr lvl="4"/>
             <a:r>
-              <a:rPr lang="en-US" smtClean="0"/>
+              <a:rPr lang="en-US"/>
               <a:t>Fifth level</a:t>
             </a:r>
-            <a:endParaRPr lang="en-US"/>
           </a:p>
         </p:txBody>
       </p:sp>
@@ -2752,7 +2531,7 @@
           <a:p>
             <a:fld id="{5BCAD085-E8A6-8845-BD4E-CB4CCA059FC4}" type="datetimeFigureOut">
               <a:rPr lang="en-US" smtClean="0"/>
-              <a:t>1/27/13</a:t>
+              <a:t>10/28/26</a:t>
             </a:fld>
             <a:endParaRPr lang="en-US"/>
           </a:p>
@@ -2846,10 +2625,9 @@
           <a:lstStyle/>
           <a:p>
             <a:r>
-              <a:rPr lang="en-US" smtClean="0"/>
+              <a:rPr lang="en-US"/>
               <a:t>Click to edit Master title style</a:t>
             </a:r>
-            <a:endParaRPr lang="en-US"/>
           </a:p>
         </p:txBody>
       </p:sp>
@@ -2870,7 +2648,7 @@
           <a:p>
             <a:fld id="{5BCAD085-E8A6-8845-BD4E-CB4CCA059FC4}" type="datetimeFigureOut">
               <a:rPr lang="en-US" smtClean="0"/>
-              <a:t>1/27/13</a:t>
+              <a:t>10/28/26</a:t>
             </a:fld>
             <a:endParaRPr lang="en-US"/>
           </a:p>
@@ -2965,7 +2743,7 @@
           <a:p>
             <a:fld id="{5BCAD085-E8A6-8845-BD4E-CB4CCA059FC4}" type="datetimeFigureOut">
               <a:rPr lang="en-US" smtClean="0"/>
-              <a:t>1/27/13</a:t>
+              <a:t>10/28/26</a:t>
             </a:fld>
             <a:endParaRPr lang="en-US"/>
           </a:p>
@@ -3068,10 +2846,9 @@
           </a:lstStyle>
           <a:p>
             <a:r>
-              <a:rPr lang="en-US" smtClean="0"/>
+              <a:rPr lang="en-US"/>
               <a:t>Click to edit Master title style</a:t>
             </a:r>
-            <a:endParaRPr lang="en-US"/>
           </a:p>
         </p:txBody>
       </p:sp>
@@ -3125,38 +2902,37 @@
           <a:p>
             <a:pPr lvl="0"/>
             <a:r>
-              <a:rPr lang="en-US" smtClean="0"/>
+              <a:rPr lang="en-US"/>
               <a:t>Click to edit Master text styles</a:t>
             </a:r>
           </a:p>
           <a:p>
             <a:pPr lvl="1"/>
             <a:r>
-              <a:rPr lang="en-US" smtClean="0"/>
+              <a:rPr lang="en-US"/>
               <a:t>Second level</a:t>
             </a:r>
           </a:p>
           <a:p>
             <a:pPr lvl="2"/>
             <a:r>
-              <a:rPr lang="en-US" smtClean="0"/>
+              <a:rPr lang="en-US"/>
               <a:t>Third level</a:t>
             </a:r>
           </a:p>
           <a:p>
             <a:pPr lvl="3"/>
             <a:r>
-              <a:rPr lang="en-US" smtClean="0"/>
+              <a:rPr lang="en-US"/>
               <a:t>Fourth level</a:t>
             </a:r>
           </a:p>
           <a:p>
             <a:pPr lvl="4"/>
             <a:r>
-              <a:rPr lang="en-US" smtClean="0"/>
+              <a:rPr lang="en-US"/>
               <a:t>Fifth level</a:t>
             </a:r>
-            <a:endParaRPr lang="en-US"/>
           </a:p>
         </p:txBody>
       </p:sp>
@@ -3219,7 +2995,7 @@
           <a:p>
             <a:pPr lvl="0"/>
             <a:r>
-              <a:rPr lang="en-US" smtClean="0"/>
+              <a:rPr lang="en-US"/>
               <a:t>Click to edit Master text styles</a:t>
             </a:r>
           </a:p>
@@ -3242,7 +3018,7 @@
           <a:p>
             <a:fld id="{5BCAD085-E8A6-8845-BD4E-CB4CCA059FC4}" type="datetimeFigureOut">
               <a:rPr lang="en-US" smtClean="0"/>
-              <a:t>1/27/13</a:t>
+              <a:t>10/28/26</a:t>
             </a:fld>
             <a:endParaRPr lang="en-US"/>
           </a:p>
@@ -3345,10 +3121,9 @@
           </a:lstStyle>
           <a:p>
             <a:r>
-              <a:rPr lang="en-US" smtClean="0"/>
+              <a:rPr lang="en-US"/>
               <a:t>Click to edit Master title style</a:t>
             </a:r>
-            <a:endParaRPr lang="en-US"/>
           </a:p>
         </p:txBody>
       </p:sp>
@@ -3472,7 +3247,7 @@
           <a:p>
             <a:pPr lvl="0"/>
             <a:r>
-              <a:rPr lang="en-US" smtClean="0"/>
+              <a:rPr lang="en-US"/>
               <a:t>Click to edit Master text styles</a:t>
             </a:r>
           </a:p>
@@ -3495,7 +3270,7 @@
           <a:p>
             <a:fld id="{5BCAD085-E8A6-8845-BD4E-CB4CCA059FC4}" type="datetimeFigureOut">
               <a:rPr lang="en-US" smtClean="0"/>
-              <a:t>1/27/13</a:t>
+              <a:t>10/28/26</a:t>
             </a:fld>
             <a:endParaRPr lang="en-US"/>
           </a:p>
@@ -3604,10 +3379,9 @@
           <a:lstStyle/>
           <a:p>
             <a:r>
-              <a:rPr lang="en-US" smtClean="0"/>
+              <a:rPr lang="en-US"/>
               <a:t>Click to edit Master title style</a:t>
             </a:r>
-            <a:endParaRPr lang="en-US"/>
           </a:p>
         </p:txBody>
       </p:sp>
@@ -3638,38 +3412,37 @@
           <a:p>
             <a:pPr lvl="0"/>
             <a:r>
-              <a:rPr lang="en-US" smtClean="0"/>
+              <a:rPr lang="en-US"/>
               <a:t>Click to edit Master text styles</a:t>
             </a:r>
           </a:p>
           <a:p>
             <a:pPr lvl="1"/>
             <a:r>
-              <a:rPr lang="en-US" smtClean="0"/>
+              <a:rPr lang="en-US"/>
               <a:t>Second level</a:t>
             </a:r>
           </a:p>
           <a:p>
             <a:pPr lvl="2"/>
             <a:r>
-              <a:rPr lang="en-US" smtClean="0"/>
+              <a:rPr lang="en-US"/>
               <a:t>Third level</a:t>
             </a:r>
           </a:p>
           <a:p>
             <a:pPr lvl="3"/>
             <a:r>
-              <a:rPr lang="en-US" smtClean="0"/>
+              <a:rPr lang="en-US"/>
               <a:t>Fourth level</a:t>
             </a:r>
           </a:p>
           <a:p>
             <a:pPr lvl="4"/>
             <a:r>
-              <a:rPr lang="en-US" smtClean="0"/>
+              <a:rPr lang="en-US"/>
               <a:t>Fifth level</a:t>
             </a:r>
-            <a:endParaRPr lang="en-US"/>
           </a:p>
         </p:txBody>
       </p:sp>
@@ -3708,7 +3481,7 @@
           <a:p>
             <a:fld id="{5BCAD085-E8A6-8845-BD4E-CB4CCA059FC4}" type="datetimeFigureOut">
               <a:rPr lang="en-US" smtClean="0"/>
-              <a:t>1/27/13</a:t>
+              <a:t>10/28/26</a:t>
             </a:fld>
             <a:endParaRPr lang="en-US"/>
           </a:p>
@@ -4067,7 +3840,7 @@
 </file>
 
 <file path=ppt/slides/slide1.xml><?xml version="1.0" encoding="utf-8"?>
-<p:sld xmlns:a="http://schemas.openxmlformats.org/drawingml/2006/main" xmlns:p="http://schemas.openxmlformats.org/presentationml/2006/main" xmlns:r="http://schemas.openxmlformats.org/officeDocument/2006/relationships">
+<p:sld xmlns:a="http://schemas.openxmlformats.org/drawingml/2006/main" xmlns:r="http://schemas.openxmlformats.org/officeDocument/2006/relationships" xmlns:p="http://schemas.openxmlformats.org/presentationml/2006/main">
   <p:cSld>
     <p:spTree>
       <p:nvGrpSpPr>
@@ -4075,7 +3848,14 @@
         <p:cNvGrpSpPr/>
         <p:nvPr/>
       </p:nvGrpSpPr>
-      <p:grpSpPr/>
+      <p:grpSpPr>
+        <a:xfrm>
+          <a:off x="0" y="0"/>
+          <a:ext cx="0" cy="0"/>
+          <a:chOff x="0" y="0"/>
+          <a:chExt cx="0" cy="0"/>
+        </a:xfrm>
+      </p:grpSpPr>
       <p:sp>
         <p:nvSpPr>
           <p:cNvPr id="2" name="Rectangle 1"/>
@@ -4084,7 +3864,7 @@
         </p:nvSpPr>
         <p:spPr>
           <a:xfrm>
-            <a:off x="0" y="0"/>
+            <a:off x="305" y="394870"/>
             <a:ext cx="12191695" cy="6858000"/>
           </a:xfrm>
           <a:prstGeom prst="rect">
@@ -4117,6 +3897,7 @@
           <a:lstStyle/>
           <a:p>
             <a:pPr algn="ctr"/>
+            <a:endParaRPr/>
           </a:p>
         </p:txBody>
       </p:sp>
@@ -4161,6 +3942,7 @@
           <a:lstStyle/>
           <a:p>
             <a:pPr algn="ctr"/>
+            <a:endParaRPr/>
           </a:p>
         </p:txBody>
       </p:sp>
@@ -4172,8 +3954,8 @@
         </p:nvSpPr>
         <p:spPr>
           <a:xfrm>
-            <a:off x="1097280" y="1600200"/>
-            <a:ext cx="7315200" cy="365760"/>
+            <a:off x="3309258" y="2592931"/>
+            <a:ext cx="4480955" cy="270843"/>
           </a:xfrm>
           <a:prstGeom prst="rect">
             <a:avLst/>
@@ -4181,21 +3963,27 @@
           <a:noFill/>
         </p:spPr>
         <p:txBody>
-          <a:bodyPr wrap="square" anchor="t" lIns="45720" rIns="45720" tIns="27432" bIns="27432">
+          <a:bodyPr wrap="square" lIns="45720" tIns="27432" rIns="45720" bIns="27432" anchor="t">
             <a:spAutoFit/>
           </a:bodyPr>
           <a:lstStyle/>
           <a:p>
             <a:pPr algn="l"/>
             <a:r>
-              <a:rPr sz="1400" b="1">
+              <a:rPr lang="en-CA" sz="1400" b="1" dirty="0">
                 <a:solidFill>
                   <a:srgbClr val="D15010"/>
                 </a:solidFill>
                 <a:latin typeface="Arial"/>
               </a:rPr>
-              <a:t>SECOND MEETING</a:t>
-            </a:r>
+              <a:t>Taking control of your AI driven growth aspirations</a:t>
+            </a:r>
+            <a:endParaRPr sz="1400" b="1" dirty="0">
+              <a:solidFill>
+                <a:srgbClr val="D15010"/>
+              </a:solidFill>
+              <a:latin typeface="Arial"/>
+            </a:endParaRPr>
           </a:p>
         </p:txBody>
       </p:sp>
@@ -4208,7 +3996,7 @@
         <p:spPr>
           <a:xfrm>
             <a:off x="1097280" y="2057400"/>
-            <a:ext cx="7498079" cy="1645920"/>
+            <a:ext cx="7498079" cy="670953"/>
           </a:xfrm>
           <a:prstGeom prst="rect">
             <a:avLst/>
@@ -4216,20 +4004,20 @@
           <a:noFill/>
         </p:spPr>
         <p:txBody>
-          <a:bodyPr wrap="square" anchor="t" lIns="45720" rIns="45720" tIns="27432" bIns="27432">
+          <a:bodyPr wrap="square" lIns="45720" tIns="27432" rIns="45720" bIns="27432" anchor="t">
             <a:spAutoFit/>
           </a:bodyPr>
           <a:lstStyle/>
           <a:p>
             <a:pPr algn="l"/>
             <a:r>
-              <a:rPr sz="4000" b="1">
+              <a:rPr lang="en-CA" sz="4000" b="1" dirty="0">
                 <a:solidFill>
                   <a:srgbClr val="F5F5F5"/>
                 </a:solidFill>
                 <a:latin typeface="Arial"/>
               </a:rPr>
-              <a:t>From green screen to modern UI, with proof it still works</a:t>
+              <a:t>Green Screen to Modern UI</a:t>
             </a:r>
           </a:p>
         </p:txBody>
@@ -4242,8 +4030,8 @@
         </p:nvSpPr>
         <p:spPr>
           <a:xfrm>
-            <a:off x="1097280" y="3794760"/>
-            <a:ext cx="7315200" cy="731520"/>
+            <a:off x="1188720" y="3657671"/>
+            <a:ext cx="7315200" cy="332399"/>
           </a:xfrm>
           <a:prstGeom prst="rect">
             <a:avLst/>
@@ -4251,20 +4039,56 @@
           <a:noFill/>
         </p:spPr>
         <p:txBody>
-          <a:bodyPr wrap="square" anchor="t" lIns="45720" rIns="45720" tIns="27432" bIns="27432">
+          <a:bodyPr wrap="square" lIns="45720" tIns="27432" rIns="45720" bIns="27432" anchor="t">
             <a:spAutoFit/>
           </a:bodyPr>
           <a:lstStyle/>
           <a:p>
             <a:pPr algn="l"/>
             <a:r>
-              <a:rPr sz="2000" b="0">
+              <a:rPr b="0" i="1" dirty="0">
                 <a:solidFill>
                   <a:srgbClr val="A3A3A3"/>
                 </a:solidFill>
                 <a:latin typeface="Arial"/>
               </a:rPr>
-              <a:t>What we heard, how Factory helps, and a live demo</a:t>
+              <a:t>What we heard</a:t>
+            </a:r>
+            <a:r>
+              <a:rPr lang="en-CA" b="0" i="1" dirty="0">
+                <a:solidFill>
+                  <a:srgbClr val="A3A3A3"/>
+                </a:solidFill>
+                <a:latin typeface="Arial"/>
+              </a:rPr>
+              <a:t> &amp;</a:t>
+            </a:r>
+            <a:r>
+              <a:rPr b="0" i="1" dirty="0">
+                <a:solidFill>
+                  <a:srgbClr val="A3A3A3"/>
+                </a:solidFill>
+                <a:latin typeface="Arial"/>
+              </a:rPr>
+              <a:t> how Factory</a:t>
+            </a:r>
+            <a:r>
+              <a:rPr lang="en-CA" b="0" i="1" dirty="0">
+                <a:solidFill>
+                  <a:srgbClr val="A3A3A3"/>
+                </a:solidFill>
+                <a:latin typeface="Arial"/>
+              </a:rPr>
+              <a:t>.ai</a:t>
+            </a:r>
+            <a:r>
+              <a:rPr b="0" i="1" dirty="0">
+                <a:solidFill>
+                  <a:srgbClr val="A3A3A3"/>
+                </a:solidFill>
+                <a:latin typeface="Arial"/>
+              </a:rPr>
+              <a:t> helps</a:t>
             </a:r>
           </a:p>
         </p:txBody>
@@ -4278,7 +4102,7 @@
           <p:nvPr/>
         </p:nvPicPr>
         <p:blipFill>
-          <a:blip r:embed="rId2"/>
+          <a:blip r:embed="rId3"/>
           <a:stretch>
             <a:fillRect/>
           </a:stretch>
@@ -4287,6 +4111,36 @@
           <a:xfrm>
             <a:off x="8778240" y="1737360"/>
             <a:ext cx="2743200" cy="2743200"/>
+          </a:xfrm>
+          <a:prstGeom prst="rect">
+            <a:avLst/>
+          </a:prstGeom>
+        </p:spPr>
+      </p:pic>
+      <p:pic>
+        <p:nvPicPr>
+          <p:cNvPr id="9" name="Picture 8">
+            <a:extLst>
+              <a:ext uri="{FF2B5EF4-FFF2-40B4-BE49-F238E27FC236}">
+                <a16:creationId xmlns:a16="http://schemas.microsoft.com/office/drawing/2014/main" id="{F6384088-E5C8-8CD1-0092-290DD069F1D9}"/>
+              </a:ext>
+            </a:extLst>
+          </p:cNvPr>
+          <p:cNvPicPr>
+            <a:picLocks noChangeAspect="1"/>
+          </p:cNvPicPr>
+          <p:nvPr/>
+        </p:nvPicPr>
+        <p:blipFill>
+          <a:blip r:embed="rId4"/>
+          <a:stretch>
+            <a:fillRect/>
+          </a:stretch>
+        </p:blipFill>
+        <p:spPr>
+          <a:xfrm>
+            <a:off x="3309258" y="3977640"/>
+            <a:ext cx="1883806" cy="613942"/>
           </a:xfrm>
           <a:prstGeom prst="rect">
             <a:avLst/>
@@ -4302,7 +4156,7 @@
 </file>
 
 <file path=ppt/slides/slide2.xml><?xml version="1.0" encoding="utf-8"?>
-<p:sld xmlns:a="http://schemas.openxmlformats.org/drawingml/2006/main" xmlns:p="http://schemas.openxmlformats.org/presentationml/2006/main" xmlns:r="http://schemas.openxmlformats.org/officeDocument/2006/relationships">
+<p:sld xmlns:a="http://schemas.openxmlformats.org/drawingml/2006/main" xmlns:r="http://schemas.openxmlformats.org/officeDocument/2006/relationships" xmlns:p="http://schemas.openxmlformats.org/presentationml/2006/main">
   <p:cSld>
     <p:spTree>
       <p:nvGrpSpPr>
@@ -4310,7 +4164,14 @@
         <p:cNvGrpSpPr/>
         <p:nvPr/>
       </p:nvGrpSpPr>
-      <p:grpSpPr/>
+      <p:grpSpPr>
+        <a:xfrm>
+          <a:off x="0" y="0"/>
+          <a:ext cx="0" cy="0"/>
+          <a:chOff x="0" y="0"/>
+          <a:chExt cx="0" cy="0"/>
+        </a:xfrm>
+      </p:grpSpPr>
       <p:sp>
         <p:nvSpPr>
           <p:cNvPr id="2" name="Rectangle 1"/>
@@ -4352,6 +4213,7 @@
           <a:lstStyle/>
           <a:p>
             <a:pPr algn="ctr"/>
+            <a:endParaRPr/>
           </a:p>
         </p:txBody>
       </p:sp>
@@ -4396,6 +4258,7 @@
           <a:lstStyle/>
           <a:p>
             <a:pPr algn="ctr"/>
+            <a:endParaRPr/>
           </a:p>
         </p:txBody>
       </p:sp>
@@ -4416,7 +4279,7 @@
           <a:noFill/>
         </p:spPr>
         <p:txBody>
-          <a:bodyPr wrap="square" anchor="t" lIns="45720" rIns="45720" tIns="27432" bIns="27432">
+          <a:bodyPr wrap="square" lIns="45720" tIns="27432" rIns="45720" bIns="27432" anchor="t">
             <a:spAutoFit/>
           </a:bodyPr>
           <a:lstStyle/>
@@ -4451,7 +4314,7 @@
           <a:noFill/>
         </p:spPr>
         <p:txBody>
-          <a:bodyPr wrap="square" anchor="t" lIns="45720" rIns="45720" tIns="27432" bIns="27432">
+          <a:bodyPr wrap="square" lIns="45720" tIns="27432" rIns="45720" bIns="27432" anchor="t">
             <a:spAutoFit/>
           </a:bodyPr>
           <a:lstStyle/>
@@ -4478,7 +4341,7 @@
           <p:nvPr/>
         </p:nvPicPr>
         <p:blipFill>
-          <a:blip r:embed="rId2"/>
+          <a:blip r:embed="rId3"/>
           <a:stretch>
             <a:fillRect/>
           </a:stretch>
@@ -4510,7 +4373,7 @@
           <a:noFill/>
         </p:spPr>
         <p:txBody>
-          <a:bodyPr wrap="square" anchor="t" lIns="45720" rIns="45720" tIns="27432" bIns="27432">
+          <a:bodyPr wrap="square" lIns="45720" tIns="27432" rIns="45720" bIns="27432" anchor="t">
             <a:spAutoFit/>
           </a:bodyPr>
           <a:lstStyle/>
@@ -4545,7 +4408,7 @@
           <a:noFill/>
         </p:spPr>
         <p:txBody>
-          <a:bodyPr wrap="square" anchor="t" lIns="45720" rIns="45720" tIns="27432" bIns="27432">
+          <a:bodyPr wrap="square" lIns="45720" tIns="27432" rIns="45720" bIns="27432" anchor="t">
             <a:spAutoFit/>
           </a:bodyPr>
           <a:lstStyle/>
@@ -4606,6 +4469,7 @@
           <a:lstStyle/>
           <a:p>
             <a:pPr algn="ctr"/>
+            <a:endParaRPr/>
           </a:p>
         </p:txBody>
       </p:sp>
@@ -4650,6 +4514,7 @@
           <a:lstStyle/>
           <a:p>
             <a:pPr algn="ctr"/>
+            <a:endParaRPr/>
           </a:p>
         </p:txBody>
       </p:sp>
@@ -4690,7 +4555,7 @@
           </a:fontRef>
         </p:style>
         <p:txBody>
-          <a:bodyPr rtlCol="0" anchor="ctr" lIns="0" rIns="0"/>
+          <a:bodyPr lIns="0" rIns="0" rtlCol="0" anchor="ctr"/>
           <a:lstStyle/>
           <a:p>
             <a:pPr algn="ctr"/>
@@ -4723,7 +4588,7 @@
           <a:noFill/>
         </p:spPr>
         <p:txBody>
-          <a:bodyPr wrap="square" anchor="ctr" lIns="45720" rIns="45720" tIns="27432" bIns="27432">
+          <a:bodyPr wrap="square" lIns="45720" tIns="27432" rIns="45720" bIns="27432" anchor="ctr">
             <a:spAutoFit/>
           </a:bodyPr>
           <a:lstStyle/>
@@ -4758,7 +4623,7 @@
           <a:noFill/>
         </p:spPr>
         <p:txBody>
-          <a:bodyPr wrap="square" anchor="t" lIns="45720" rIns="45720" tIns="27432" bIns="27432">
+          <a:bodyPr wrap="square" lIns="45720" tIns="27432" rIns="45720" bIns="27432" anchor="t">
             <a:spAutoFit/>
           </a:bodyPr>
           <a:lstStyle/>
@@ -4823,6 +4688,7 @@
           <a:lstStyle/>
           <a:p>
             <a:pPr algn="ctr"/>
+            <a:endParaRPr/>
           </a:p>
         </p:txBody>
       </p:sp>
@@ -4867,6 +4733,7 @@
           <a:lstStyle/>
           <a:p>
             <a:pPr algn="ctr"/>
+            <a:endParaRPr/>
           </a:p>
         </p:txBody>
       </p:sp>
@@ -4907,7 +4774,7 @@
           </a:fontRef>
         </p:style>
         <p:txBody>
-          <a:bodyPr rtlCol="0" anchor="ctr" lIns="0" rIns="0"/>
+          <a:bodyPr lIns="0" rIns="0" rtlCol="0" anchor="ctr"/>
           <a:lstStyle/>
           <a:p>
             <a:pPr algn="ctr"/>
@@ -4940,7 +4807,7 @@
           <a:noFill/>
         </p:spPr>
         <p:txBody>
-          <a:bodyPr wrap="square" anchor="ctr" lIns="45720" rIns="45720" tIns="27432" bIns="27432">
+          <a:bodyPr wrap="square" lIns="45720" tIns="27432" rIns="45720" bIns="27432" anchor="ctr">
             <a:spAutoFit/>
           </a:bodyPr>
           <a:lstStyle/>
@@ -4975,7 +4842,7 @@
           <a:noFill/>
         </p:spPr>
         <p:txBody>
-          <a:bodyPr wrap="square" anchor="t" lIns="45720" rIns="45720" tIns="27432" bIns="27432">
+          <a:bodyPr wrap="square" lIns="45720" tIns="27432" rIns="45720" bIns="27432" anchor="t">
             <a:spAutoFit/>
           </a:bodyPr>
           <a:lstStyle/>
@@ -5040,6 +4907,7 @@
           <a:lstStyle/>
           <a:p>
             <a:pPr algn="ctr"/>
+            <a:endParaRPr/>
           </a:p>
         </p:txBody>
       </p:sp>
@@ -5084,6 +4952,7 @@
           <a:lstStyle/>
           <a:p>
             <a:pPr algn="ctr"/>
+            <a:endParaRPr/>
           </a:p>
         </p:txBody>
       </p:sp>
@@ -5124,7 +4993,7 @@
           </a:fontRef>
         </p:style>
         <p:txBody>
-          <a:bodyPr rtlCol="0" anchor="ctr" lIns="0" rIns="0"/>
+          <a:bodyPr lIns="0" rIns="0" rtlCol="0" anchor="ctr"/>
           <a:lstStyle/>
           <a:p>
             <a:pPr algn="ctr"/>
@@ -5157,7 +5026,7 @@
           <a:noFill/>
         </p:spPr>
         <p:txBody>
-          <a:bodyPr wrap="square" anchor="ctr" lIns="45720" rIns="45720" tIns="27432" bIns="27432">
+          <a:bodyPr wrap="square" lIns="45720" tIns="27432" rIns="45720" bIns="27432" anchor="ctr">
             <a:spAutoFit/>
           </a:bodyPr>
           <a:lstStyle/>
@@ -5192,7 +5061,7 @@
           <a:noFill/>
         </p:spPr>
         <p:txBody>
-          <a:bodyPr wrap="square" anchor="t" lIns="45720" rIns="45720" tIns="27432" bIns="27432">
+          <a:bodyPr wrap="square" lIns="45720" tIns="27432" rIns="45720" bIns="27432" anchor="t">
             <a:spAutoFit/>
           </a:bodyPr>
           <a:lstStyle/>
@@ -5257,6 +5126,7 @@
           <a:lstStyle/>
           <a:p>
             <a:pPr algn="ctr"/>
+            <a:endParaRPr/>
           </a:p>
         </p:txBody>
       </p:sp>
@@ -5301,6 +5171,7 @@
           <a:lstStyle/>
           <a:p>
             <a:pPr algn="ctr"/>
+            <a:endParaRPr/>
           </a:p>
         </p:txBody>
       </p:sp>
@@ -5341,7 +5212,7 @@
           </a:fontRef>
         </p:style>
         <p:txBody>
-          <a:bodyPr rtlCol="0" anchor="ctr" lIns="0" rIns="0"/>
+          <a:bodyPr lIns="0" rIns="0" rtlCol="0" anchor="ctr"/>
           <a:lstStyle/>
           <a:p>
             <a:pPr algn="ctr"/>
@@ -5374,7 +5245,7 @@
           <a:noFill/>
         </p:spPr>
         <p:txBody>
-          <a:bodyPr wrap="square" anchor="ctr" lIns="45720" rIns="45720" tIns="27432" bIns="27432">
+          <a:bodyPr wrap="square" lIns="45720" tIns="27432" rIns="45720" bIns="27432" anchor="ctr">
             <a:spAutoFit/>
           </a:bodyPr>
           <a:lstStyle/>
@@ -5409,7 +5280,7 @@
           <a:noFill/>
         </p:spPr>
         <p:txBody>
-          <a:bodyPr wrap="square" anchor="t" lIns="45720" rIns="45720" tIns="27432" bIns="27432">
+          <a:bodyPr wrap="square" lIns="45720" tIns="27432" rIns="45720" bIns="27432" anchor="t">
             <a:spAutoFit/>
           </a:bodyPr>
           <a:lstStyle/>
@@ -5440,7 +5311,7 @@
 </file>
 
 <file path=ppt/slides/slide3.xml><?xml version="1.0" encoding="utf-8"?>
-<p:sld xmlns:a="http://schemas.openxmlformats.org/drawingml/2006/main" xmlns:p="http://schemas.openxmlformats.org/presentationml/2006/main" xmlns:r="http://schemas.openxmlformats.org/officeDocument/2006/relationships">
+<p:sld xmlns:a="http://schemas.openxmlformats.org/drawingml/2006/main" xmlns:r="http://schemas.openxmlformats.org/officeDocument/2006/relationships" xmlns:p="http://schemas.openxmlformats.org/presentationml/2006/main">
   <p:cSld>
     <p:spTree>
       <p:nvGrpSpPr>
@@ -5448,7 +5319,14 @@
         <p:cNvGrpSpPr/>
         <p:nvPr/>
       </p:nvGrpSpPr>
-      <p:grpSpPr/>
+      <p:grpSpPr>
+        <a:xfrm>
+          <a:off x="0" y="0"/>
+          <a:ext cx="0" cy="0"/>
+          <a:chOff x="0" y="0"/>
+          <a:chExt cx="0" cy="0"/>
+        </a:xfrm>
+      </p:grpSpPr>
       <p:sp>
         <p:nvSpPr>
           <p:cNvPr id="2" name="Rectangle 1"/>
@@ -5490,6 +5368,7 @@
           <a:lstStyle/>
           <a:p>
             <a:pPr algn="ctr"/>
+            <a:endParaRPr/>
           </a:p>
         </p:txBody>
       </p:sp>
@@ -5534,6 +5413,7 @@
           <a:lstStyle/>
           <a:p>
             <a:pPr algn="ctr"/>
+            <a:endParaRPr/>
           </a:p>
         </p:txBody>
       </p:sp>
@@ -5554,7 +5434,7 @@
           <a:noFill/>
         </p:spPr>
         <p:txBody>
-          <a:bodyPr wrap="square" anchor="t" lIns="45720" rIns="45720" tIns="27432" bIns="27432">
+          <a:bodyPr wrap="square" lIns="45720" tIns="27432" rIns="45720" bIns="27432" anchor="t">
             <a:spAutoFit/>
           </a:bodyPr>
           <a:lstStyle/>
@@ -5589,7 +5469,7 @@
           <a:noFill/>
         </p:spPr>
         <p:txBody>
-          <a:bodyPr wrap="square" anchor="t" lIns="45720" rIns="45720" tIns="27432" bIns="27432">
+          <a:bodyPr wrap="square" lIns="45720" tIns="27432" rIns="45720" bIns="27432" anchor="t">
             <a:spAutoFit/>
           </a:bodyPr>
           <a:lstStyle/>
@@ -5616,7 +5496,7 @@
           <p:nvPr/>
         </p:nvPicPr>
         <p:blipFill>
-          <a:blip r:embed="rId2"/>
+          <a:blip r:embed="rId3"/>
           <a:stretch>
             <a:fillRect/>
           </a:stretch>
@@ -5648,7 +5528,7 @@
           <a:noFill/>
         </p:spPr>
         <p:txBody>
-          <a:bodyPr wrap="square" anchor="t" lIns="45720" rIns="45720" tIns="27432" bIns="27432">
+          <a:bodyPr wrap="square" lIns="45720" tIns="27432" rIns="45720" bIns="27432" anchor="t">
             <a:spAutoFit/>
           </a:bodyPr>
           <a:lstStyle/>
@@ -5683,7 +5563,7 @@
           <a:noFill/>
         </p:spPr>
         <p:txBody>
-          <a:bodyPr wrap="square" anchor="t" lIns="45720" rIns="45720" tIns="27432" bIns="27432">
+          <a:bodyPr wrap="square" lIns="45720" tIns="27432" rIns="45720" bIns="27432" anchor="t">
             <a:spAutoFit/>
           </a:bodyPr>
           <a:lstStyle/>
@@ -5744,6 +5624,7 @@
           <a:lstStyle/>
           <a:p>
             <a:pPr algn="ctr"/>
+            <a:endParaRPr/>
           </a:p>
         </p:txBody>
       </p:sp>
@@ -5788,6 +5669,7 @@
           <a:lstStyle/>
           <a:p>
             <a:pPr algn="ctr"/>
+            <a:endParaRPr/>
           </a:p>
         </p:txBody>
       </p:sp>
@@ -5808,7 +5690,7 @@
           <a:noFill/>
         </p:spPr>
         <p:txBody>
-          <a:bodyPr wrap="square" anchor="t" lIns="45720" rIns="45720" tIns="27432" bIns="27432">
+          <a:bodyPr wrap="square" lIns="45720" tIns="27432" rIns="45720" bIns="27432" anchor="t">
             <a:spAutoFit/>
           </a:bodyPr>
           <a:lstStyle/>
@@ -5843,7 +5725,7 @@
           <a:noFill/>
         </p:spPr>
         <p:txBody>
-          <a:bodyPr wrap="square" anchor="t" lIns="45720" rIns="45720" tIns="27432" bIns="27432">
+          <a:bodyPr wrap="square" lIns="45720" tIns="27432" rIns="45720" bIns="27432" anchor="t">
             <a:spAutoFit/>
           </a:bodyPr>
           <a:lstStyle/>
@@ -5908,6 +5790,7 @@
           <a:lstStyle/>
           <a:p>
             <a:pPr algn="ctr"/>
+            <a:endParaRPr/>
           </a:p>
         </p:txBody>
       </p:sp>
@@ -5952,6 +5835,7 @@
           <a:lstStyle/>
           <a:p>
             <a:pPr algn="ctr"/>
+            <a:endParaRPr/>
           </a:p>
         </p:txBody>
       </p:sp>
@@ -5972,7 +5856,7 @@
           <a:noFill/>
         </p:spPr>
         <p:txBody>
-          <a:bodyPr wrap="square" anchor="t" lIns="45720" rIns="45720" tIns="27432" bIns="27432">
+          <a:bodyPr wrap="square" lIns="45720" tIns="27432" rIns="45720" bIns="27432" anchor="t">
             <a:spAutoFit/>
           </a:bodyPr>
           <a:lstStyle/>
@@ -6007,7 +5891,7 @@
           <a:noFill/>
         </p:spPr>
         <p:txBody>
-          <a:bodyPr wrap="square" anchor="t" lIns="45720" rIns="45720" tIns="27432" bIns="27432">
+          <a:bodyPr wrap="square" lIns="45720" tIns="27432" rIns="45720" bIns="27432" anchor="t">
             <a:spAutoFit/>
           </a:bodyPr>
           <a:lstStyle/>
@@ -6072,6 +5956,7 @@
           <a:lstStyle/>
           <a:p>
             <a:pPr algn="ctr"/>
+            <a:endParaRPr/>
           </a:p>
         </p:txBody>
       </p:sp>
@@ -6116,6 +6001,7 @@
           <a:lstStyle/>
           <a:p>
             <a:pPr algn="ctr"/>
+            <a:endParaRPr/>
           </a:p>
         </p:txBody>
       </p:sp>
@@ -6136,7 +6022,7 @@
           <a:noFill/>
         </p:spPr>
         <p:txBody>
-          <a:bodyPr wrap="square" anchor="t" lIns="45720" rIns="45720" tIns="27432" bIns="27432">
+          <a:bodyPr wrap="square" lIns="45720" tIns="27432" rIns="45720" bIns="27432" anchor="t">
             <a:spAutoFit/>
           </a:bodyPr>
           <a:lstStyle/>
@@ -6171,7 +6057,7 @@
           <a:noFill/>
         </p:spPr>
         <p:txBody>
-          <a:bodyPr wrap="square" anchor="t" lIns="45720" rIns="45720" tIns="27432" bIns="27432">
+          <a:bodyPr wrap="square" lIns="45720" tIns="27432" rIns="45720" bIns="27432" anchor="t">
             <a:spAutoFit/>
           </a:bodyPr>
           <a:lstStyle/>
@@ -6236,6 +6122,7 @@
           <a:lstStyle/>
           <a:p>
             <a:pPr algn="ctr"/>
+            <a:endParaRPr/>
           </a:p>
         </p:txBody>
       </p:sp>
@@ -6280,6 +6167,7 @@
           <a:lstStyle/>
           <a:p>
             <a:pPr algn="ctr"/>
+            <a:endParaRPr/>
           </a:p>
         </p:txBody>
       </p:sp>
@@ -6300,7 +6188,7 @@
           <a:noFill/>
         </p:spPr>
         <p:txBody>
-          <a:bodyPr wrap="square" anchor="t" lIns="45720" rIns="45720" tIns="27432" bIns="27432">
+          <a:bodyPr wrap="square" lIns="45720" tIns="27432" rIns="45720" bIns="27432" anchor="t">
             <a:spAutoFit/>
           </a:bodyPr>
           <a:lstStyle/>
@@ -6335,7 +6223,7 @@
           <a:noFill/>
         </p:spPr>
         <p:txBody>
-          <a:bodyPr wrap="square" anchor="t" lIns="45720" rIns="45720" tIns="27432" bIns="27432">
+          <a:bodyPr wrap="square" lIns="45720" tIns="27432" rIns="45720" bIns="27432" anchor="t">
             <a:spAutoFit/>
           </a:bodyPr>
           <a:lstStyle/>
@@ -6400,6 +6288,7 @@
           <a:lstStyle/>
           <a:p>
             <a:pPr algn="ctr"/>
+            <a:endParaRPr/>
           </a:p>
         </p:txBody>
       </p:sp>
@@ -6444,6 +6333,7 @@
           <a:lstStyle/>
           <a:p>
             <a:pPr algn="ctr"/>
+            <a:endParaRPr/>
           </a:p>
         </p:txBody>
       </p:sp>
@@ -6464,7 +6354,7 @@
           <a:noFill/>
         </p:spPr>
         <p:txBody>
-          <a:bodyPr wrap="square" anchor="t" lIns="45720" rIns="45720" tIns="27432" bIns="27432">
+          <a:bodyPr wrap="square" lIns="45720" tIns="27432" rIns="45720" bIns="27432" anchor="t">
             <a:spAutoFit/>
           </a:bodyPr>
           <a:lstStyle/>
@@ -6499,7 +6389,7 @@
           <a:noFill/>
         </p:spPr>
         <p:txBody>
-          <a:bodyPr wrap="square" anchor="t" lIns="45720" rIns="45720" tIns="27432" bIns="27432">
+          <a:bodyPr wrap="square" lIns="45720" tIns="27432" rIns="45720" bIns="27432" anchor="t">
             <a:spAutoFit/>
           </a:bodyPr>
           <a:lstStyle/>
@@ -6564,6 +6454,7 @@
           <a:lstStyle/>
           <a:p>
             <a:pPr algn="ctr"/>
+            <a:endParaRPr/>
           </a:p>
         </p:txBody>
       </p:sp>
@@ -6608,6 +6499,7 @@
           <a:lstStyle/>
           <a:p>
             <a:pPr algn="ctr"/>
+            <a:endParaRPr/>
           </a:p>
         </p:txBody>
       </p:sp>
@@ -6628,7 +6520,7 @@
           <a:noFill/>
         </p:spPr>
         <p:txBody>
-          <a:bodyPr wrap="square" anchor="t" lIns="45720" rIns="45720" tIns="27432" bIns="27432">
+          <a:bodyPr wrap="square" lIns="45720" tIns="27432" rIns="45720" bIns="27432" anchor="t">
             <a:spAutoFit/>
           </a:bodyPr>
           <a:lstStyle/>
@@ -6663,7 +6555,7 @@
           <a:noFill/>
         </p:spPr>
         <p:txBody>
-          <a:bodyPr wrap="square" anchor="t" lIns="45720" rIns="45720" tIns="27432" bIns="27432">
+          <a:bodyPr wrap="square" lIns="45720" tIns="27432" rIns="45720" bIns="27432" anchor="t">
             <a:spAutoFit/>
           </a:bodyPr>
           <a:lstStyle/>
@@ -6694,7 +6586,7 @@
 </file>
 
 <file path=ppt/slides/slide4.xml><?xml version="1.0" encoding="utf-8"?>
-<p:sld xmlns:a="http://schemas.openxmlformats.org/drawingml/2006/main" xmlns:p="http://schemas.openxmlformats.org/presentationml/2006/main" xmlns:r="http://schemas.openxmlformats.org/officeDocument/2006/relationships">
+<p:sld xmlns:a="http://schemas.openxmlformats.org/drawingml/2006/main" xmlns:r="http://schemas.openxmlformats.org/officeDocument/2006/relationships" xmlns:p="http://schemas.openxmlformats.org/presentationml/2006/main">
   <p:cSld>
     <p:spTree>
       <p:nvGrpSpPr>
@@ -6702,7 +6594,14 @@
         <p:cNvGrpSpPr/>
         <p:nvPr/>
       </p:nvGrpSpPr>
-      <p:grpSpPr/>
+      <p:grpSpPr>
+        <a:xfrm>
+          <a:off x="0" y="0"/>
+          <a:ext cx="0" cy="0"/>
+          <a:chOff x="0" y="0"/>
+          <a:chExt cx="0" cy="0"/>
+        </a:xfrm>
+      </p:grpSpPr>
       <p:sp>
         <p:nvSpPr>
           <p:cNvPr id="2" name="Rectangle 1"/>
@@ -6744,6 +6643,7 @@
           <a:lstStyle/>
           <a:p>
             <a:pPr algn="ctr"/>
+            <a:endParaRPr/>
           </a:p>
         </p:txBody>
       </p:sp>
@@ -6788,6 +6688,7 @@
           <a:lstStyle/>
           <a:p>
             <a:pPr algn="ctr"/>
+            <a:endParaRPr/>
           </a:p>
         </p:txBody>
       </p:sp>
@@ -6808,7 +6709,7 @@
           <a:noFill/>
         </p:spPr>
         <p:txBody>
-          <a:bodyPr wrap="square" anchor="t" lIns="45720" rIns="45720" tIns="27432" bIns="27432">
+          <a:bodyPr wrap="square" lIns="45720" tIns="27432" rIns="45720" bIns="27432" anchor="t">
             <a:spAutoFit/>
           </a:bodyPr>
           <a:lstStyle/>
@@ -6843,7 +6744,7 @@
           <a:noFill/>
         </p:spPr>
         <p:txBody>
-          <a:bodyPr wrap="square" anchor="t" lIns="45720" rIns="45720" tIns="27432" bIns="27432">
+          <a:bodyPr wrap="square" lIns="45720" tIns="27432" rIns="45720" bIns="27432" anchor="t">
             <a:spAutoFit/>
           </a:bodyPr>
           <a:lstStyle/>
@@ -6870,7 +6771,7 @@
           <p:nvPr/>
         </p:nvPicPr>
         <p:blipFill>
-          <a:blip r:embed="rId2"/>
+          <a:blip r:embed="rId3"/>
           <a:stretch>
             <a:fillRect/>
           </a:stretch>
@@ -6902,7 +6803,7 @@
           <a:noFill/>
         </p:spPr>
         <p:txBody>
-          <a:bodyPr wrap="square" anchor="t" lIns="45720" rIns="45720" tIns="27432" bIns="27432">
+          <a:bodyPr wrap="square" lIns="45720" tIns="27432" rIns="45720" bIns="27432" anchor="t">
             <a:spAutoFit/>
           </a:bodyPr>
           <a:lstStyle/>
@@ -6937,7 +6838,7 @@
           <a:noFill/>
         </p:spPr>
         <p:txBody>
-          <a:bodyPr wrap="square" anchor="t" lIns="45720" rIns="45720" tIns="27432" bIns="27432">
+          <a:bodyPr wrap="square" lIns="45720" tIns="27432" rIns="45720" bIns="27432" anchor="t">
             <a:spAutoFit/>
           </a:bodyPr>
           <a:lstStyle/>
@@ -6998,6 +6899,7 @@
           <a:lstStyle/>
           <a:p>
             <a:pPr algn="ctr"/>
+            <a:endParaRPr/>
           </a:p>
         </p:txBody>
       </p:sp>
@@ -7042,6 +6944,7 @@
           <a:lstStyle/>
           <a:p>
             <a:pPr algn="ctr"/>
+            <a:endParaRPr/>
           </a:p>
         </p:txBody>
       </p:sp>
@@ -7082,7 +6985,7 @@
           </a:fontRef>
         </p:style>
         <p:txBody>
-          <a:bodyPr rtlCol="0" anchor="ctr" lIns="0" rIns="0"/>
+          <a:bodyPr lIns="0" rIns="0" rtlCol="0" anchor="ctr"/>
           <a:lstStyle/>
           <a:p>
             <a:pPr algn="ctr"/>
@@ -7115,7 +7018,7 @@
           <a:noFill/>
         </p:spPr>
         <p:txBody>
-          <a:bodyPr wrap="square" anchor="ctr" lIns="45720" rIns="45720" tIns="27432" bIns="27432">
+          <a:bodyPr wrap="square" lIns="45720" tIns="27432" rIns="45720" bIns="27432" anchor="ctr">
             <a:spAutoFit/>
           </a:bodyPr>
           <a:lstStyle/>
@@ -7150,7 +7053,7 @@
           <a:noFill/>
         </p:spPr>
         <p:txBody>
-          <a:bodyPr wrap="square" anchor="t" lIns="45720" rIns="45720" tIns="27432" bIns="27432">
+          <a:bodyPr wrap="square" lIns="45720" tIns="27432" rIns="45720" bIns="27432" anchor="t">
             <a:spAutoFit/>
           </a:bodyPr>
           <a:lstStyle/>
@@ -7215,6 +7118,7 @@
           <a:lstStyle/>
           <a:p>
             <a:pPr algn="ctr"/>
+            <a:endParaRPr/>
           </a:p>
         </p:txBody>
       </p:sp>
@@ -7259,6 +7163,7 @@
           <a:lstStyle/>
           <a:p>
             <a:pPr algn="ctr"/>
+            <a:endParaRPr/>
           </a:p>
         </p:txBody>
       </p:sp>
@@ -7299,7 +7204,7 @@
           </a:fontRef>
         </p:style>
         <p:txBody>
-          <a:bodyPr rtlCol="0" anchor="ctr" lIns="0" rIns="0"/>
+          <a:bodyPr lIns="0" rIns="0" rtlCol="0" anchor="ctr"/>
           <a:lstStyle/>
           <a:p>
             <a:pPr algn="ctr"/>
@@ -7332,7 +7237,7 @@
           <a:noFill/>
         </p:spPr>
         <p:txBody>
-          <a:bodyPr wrap="square" anchor="ctr" lIns="45720" rIns="45720" tIns="27432" bIns="27432">
+          <a:bodyPr wrap="square" lIns="45720" tIns="27432" rIns="45720" bIns="27432" anchor="ctr">
             <a:spAutoFit/>
           </a:bodyPr>
           <a:lstStyle/>
@@ -7367,7 +7272,7 @@
           <a:noFill/>
         </p:spPr>
         <p:txBody>
-          <a:bodyPr wrap="square" anchor="t" lIns="45720" rIns="45720" tIns="27432" bIns="27432">
+          <a:bodyPr wrap="square" lIns="45720" tIns="27432" rIns="45720" bIns="27432" anchor="t">
             <a:spAutoFit/>
           </a:bodyPr>
           <a:lstStyle/>
@@ -7432,6 +7337,7 @@
           <a:lstStyle/>
           <a:p>
             <a:pPr algn="ctr"/>
+            <a:endParaRPr/>
           </a:p>
         </p:txBody>
       </p:sp>
@@ -7476,6 +7382,7 @@
           <a:lstStyle/>
           <a:p>
             <a:pPr algn="ctr"/>
+            <a:endParaRPr/>
           </a:p>
         </p:txBody>
       </p:sp>
@@ -7516,7 +7423,7 @@
           </a:fontRef>
         </p:style>
         <p:txBody>
-          <a:bodyPr rtlCol="0" anchor="ctr" lIns="0" rIns="0"/>
+          <a:bodyPr lIns="0" rIns="0" rtlCol="0" anchor="ctr"/>
           <a:lstStyle/>
           <a:p>
             <a:pPr algn="ctr"/>
@@ -7549,7 +7456,7 @@
           <a:noFill/>
         </p:spPr>
         <p:txBody>
-          <a:bodyPr wrap="square" anchor="ctr" lIns="45720" rIns="45720" tIns="27432" bIns="27432">
+          <a:bodyPr wrap="square" lIns="45720" tIns="27432" rIns="45720" bIns="27432" anchor="ctr">
             <a:spAutoFit/>
           </a:bodyPr>
           <a:lstStyle/>
@@ -7584,7 +7491,7 @@
           <a:noFill/>
         </p:spPr>
         <p:txBody>
-          <a:bodyPr wrap="square" anchor="t" lIns="45720" rIns="45720" tIns="27432" bIns="27432">
+          <a:bodyPr wrap="square" lIns="45720" tIns="27432" rIns="45720" bIns="27432" anchor="t">
             <a:spAutoFit/>
           </a:bodyPr>
           <a:lstStyle/>
@@ -7649,6 +7556,7 @@
           <a:lstStyle/>
           <a:p>
             <a:pPr algn="ctr"/>
+            <a:endParaRPr/>
           </a:p>
         </p:txBody>
       </p:sp>
@@ -7693,6 +7601,7 @@
           <a:lstStyle/>
           <a:p>
             <a:pPr algn="ctr"/>
+            <a:endParaRPr/>
           </a:p>
         </p:txBody>
       </p:sp>
@@ -7733,7 +7642,7 @@
           </a:fontRef>
         </p:style>
         <p:txBody>
-          <a:bodyPr rtlCol="0" anchor="ctr" lIns="0" rIns="0"/>
+          <a:bodyPr lIns="0" rIns="0" rtlCol="0" anchor="ctr"/>
           <a:lstStyle/>
           <a:p>
             <a:pPr algn="ctr"/>
@@ -7766,7 +7675,7 @@
           <a:noFill/>
         </p:spPr>
         <p:txBody>
-          <a:bodyPr wrap="square" anchor="ctr" lIns="45720" rIns="45720" tIns="27432" bIns="27432">
+          <a:bodyPr wrap="square" lIns="45720" tIns="27432" rIns="45720" bIns="27432" anchor="ctr">
             <a:spAutoFit/>
           </a:bodyPr>
           <a:lstStyle/>
@@ -7801,7 +7710,7 @@
           <a:noFill/>
         </p:spPr>
         <p:txBody>
-          <a:bodyPr wrap="square" anchor="t" lIns="45720" rIns="45720" tIns="27432" bIns="27432">
+          <a:bodyPr wrap="square" lIns="45720" tIns="27432" rIns="45720" bIns="27432" anchor="t">
             <a:spAutoFit/>
           </a:bodyPr>
           <a:lstStyle/>
@@ -7840,7 +7749,7 @@
           <a:noFill/>
         </p:spPr>
         <p:txBody>
-          <a:bodyPr wrap="square" anchor="t" lIns="45720" rIns="45720" tIns="27432" bIns="27432">
+          <a:bodyPr wrap="square" lIns="45720" tIns="27432" rIns="45720" bIns="27432" anchor="t">
             <a:spAutoFit/>
           </a:bodyPr>
           <a:lstStyle/>
@@ -7867,7 +7776,7 @@
 </file>
 
 <file path=ppt/slides/slide5.xml><?xml version="1.0" encoding="utf-8"?>
-<p:sld xmlns:a="http://schemas.openxmlformats.org/drawingml/2006/main" xmlns:p="http://schemas.openxmlformats.org/presentationml/2006/main" xmlns:r="http://schemas.openxmlformats.org/officeDocument/2006/relationships">
+<p:sld xmlns:a="http://schemas.openxmlformats.org/drawingml/2006/main" xmlns:r="http://schemas.openxmlformats.org/officeDocument/2006/relationships" xmlns:p="http://schemas.openxmlformats.org/presentationml/2006/main">
   <p:cSld>
     <p:spTree>
       <p:nvGrpSpPr>
@@ -7875,7 +7784,14 @@
         <p:cNvGrpSpPr/>
         <p:nvPr/>
       </p:nvGrpSpPr>
-      <p:grpSpPr/>
+      <p:grpSpPr>
+        <a:xfrm>
+          <a:off x="0" y="0"/>
+          <a:ext cx="0" cy="0"/>
+          <a:chOff x="0" y="0"/>
+          <a:chExt cx="0" cy="0"/>
+        </a:xfrm>
+      </p:grpSpPr>
       <p:sp>
         <p:nvSpPr>
           <p:cNvPr id="2" name="Rectangle 1"/>
@@ -7917,6 +7833,7 @@
           <a:lstStyle/>
           <a:p>
             <a:pPr algn="ctr"/>
+            <a:endParaRPr/>
           </a:p>
         </p:txBody>
       </p:sp>
@@ -7961,6 +7878,7 @@
           <a:lstStyle/>
           <a:p>
             <a:pPr algn="ctr"/>
+            <a:endParaRPr/>
           </a:p>
         </p:txBody>
       </p:sp>
@@ -7981,7 +7899,7 @@
           <a:noFill/>
         </p:spPr>
         <p:txBody>
-          <a:bodyPr wrap="square" anchor="t" lIns="45720" rIns="45720" tIns="27432" bIns="27432">
+          <a:bodyPr wrap="square" lIns="45720" tIns="27432" rIns="45720" bIns="27432" anchor="t">
             <a:spAutoFit/>
           </a:bodyPr>
           <a:lstStyle/>
@@ -8016,7 +7934,7 @@
           <a:noFill/>
         </p:spPr>
         <p:txBody>
-          <a:bodyPr wrap="square" anchor="t" lIns="45720" rIns="45720" tIns="27432" bIns="27432">
+          <a:bodyPr wrap="square" lIns="45720" tIns="27432" rIns="45720" bIns="27432" anchor="t">
             <a:spAutoFit/>
           </a:bodyPr>
           <a:lstStyle/>
@@ -8043,7 +7961,7 @@
           <p:nvPr/>
         </p:nvPicPr>
         <p:blipFill>
-          <a:blip r:embed="rId2"/>
+          <a:blip r:embed="rId3"/>
           <a:stretch>
             <a:fillRect/>
           </a:stretch>
@@ -8075,7 +7993,7 @@
           <a:noFill/>
         </p:spPr>
         <p:txBody>
-          <a:bodyPr wrap="square" anchor="t" lIns="45720" rIns="45720" tIns="27432" bIns="27432">
+          <a:bodyPr wrap="square" lIns="45720" tIns="27432" rIns="45720" bIns="27432" anchor="t">
             <a:spAutoFit/>
           </a:bodyPr>
           <a:lstStyle/>
@@ -8110,7 +8028,7 @@
           <a:noFill/>
         </p:spPr>
         <p:txBody>
-          <a:bodyPr wrap="square" anchor="t" lIns="45720" rIns="45720" tIns="27432" bIns="27432">
+          <a:bodyPr wrap="square" lIns="45720" tIns="27432" rIns="45720" bIns="27432" anchor="t">
             <a:spAutoFit/>
           </a:bodyPr>
           <a:lstStyle/>
@@ -8171,6 +8089,7 @@
           <a:lstStyle/>
           <a:p>
             <a:pPr algn="ctr"/>
+            <a:endParaRPr/>
           </a:p>
         </p:txBody>
       </p:sp>
@@ -8215,6 +8134,7 @@
           <a:lstStyle/>
           <a:p>
             <a:pPr algn="ctr"/>
+            <a:endParaRPr/>
           </a:p>
         </p:txBody>
       </p:sp>
@@ -8235,7 +8155,7 @@
           <a:noFill/>
         </p:spPr>
         <p:txBody>
-          <a:bodyPr wrap="square" anchor="t" lIns="45720" rIns="45720" tIns="27432" bIns="27432">
+          <a:bodyPr wrap="square" lIns="45720" tIns="27432" rIns="45720" bIns="27432" anchor="t">
             <a:spAutoFit/>
           </a:bodyPr>
           <a:lstStyle/>
@@ -8270,7 +8190,7 @@
           <a:noFill/>
         </p:spPr>
         <p:txBody>
-          <a:bodyPr wrap="square" anchor="t" lIns="45720" rIns="45720" tIns="27432" bIns="27432">
+          <a:bodyPr wrap="square" lIns="45720" tIns="27432" rIns="45720" bIns="27432" anchor="t">
             <a:spAutoFit/>
           </a:bodyPr>
           <a:lstStyle/>
@@ -8305,7 +8225,7 @@
           <a:noFill/>
         </p:spPr>
         <p:txBody>
-          <a:bodyPr wrap="square" anchor="t" lIns="45720" rIns="45720" tIns="27432" bIns="27432">
+          <a:bodyPr wrap="square" lIns="45720" tIns="27432" rIns="45720" bIns="27432" anchor="t">
             <a:spAutoFit/>
           </a:bodyPr>
           <a:lstStyle/>
@@ -8386,6 +8306,7 @@
           <a:lstStyle/>
           <a:p>
             <a:pPr algn="ctr"/>
+            <a:endParaRPr/>
           </a:p>
         </p:txBody>
       </p:sp>
@@ -8430,6 +8351,7 @@
           <a:lstStyle/>
           <a:p>
             <a:pPr algn="ctr"/>
+            <a:endParaRPr/>
           </a:p>
         </p:txBody>
       </p:sp>
@@ -8450,7 +8372,7 @@
           <a:noFill/>
         </p:spPr>
         <p:txBody>
-          <a:bodyPr wrap="square" anchor="t" lIns="45720" rIns="45720" tIns="27432" bIns="27432">
+          <a:bodyPr wrap="square" lIns="45720" tIns="27432" rIns="45720" bIns="27432" anchor="t">
             <a:spAutoFit/>
           </a:bodyPr>
           <a:lstStyle/>
@@ -8485,7 +8407,7 @@
           <a:noFill/>
         </p:spPr>
         <p:txBody>
-          <a:bodyPr wrap="square" anchor="t" lIns="45720" rIns="45720" tIns="27432" bIns="27432">
+          <a:bodyPr wrap="square" lIns="45720" tIns="27432" rIns="45720" bIns="27432" anchor="t">
             <a:spAutoFit/>
           </a:bodyPr>
           <a:lstStyle/>
@@ -8520,7 +8442,7 @@
           <a:noFill/>
         </p:spPr>
         <p:txBody>
-          <a:bodyPr wrap="square" anchor="t" lIns="45720" rIns="45720" tIns="27432" bIns="27432">
+          <a:bodyPr wrap="square" lIns="45720" tIns="27432" rIns="45720" bIns="27432" anchor="t">
             <a:spAutoFit/>
           </a:bodyPr>
           <a:lstStyle/>
@@ -8601,6 +8523,7 @@
           <a:lstStyle/>
           <a:p>
             <a:pPr algn="ctr"/>
+            <a:endParaRPr/>
           </a:p>
         </p:txBody>
       </p:sp>
@@ -8645,6 +8568,7 @@
           <a:lstStyle/>
           <a:p>
             <a:pPr algn="ctr"/>
+            <a:endParaRPr/>
           </a:p>
         </p:txBody>
       </p:sp>
@@ -8665,7 +8589,7 @@
           <a:noFill/>
         </p:spPr>
         <p:txBody>
-          <a:bodyPr wrap="square" anchor="t" lIns="45720" rIns="45720" tIns="27432" bIns="27432">
+          <a:bodyPr wrap="square" lIns="45720" tIns="27432" rIns="45720" bIns="27432" anchor="t">
             <a:spAutoFit/>
           </a:bodyPr>
           <a:lstStyle/>
@@ -8700,7 +8624,7 @@
           <a:noFill/>
         </p:spPr>
         <p:txBody>
-          <a:bodyPr wrap="square" anchor="t" lIns="45720" rIns="45720" tIns="27432" bIns="27432">
+          <a:bodyPr wrap="square" lIns="45720" tIns="27432" rIns="45720" bIns="27432" anchor="t">
             <a:spAutoFit/>
           </a:bodyPr>
           <a:lstStyle/>
@@ -8735,7 +8659,7 @@
           <a:noFill/>
         </p:spPr>
         <p:txBody>
-          <a:bodyPr wrap="square" anchor="t" lIns="45720" rIns="45720" tIns="27432" bIns="27432">
+          <a:bodyPr wrap="square" lIns="45720" tIns="27432" rIns="45720" bIns="27432" anchor="t">
             <a:spAutoFit/>
           </a:bodyPr>
           <a:lstStyle/>
@@ -8816,6 +8740,7 @@
           <a:lstStyle/>
           <a:p>
             <a:pPr algn="ctr"/>
+            <a:endParaRPr/>
           </a:p>
         </p:txBody>
       </p:sp>
@@ -8860,6 +8785,7 @@
           <a:lstStyle/>
           <a:p>
             <a:pPr algn="ctr"/>
+            <a:endParaRPr/>
           </a:p>
         </p:txBody>
       </p:sp>
@@ -8880,7 +8806,7 @@
           <a:noFill/>
         </p:spPr>
         <p:txBody>
-          <a:bodyPr wrap="square" anchor="t" lIns="45720" rIns="45720" tIns="27432" bIns="27432">
+          <a:bodyPr wrap="square" lIns="45720" tIns="27432" rIns="45720" bIns="27432" anchor="t">
             <a:spAutoFit/>
           </a:bodyPr>
           <a:lstStyle/>
@@ -8915,7 +8841,7 @@
           <a:noFill/>
         </p:spPr>
         <p:txBody>
-          <a:bodyPr wrap="square" anchor="t" lIns="45720" rIns="45720" tIns="27432" bIns="27432">
+          <a:bodyPr wrap="square" lIns="45720" tIns="27432" rIns="45720" bIns="27432" anchor="t">
             <a:spAutoFit/>
           </a:bodyPr>
           <a:lstStyle/>
@@ -8950,7 +8876,7 @@
           <a:noFill/>
         </p:spPr>
         <p:txBody>
-          <a:bodyPr wrap="square" anchor="t" lIns="45720" rIns="45720" tIns="27432" bIns="27432">
+          <a:bodyPr wrap="square" lIns="45720" tIns="27432" rIns="45720" bIns="27432" anchor="t">
             <a:spAutoFit/>
           </a:bodyPr>
           <a:lstStyle/>
@@ -9005,7 +8931,7 @@
           <a:noFill/>
         </p:spPr>
         <p:txBody>
-          <a:bodyPr wrap="square" anchor="t" lIns="45720" rIns="45720" tIns="27432" bIns="27432">
+          <a:bodyPr wrap="square" lIns="45720" tIns="27432" rIns="45720" bIns="27432" anchor="t">
             <a:spAutoFit/>
           </a:bodyPr>
           <a:lstStyle/>
@@ -9032,7 +8958,7 @@
 </file>
 
 <file path=ppt/slides/slide6.xml><?xml version="1.0" encoding="utf-8"?>
-<p:sld xmlns:a="http://schemas.openxmlformats.org/drawingml/2006/main" xmlns:p="http://schemas.openxmlformats.org/presentationml/2006/main" xmlns:r="http://schemas.openxmlformats.org/officeDocument/2006/relationships">
+<p:sld xmlns:a="http://schemas.openxmlformats.org/drawingml/2006/main" xmlns:r="http://schemas.openxmlformats.org/officeDocument/2006/relationships" xmlns:p="http://schemas.openxmlformats.org/presentationml/2006/main">
   <p:cSld>
     <p:spTree>
       <p:nvGrpSpPr>
@@ -9040,7 +8966,14 @@
         <p:cNvGrpSpPr/>
         <p:nvPr/>
       </p:nvGrpSpPr>
-      <p:grpSpPr/>
+      <p:grpSpPr>
+        <a:xfrm>
+          <a:off x="0" y="0"/>
+          <a:ext cx="0" cy="0"/>
+          <a:chOff x="0" y="0"/>
+          <a:chExt cx="0" cy="0"/>
+        </a:xfrm>
+      </p:grpSpPr>
       <p:sp>
         <p:nvSpPr>
           <p:cNvPr id="2" name="Rectangle 1"/>
@@ -9082,6 +9015,7 @@
           <a:lstStyle/>
           <a:p>
             <a:pPr algn="ctr"/>
+            <a:endParaRPr/>
           </a:p>
         </p:txBody>
       </p:sp>
@@ -9126,6 +9060,7 @@
           <a:lstStyle/>
           <a:p>
             <a:pPr algn="ctr"/>
+            <a:endParaRPr/>
           </a:p>
         </p:txBody>
       </p:sp>
@@ -9146,7 +9081,7 @@
           <a:noFill/>
         </p:spPr>
         <p:txBody>
-          <a:bodyPr wrap="square" anchor="t" lIns="45720" rIns="45720" tIns="27432" bIns="27432">
+          <a:bodyPr wrap="square" lIns="45720" tIns="27432" rIns="45720" bIns="27432" anchor="t">
             <a:spAutoFit/>
           </a:bodyPr>
           <a:lstStyle/>
@@ -9181,7 +9116,7 @@
           <a:noFill/>
         </p:spPr>
         <p:txBody>
-          <a:bodyPr wrap="square" anchor="t" lIns="45720" rIns="45720" tIns="27432" bIns="27432">
+          <a:bodyPr wrap="square" lIns="45720" tIns="27432" rIns="45720" bIns="27432" anchor="t">
             <a:spAutoFit/>
           </a:bodyPr>
           <a:lstStyle/>
@@ -9208,7 +9143,7 @@
           <p:nvPr/>
         </p:nvPicPr>
         <p:blipFill>
-          <a:blip r:embed="rId2"/>
+          <a:blip r:embed="rId3"/>
           <a:stretch>
             <a:fillRect/>
           </a:stretch>
@@ -9240,7 +9175,7 @@
           <a:noFill/>
         </p:spPr>
         <p:txBody>
-          <a:bodyPr wrap="square" anchor="t" lIns="45720" rIns="45720" tIns="27432" bIns="27432">
+          <a:bodyPr wrap="square" lIns="45720" tIns="27432" rIns="45720" bIns="27432" anchor="t">
             <a:spAutoFit/>
           </a:bodyPr>
           <a:lstStyle/>
@@ -9275,7 +9210,7 @@
           <a:noFill/>
         </p:spPr>
         <p:txBody>
-          <a:bodyPr wrap="square" anchor="t" lIns="45720" rIns="45720" tIns="27432" bIns="27432">
+          <a:bodyPr wrap="square" lIns="45720" tIns="27432" rIns="45720" bIns="27432" anchor="t">
             <a:spAutoFit/>
           </a:bodyPr>
           <a:lstStyle/>
@@ -9336,6 +9271,7 @@
           <a:lstStyle/>
           <a:p>
             <a:pPr algn="ctr"/>
+            <a:endParaRPr/>
           </a:p>
         </p:txBody>
       </p:sp>
@@ -9380,6 +9316,7 @@
           <a:lstStyle/>
           <a:p>
             <a:pPr algn="ctr"/>
+            <a:endParaRPr/>
           </a:p>
         </p:txBody>
       </p:sp>
@@ -9420,7 +9357,7 @@
           </a:fontRef>
         </p:style>
         <p:txBody>
-          <a:bodyPr rtlCol="0" anchor="ctr" lIns="0" rIns="0"/>
+          <a:bodyPr lIns="0" rIns="0" rtlCol="0" anchor="ctr"/>
           <a:lstStyle/>
           <a:p>
             <a:pPr algn="ctr"/>
@@ -9453,7 +9390,7 @@
           <a:noFill/>
         </p:spPr>
         <p:txBody>
-          <a:bodyPr wrap="square" anchor="ctr" lIns="45720" rIns="45720" tIns="27432" bIns="27432">
+          <a:bodyPr wrap="square" lIns="45720" tIns="27432" rIns="45720" bIns="27432" anchor="ctr">
             <a:spAutoFit/>
           </a:bodyPr>
           <a:lstStyle/>
@@ -9488,7 +9425,7 @@
           <a:noFill/>
         </p:spPr>
         <p:txBody>
-          <a:bodyPr wrap="square" anchor="t" lIns="45720" rIns="45720" tIns="27432" bIns="27432">
+          <a:bodyPr wrap="square" lIns="45720" tIns="27432" rIns="45720" bIns="27432" anchor="t">
             <a:spAutoFit/>
           </a:bodyPr>
           <a:lstStyle/>
@@ -9553,6 +9490,7 @@
           <a:lstStyle/>
           <a:p>
             <a:pPr algn="ctr"/>
+            <a:endParaRPr/>
           </a:p>
         </p:txBody>
       </p:sp>
@@ -9597,6 +9535,7 @@
           <a:lstStyle/>
           <a:p>
             <a:pPr algn="ctr"/>
+            <a:endParaRPr/>
           </a:p>
         </p:txBody>
       </p:sp>
@@ -9637,7 +9576,7 @@
           </a:fontRef>
         </p:style>
         <p:txBody>
-          <a:bodyPr rtlCol="0" anchor="ctr" lIns="0" rIns="0"/>
+          <a:bodyPr lIns="0" rIns="0" rtlCol="0" anchor="ctr"/>
           <a:lstStyle/>
           <a:p>
             <a:pPr algn="ctr"/>
@@ -9670,7 +9609,7 @@
           <a:noFill/>
         </p:spPr>
         <p:txBody>
-          <a:bodyPr wrap="square" anchor="ctr" lIns="45720" rIns="45720" tIns="27432" bIns="27432">
+          <a:bodyPr wrap="square" lIns="45720" tIns="27432" rIns="45720" bIns="27432" anchor="ctr">
             <a:spAutoFit/>
           </a:bodyPr>
           <a:lstStyle/>
@@ -9705,7 +9644,7 @@
           <a:noFill/>
         </p:spPr>
         <p:txBody>
-          <a:bodyPr wrap="square" anchor="t" lIns="45720" rIns="45720" tIns="27432" bIns="27432">
+          <a:bodyPr wrap="square" lIns="45720" tIns="27432" rIns="45720" bIns="27432" anchor="t">
             <a:spAutoFit/>
           </a:bodyPr>
           <a:lstStyle/>
@@ -9770,6 +9709,7 @@
           <a:lstStyle/>
           <a:p>
             <a:pPr algn="ctr"/>
+            <a:endParaRPr/>
           </a:p>
         </p:txBody>
       </p:sp>
@@ -9814,6 +9754,7 @@
           <a:lstStyle/>
           <a:p>
             <a:pPr algn="ctr"/>
+            <a:endParaRPr/>
           </a:p>
         </p:txBody>
       </p:sp>
@@ -9854,7 +9795,7 @@
           </a:fontRef>
         </p:style>
         <p:txBody>
-          <a:bodyPr rtlCol="0" anchor="ctr" lIns="0" rIns="0"/>
+          <a:bodyPr lIns="0" rIns="0" rtlCol="0" anchor="ctr"/>
           <a:lstStyle/>
           <a:p>
             <a:pPr algn="ctr"/>
@@ -9887,7 +9828,7 @@
           <a:noFill/>
         </p:spPr>
         <p:txBody>
-          <a:bodyPr wrap="square" anchor="ctr" lIns="45720" rIns="45720" tIns="27432" bIns="27432">
+          <a:bodyPr wrap="square" lIns="45720" tIns="27432" rIns="45720" bIns="27432" anchor="ctr">
             <a:spAutoFit/>
           </a:bodyPr>
           <a:lstStyle/>
@@ -9922,7 +9863,7 @@
           <a:noFill/>
         </p:spPr>
         <p:txBody>
-          <a:bodyPr wrap="square" anchor="t" lIns="45720" rIns="45720" tIns="27432" bIns="27432">
+          <a:bodyPr wrap="square" lIns="45720" tIns="27432" rIns="45720" bIns="27432" anchor="t">
             <a:spAutoFit/>
           </a:bodyPr>
           <a:lstStyle/>
@@ -9987,6 +9928,7 @@
           <a:lstStyle/>
           <a:p>
             <a:pPr algn="ctr"/>
+            <a:endParaRPr/>
           </a:p>
         </p:txBody>
       </p:sp>
@@ -10031,6 +9973,7 @@
           <a:lstStyle/>
           <a:p>
             <a:pPr algn="ctr"/>
+            <a:endParaRPr/>
           </a:p>
         </p:txBody>
       </p:sp>
@@ -10071,7 +10014,7 @@
           </a:fontRef>
         </p:style>
         <p:txBody>
-          <a:bodyPr rtlCol="0" anchor="ctr" lIns="0" rIns="0"/>
+          <a:bodyPr lIns="0" rIns="0" rtlCol="0" anchor="ctr"/>
           <a:lstStyle/>
           <a:p>
             <a:pPr algn="ctr"/>
@@ -10104,7 +10047,7 @@
           <a:noFill/>
         </p:spPr>
         <p:txBody>
-          <a:bodyPr wrap="square" anchor="ctr" lIns="45720" rIns="45720" tIns="27432" bIns="27432">
+          <a:bodyPr wrap="square" lIns="45720" tIns="27432" rIns="45720" bIns="27432" anchor="ctr">
             <a:spAutoFit/>
           </a:bodyPr>
           <a:lstStyle/>
@@ -10139,7 +10082,7 @@
           <a:noFill/>
         </p:spPr>
         <p:txBody>
-          <a:bodyPr wrap="square" anchor="t" lIns="45720" rIns="45720" tIns="27432" bIns="27432">
+          <a:bodyPr wrap="square" lIns="45720" tIns="27432" rIns="45720" bIns="27432" anchor="t">
             <a:spAutoFit/>
           </a:bodyPr>
           <a:lstStyle/>
@@ -10204,6 +10147,7 @@
           <a:lstStyle/>
           <a:p>
             <a:pPr algn="ctr"/>
+            <a:endParaRPr/>
           </a:p>
         </p:txBody>
       </p:sp>
@@ -10248,6 +10192,7 @@
           <a:lstStyle/>
           <a:p>
             <a:pPr algn="ctr"/>
+            <a:endParaRPr/>
           </a:p>
         </p:txBody>
       </p:sp>
@@ -10288,7 +10233,7 @@
           </a:fontRef>
         </p:style>
         <p:txBody>
-          <a:bodyPr rtlCol="0" anchor="ctr" lIns="0" rIns="0"/>
+          <a:bodyPr lIns="0" rIns="0" rtlCol="0" anchor="ctr"/>
           <a:lstStyle/>
           <a:p>
             <a:pPr algn="ctr"/>
@@ -10321,7 +10266,7 @@
           <a:noFill/>
         </p:spPr>
         <p:txBody>
-          <a:bodyPr wrap="square" anchor="ctr" lIns="45720" rIns="45720" tIns="27432" bIns="27432">
+          <a:bodyPr wrap="square" lIns="45720" tIns="27432" rIns="45720" bIns="27432" anchor="ctr">
             <a:spAutoFit/>
           </a:bodyPr>
           <a:lstStyle/>
@@ -10356,7 +10301,7 @@
           <a:noFill/>
         </p:spPr>
         <p:txBody>
-          <a:bodyPr wrap="square" anchor="t" lIns="45720" rIns="45720" tIns="27432" bIns="27432">
+          <a:bodyPr wrap="square" lIns="45720" tIns="27432" rIns="45720" bIns="27432" anchor="t">
             <a:spAutoFit/>
           </a:bodyPr>
           <a:lstStyle/>
@@ -10421,6 +10366,7 @@
           <a:lstStyle/>
           <a:p>
             <a:pPr algn="ctr"/>
+            <a:endParaRPr/>
           </a:p>
         </p:txBody>
       </p:sp>
@@ -10465,6 +10411,7 @@
           <a:lstStyle/>
           <a:p>
             <a:pPr algn="ctr"/>
+            <a:endParaRPr/>
           </a:p>
         </p:txBody>
       </p:sp>
@@ -10505,7 +10452,7 @@
           </a:fontRef>
         </p:style>
         <p:txBody>
-          <a:bodyPr rtlCol="0" anchor="ctr" lIns="0" rIns="0"/>
+          <a:bodyPr lIns="0" rIns="0" rtlCol="0" anchor="ctr"/>
           <a:lstStyle/>
           <a:p>
             <a:pPr algn="ctr"/>
@@ -10538,7 +10485,7 @@
           <a:noFill/>
         </p:spPr>
         <p:txBody>
-          <a:bodyPr wrap="square" anchor="ctr" lIns="45720" rIns="45720" tIns="27432" bIns="27432">
+          <a:bodyPr wrap="square" lIns="45720" tIns="27432" rIns="45720" bIns="27432" anchor="ctr">
             <a:spAutoFit/>
           </a:bodyPr>
           <a:lstStyle/>
@@ -10573,7 +10520,7 @@
           <a:noFill/>
         </p:spPr>
         <p:txBody>
-          <a:bodyPr wrap="square" anchor="t" lIns="45720" rIns="45720" tIns="27432" bIns="27432">
+          <a:bodyPr wrap="square" lIns="45720" tIns="27432" rIns="45720" bIns="27432" anchor="t">
             <a:spAutoFit/>
           </a:bodyPr>
           <a:lstStyle/>
@@ -10638,6 +10585,7 @@
           <a:lstStyle/>
           <a:p>
             <a:pPr algn="ctr"/>
+            <a:endParaRPr/>
           </a:p>
         </p:txBody>
       </p:sp>
@@ -10682,6 +10630,7 @@
           <a:lstStyle/>
           <a:p>
             <a:pPr algn="ctr"/>
+            <a:endParaRPr/>
           </a:p>
         </p:txBody>
       </p:sp>
@@ -10722,7 +10671,7 @@
           </a:fontRef>
         </p:style>
         <p:txBody>
-          <a:bodyPr rtlCol="0" anchor="ctr" lIns="0" rIns="0"/>
+          <a:bodyPr lIns="0" rIns="0" rtlCol="0" anchor="ctr"/>
           <a:lstStyle/>
           <a:p>
             <a:pPr algn="ctr"/>
@@ -10755,7 +10704,7 @@
           <a:noFill/>
         </p:spPr>
         <p:txBody>
-          <a:bodyPr wrap="square" anchor="ctr" lIns="45720" rIns="45720" tIns="27432" bIns="27432">
+          <a:bodyPr wrap="square" lIns="45720" tIns="27432" rIns="45720" bIns="27432" anchor="ctr">
             <a:spAutoFit/>
           </a:bodyPr>
           <a:lstStyle/>
@@ -10790,7 +10739,7 @@
           <a:noFill/>
         </p:spPr>
         <p:txBody>
-          <a:bodyPr wrap="square" anchor="t" lIns="45720" rIns="45720" tIns="27432" bIns="27432">
+          <a:bodyPr wrap="square" lIns="45720" tIns="27432" rIns="45720" bIns="27432" anchor="t">
             <a:spAutoFit/>
           </a:bodyPr>
           <a:lstStyle/>
@@ -10855,6 +10804,7 @@
           <a:lstStyle/>
           <a:p>
             <a:pPr algn="ctr"/>
+            <a:endParaRPr/>
           </a:p>
         </p:txBody>
       </p:sp>
@@ -10899,6 +10849,7 @@
           <a:lstStyle/>
           <a:p>
             <a:pPr algn="ctr"/>
+            <a:endParaRPr/>
           </a:p>
         </p:txBody>
       </p:sp>
@@ -10939,7 +10890,7 @@
           </a:fontRef>
         </p:style>
         <p:txBody>
-          <a:bodyPr rtlCol="0" anchor="ctr" lIns="0" rIns="0"/>
+          <a:bodyPr lIns="0" rIns="0" rtlCol="0" anchor="ctr"/>
           <a:lstStyle/>
           <a:p>
             <a:pPr algn="ctr"/>
@@ -10972,7 +10923,7 @@
           <a:noFill/>
         </p:spPr>
         <p:txBody>
-          <a:bodyPr wrap="square" anchor="ctr" lIns="45720" rIns="45720" tIns="27432" bIns="27432">
+          <a:bodyPr wrap="square" lIns="45720" tIns="27432" rIns="45720" bIns="27432" anchor="ctr">
             <a:spAutoFit/>
           </a:bodyPr>
           <a:lstStyle/>
@@ -11007,7 +10958,7 @@
           <a:noFill/>
         </p:spPr>
         <p:txBody>
-          <a:bodyPr wrap="square" anchor="t" lIns="45720" rIns="45720" tIns="27432" bIns="27432">
+          <a:bodyPr wrap="square" lIns="45720" tIns="27432" rIns="45720" bIns="27432" anchor="t">
             <a:spAutoFit/>
           </a:bodyPr>
           <a:lstStyle/>
@@ -11038,7 +10989,7 @@
 </file>
 
 <file path=ppt/slides/slide7.xml><?xml version="1.0" encoding="utf-8"?>
-<p:sld xmlns:a="http://schemas.openxmlformats.org/drawingml/2006/main" xmlns:p="http://schemas.openxmlformats.org/presentationml/2006/main" xmlns:r="http://schemas.openxmlformats.org/officeDocument/2006/relationships">
+<p:sld xmlns:a="http://schemas.openxmlformats.org/drawingml/2006/main" xmlns:r="http://schemas.openxmlformats.org/officeDocument/2006/relationships" xmlns:p="http://schemas.openxmlformats.org/presentationml/2006/main">
   <p:cSld>
     <p:spTree>
       <p:nvGrpSpPr>
@@ -11046,7 +10997,14 @@
         <p:cNvGrpSpPr/>
         <p:nvPr/>
       </p:nvGrpSpPr>
-      <p:grpSpPr/>
+      <p:grpSpPr>
+        <a:xfrm>
+          <a:off x="0" y="0"/>
+          <a:ext cx="0" cy="0"/>
+          <a:chOff x="0" y="0"/>
+          <a:chExt cx="0" cy="0"/>
+        </a:xfrm>
+      </p:grpSpPr>
       <p:sp>
         <p:nvSpPr>
           <p:cNvPr id="2" name="Rectangle 1"/>
@@ -11088,6 +11046,7 @@
           <a:lstStyle/>
           <a:p>
             <a:pPr algn="ctr"/>
+            <a:endParaRPr/>
           </a:p>
         </p:txBody>
       </p:sp>
@@ -11132,6 +11091,7 @@
           <a:lstStyle/>
           <a:p>
             <a:pPr algn="ctr"/>
+            <a:endParaRPr/>
           </a:p>
         </p:txBody>
       </p:sp>
@@ -11152,7 +11112,7 @@
           <a:noFill/>
         </p:spPr>
         <p:txBody>
-          <a:bodyPr wrap="square" anchor="t" lIns="45720" rIns="45720" tIns="27432" bIns="27432">
+          <a:bodyPr wrap="square" lIns="45720" tIns="27432" rIns="45720" bIns="27432" anchor="t">
             <a:spAutoFit/>
           </a:bodyPr>
           <a:lstStyle/>
@@ -11187,7 +11147,7 @@
           <a:noFill/>
         </p:spPr>
         <p:txBody>
-          <a:bodyPr wrap="square" anchor="t" lIns="45720" rIns="45720" tIns="27432" bIns="27432">
+          <a:bodyPr wrap="square" lIns="45720" tIns="27432" rIns="45720" bIns="27432" anchor="t">
             <a:spAutoFit/>
           </a:bodyPr>
           <a:lstStyle/>
@@ -11214,7 +11174,7 @@
           <p:nvPr/>
         </p:nvPicPr>
         <p:blipFill>
-          <a:blip r:embed="rId2"/>
+          <a:blip r:embed="rId3"/>
           <a:stretch>
             <a:fillRect/>
           </a:stretch>
@@ -11246,7 +11206,7 @@
           <a:noFill/>
         </p:spPr>
         <p:txBody>
-          <a:bodyPr wrap="square" anchor="t" lIns="45720" rIns="45720" tIns="27432" bIns="27432">
+          <a:bodyPr wrap="square" lIns="45720" tIns="27432" rIns="45720" bIns="27432" anchor="t">
             <a:spAutoFit/>
           </a:bodyPr>
           <a:lstStyle/>
@@ -11281,7 +11241,7 @@
           <a:noFill/>
         </p:spPr>
         <p:txBody>
-          <a:bodyPr wrap="square" anchor="t" lIns="45720" rIns="45720" tIns="27432" bIns="27432">
+          <a:bodyPr wrap="square" lIns="45720" tIns="27432" rIns="45720" bIns="27432" anchor="t">
             <a:spAutoFit/>
           </a:bodyPr>
           <a:lstStyle/>
@@ -11342,6 +11302,7 @@
           <a:lstStyle/>
           <a:p>
             <a:pPr algn="ctr"/>
+            <a:endParaRPr/>
           </a:p>
         </p:txBody>
       </p:sp>
@@ -11386,6 +11347,7 @@
           <a:lstStyle/>
           <a:p>
             <a:pPr algn="ctr"/>
+            <a:endParaRPr/>
           </a:p>
         </p:txBody>
       </p:sp>
@@ -11406,7 +11368,7 @@
           <a:noFill/>
         </p:spPr>
         <p:txBody>
-          <a:bodyPr wrap="square" anchor="t" lIns="45720" rIns="45720" tIns="27432" bIns="27432">
+          <a:bodyPr wrap="square" lIns="45720" tIns="27432" rIns="45720" bIns="27432" anchor="t">
             <a:spAutoFit/>
           </a:bodyPr>
           <a:lstStyle/>
@@ -11441,7 +11403,7 @@
           <a:noFill/>
         </p:spPr>
         <p:txBody>
-          <a:bodyPr wrap="square" anchor="t" lIns="45720" rIns="45720" tIns="27432" bIns="27432">
+          <a:bodyPr wrap="square" lIns="45720" tIns="27432" rIns="45720" bIns="27432" anchor="t">
             <a:spAutoFit/>
           </a:bodyPr>
           <a:lstStyle/>
@@ -11476,7 +11438,7 @@
           <a:noFill/>
         </p:spPr>
         <p:txBody>
-          <a:bodyPr wrap="square" anchor="t" lIns="45720" rIns="45720" tIns="27432" bIns="27432">
+          <a:bodyPr wrap="square" lIns="45720" tIns="27432" rIns="45720" bIns="27432" anchor="t">
             <a:spAutoFit/>
           </a:bodyPr>
           <a:lstStyle/>
@@ -11589,6 +11551,7 @@
           <a:lstStyle/>
           <a:p>
             <a:pPr algn="ctr"/>
+            <a:endParaRPr/>
           </a:p>
         </p:txBody>
       </p:sp>
@@ -11633,6 +11596,7 @@
           <a:lstStyle/>
           <a:p>
             <a:pPr algn="ctr"/>
+            <a:endParaRPr/>
           </a:p>
         </p:txBody>
       </p:sp>
@@ -11653,7 +11617,7 @@
           <a:noFill/>
         </p:spPr>
         <p:txBody>
-          <a:bodyPr wrap="square" anchor="t" lIns="45720" rIns="45720" tIns="27432" bIns="27432">
+          <a:bodyPr wrap="square" lIns="45720" tIns="27432" rIns="45720" bIns="27432" anchor="t">
             <a:spAutoFit/>
           </a:bodyPr>
           <a:lstStyle/>
@@ -11688,7 +11652,7 @@
           <a:noFill/>
         </p:spPr>
         <p:txBody>
-          <a:bodyPr wrap="square" anchor="t" lIns="45720" rIns="45720" tIns="27432" bIns="27432">
+          <a:bodyPr wrap="square" lIns="45720" tIns="27432" rIns="45720" bIns="27432" anchor="t">
             <a:spAutoFit/>
           </a:bodyPr>
           <a:lstStyle/>
@@ -11723,7 +11687,7 @@
           <a:noFill/>
         </p:spPr>
         <p:txBody>
-          <a:bodyPr wrap="square" anchor="t" lIns="45720" rIns="45720" tIns="27432" bIns="27432">
+          <a:bodyPr wrap="square" lIns="45720" tIns="27432" rIns="45720" bIns="27432" anchor="t">
             <a:spAutoFit/>
           </a:bodyPr>
           <a:lstStyle/>
@@ -11836,6 +11800,7 @@
           <a:lstStyle/>
           <a:p>
             <a:pPr algn="ctr"/>
+            <a:endParaRPr/>
           </a:p>
         </p:txBody>
       </p:sp>
@@ -11880,6 +11845,7 @@
           <a:lstStyle/>
           <a:p>
             <a:pPr algn="ctr"/>
+            <a:endParaRPr/>
           </a:p>
         </p:txBody>
       </p:sp>
@@ -11900,7 +11866,7 @@
           <a:noFill/>
         </p:spPr>
         <p:txBody>
-          <a:bodyPr wrap="square" anchor="t" lIns="45720" rIns="45720" tIns="27432" bIns="27432">
+          <a:bodyPr wrap="square" lIns="45720" tIns="27432" rIns="45720" bIns="27432" anchor="t">
             <a:spAutoFit/>
           </a:bodyPr>
           <a:lstStyle/>
@@ -11935,7 +11901,7 @@
           <a:noFill/>
         </p:spPr>
         <p:txBody>
-          <a:bodyPr wrap="square" anchor="t" lIns="45720" rIns="45720" tIns="27432" bIns="27432">
+          <a:bodyPr wrap="square" lIns="45720" tIns="27432" rIns="45720" bIns="27432" anchor="t">
             <a:spAutoFit/>
           </a:bodyPr>
           <a:lstStyle/>
@@ -11970,7 +11936,7 @@
           <a:noFill/>
         </p:spPr>
         <p:txBody>
-          <a:bodyPr wrap="square" anchor="t" lIns="45720" rIns="45720" tIns="27432" bIns="27432">
+          <a:bodyPr wrap="square" lIns="45720" tIns="27432" rIns="45720" bIns="27432" anchor="t">
             <a:spAutoFit/>
           </a:bodyPr>
           <a:lstStyle/>
@@ -12083,6 +12049,7 @@
           <a:lstStyle/>
           <a:p>
             <a:pPr algn="ctr"/>
+            <a:endParaRPr/>
           </a:p>
         </p:txBody>
       </p:sp>
@@ -12127,6 +12094,7 @@
           <a:lstStyle/>
           <a:p>
             <a:pPr algn="ctr"/>
+            <a:endParaRPr/>
           </a:p>
         </p:txBody>
       </p:sp>
@@ -12147,7 +12115,7 @@
           <a:noFill/>
         </p:spPr>
         <p:txBody>
-          <a:bodyPr wrap="square" anchor="t" lIns="45720" rIns="45720" tIns="27432" bIns="27432">
+          <a:bodyPr wrap="square" lIns="45720" tIns="27432" rIns="45720" bIns="27432" anchor="t">
             <a:spAutoFit/>
           </a:bodyPr>
           <a:lstStyle/>
@@ -12182,7 +12150,7 @@
           <a:noFill/>
         </p:spPr>
         <p:txBody>
-          <a:bodyPr wrap="square" anchor="t" lIns="45720" rIns="45720" tIns="27432" bIns="27432">
+          <a:bodyPr wrap="square" lIns="45720" tIns="27432" rIns="45720" bIns="27432" anchor="t">
             <a:spAutoFit/>
           </a:bodyPr>
           <a:lstStyle/>
@@ -12217,7 +12185,7 @@
           <a:noFill/>
         </p:spPr>
         <p:txBody>
-          <a:bodyPr wrap="square" anchor="t" lIns="45720" rIns="45720" tIns="27432" bIns="27432">
+          <a:bodyPr wrap="square" lIns="45720" tIns="27432" rIns="45720" bIns="27432" anchor="t">
             <a:spAutoFit/>
           </a:bodyPr>
           <a:lstStyle/>
@@ -12304,7 +12272,7 @@
           <a:noFill/>
         </p:spPr>
         <p:txBody>
-          <a:bodyPr wrap="square" anchor="t" lIns="45720" rIns="45720" tIns="27432" bIns="27432">
+          <a:bodyPr wrap="square" lIns="45720" tIns="27432" rIns="45720" bIns="27432" anchor="t">
             <a:spAutoFit/>
           </a:bodyPr>
           <a:lstStyle/>
@@ -12359,7 +12327,7 @@
           </a:fontRef>
         </p:style>
         <p:txBody>
-          <a:bodyPr rtlCol="0" anchor="ctr" lIns="45720" rIns="137160"/>
+          <a:bodyPr lIns="45720" rIns="137160" rtlCol="0" anchor="ctr"/>
           <a:lstStyle/>
           <a:p>
             <a:pPr algn="ctr"/>
@@ -12414,7 +12382,7 @@
           </a:fontRef>
         </p:style>
         <p:txBody>
-          <a:bodyPr rtlCol="0" anchor="ctr" lIns="45720" rIns="137160"/>
+          <a:bodyPr lIns="45720" rIns="137160" rtlCol="0" anchor="ctr"/>
           <a:lstStyle/>
           <a:p>
             <a:pPr algn="ctr"/>
@@ -12467,7 +12435,7 @@
           </a:fontRef>
         </p:style>
         <p:txBody>
-          <a:bodyPr rtlCol="0" anchor="ctr" lIns="45720" rIns="137160"/>
+          <a:bodyPr lIns="45720" rIns="137160" rtlCol="0" anchor="ctr"/>
           <a:lstStyle/>
           <a:p>
             <a:pPr algn="ctr"/>
@@ -12522,7 +12490,7 @@
           </a:fontRef>
         </p:style>
         <p:txBody>
-          <a:bodyPr rtlCol="0" anchor="ctr" lIns="45720" rIns="137160"/>
+          <a:bodyPr lIns="45720" rIns="137160" rtlCol="0" anchor="ctr"/>
           <a:lstStyle/>
           <a:p>
             <a:pPr algn="ctr"/>
@@ -12575,7 +12543,7 @@
           </a:fontRef>
         </p:style>
         <p:txBody>
-          <a:bodyPr rtlCol="0" anchor="ctr" lIns="45720" rIns="137160"/>
+          <a:bodyPr lIns="45720" rIns="137160" rtlCol="0" anchor="ctr"/>
           <a:lstStyle/>
           <a:p>
             <a:pPr algn="ctr"/>
@@ -12630,7 +12598,7 @@
           </a:fontRef>
         </p:style>
         <p:txBody>
-          <a:bodyPr rtlCol="0" anchor="ctr" lIns="45720" rIns="137160"/>
+          <a:bodyPr lIns="45720" rIns="137160" rtlCol="0" anchor="ctr"/>
           <a:lstStyle/>
           <a:p>
             <a:pPr algn="ctr"/>
@@ -12655,7 +12623,7 @@
 </file>
 
 <file path=ppt/slides/slide8.xml><?xml version="1.0" encoding="utf-8"?>
-<p:sld xmlns:a="http://schemas.openxmlformats.org/drawingml/2006/main" xmlns:p="http://schemas.openxmlformats.org/presentationml/2006/main" xmlns:r="http://schemas.openxmlformats.org/officeDocument/2006/relationships">
+<p:sld xmlns:a="http://schemas.openxmlformats.org/drawingml/2006/main" xmlns:r="http://schemas.openxmlformats.org/officeDocument/2006/relationships" xmlns:p="http://schemas.openxmlformats.org/presentationml/2006/main">
   <p:cSld>
     <p:spTree>
       <p:nvGrpSpPr>
@@ -12663,7 +12631,14 @@
         <p:cNvGrpSpPr/>
         <p:nvPr/>
       </p:nvGrpSpPr>
-      <p:grpSpPr/>
+      <p:grpSpPr>
+        <a:xfrm>
+          <a:off x="0" y="0"/>
+          <a:ext cx="0" cy="0"/>
+          <a:chOff x="0" y="0"/>
+          <a:chExt cx="0" cy="0"/>
+        </a:xfrm>
+      </p:grpSpPr>
       <p:sp>
         <p:nvSpPr>
           <p:cNvPr id="2" name="Rectangle 1"/>
@@ -12705,6 +12680,7 @@
           <a:lstStyle/>
           <a:p>
             <a:pPr algn="ctr"/>
+            <a:endParaRPr/>
           </a:p>
         </p:txBody>
       </p:sp>
@@ -12749,6 +12725,7 @@
           <a:lstStyle/>
           <a:p>
             <a:pPr algn="ctr"/>
+            <a:endParaRPr/>
           </a:p>
         </p:txBody>
       </p:sp>
@@ -12769,7 +12746,7 @@
           <a:noFill/>
         </p:spPr>
         <p:txBody>
-          <a:bodyPr wrap="square" anchor="t" lIns="45720" rIns="45720" tIns="27432" bIns="27432">
+          <a:bodyPr wrap="square" lIns="45720" tIns="27432" rIns="45720" bIns="27432" anchor="t">
             <a:spAutoFit/>
           </a:bodyPr>
           <a:lstStyle/>
@@ -12804,7 +12781,7 @@
           <a:noFill/>
         </p:spPr>
         <p:txBody>
-          <a:bodyPr wrap="square" anchor="t" lIns="45720" rIns="45720" tIns="27432" bIns="27432">
+          <a:bodyPr wrap="square" lIns="45720" tIns="27432" rIns="45720" bIns="27432" anchor="t">
             <a:spAutoFit/>
           </a:bodyPr>
           <a:lstStyle/>
@@ -12831,7 +12808,7 @@
           <p:nvPr/>
         </p:nvPicPr>
         <p:blipFill>
-          <a:blip r:embed="rId2"/>
+          <a:blip r:embed="rId3"/>
           <a:stretch>
             <a:fillRect/>
           </a:stretch>
@@ -12863,7 +12840,7 @@
           <a:noFill/>
         </p:spPr>
         <p:txBody>
-          <a:bodyPr wrap="square" anchor="t" lIns="45720" rIns="45720" tIns="27432" bIns="27432">
+          <a:bodyPr wrap="square" lIns="45720" tIns="27432" rIns="45720" bIns="27432" anchor="t">
             <a:spAutoFit/>
           </a:bodyPr>
           <a:lstStyle/>
@@ -12898,7 +12875,7 @@
           <a:noFill/>
         </p:spPr>
         <p:txBody>
-          <a:bodyPr wrap="square" anchor="t" lIns="45720" rIns="45720" tIns="27432" bIns="27432">
+          <a:bodyPr wrap="square" lIns="45720" tIns="27432" rIns="45720" bIns="27432" anchor="t">
             <a:spAutoFit/>
           </a:bodyPr>
           <a:lstStyle/>
@@ -12959,6 +12936,7 @@
           <a:lstStyle/>
           <a:p>
             <a:pPr algn="ctr"/>
+            <a:endParaRPr/>
           </a:p>
         </p:txBody>
       </p:sp>
@@ -13032,7 +13010,7 @@
           <a:noFill/>
         </p:spPr>
         <p:txBody>
-          <a:bodyPr wrap="square" anchor="ctr" lIns="45720" rIns="45720" tIns="27432" bIns="27432">
+          <a:bodyPr wrap="square" lIns="45720" tIns="27432" rIns="45720" bIns="27432" anchor="ctr">
             <a:spAutoFit/>
           </a:bodyPr>
           <a:lstStyle/>
@@ -13067,7 +13045,7 @@
           <a:noFill/>
         </p:spPr>
         <p:txBody>
-          <a:bodyPr wrap="square" anchor="ctr" lIns="45720" rIns="45720" tIns="27432" bIns="27432">
+          <a:bodyPr wrap="square" lIns="45720" tIns="27432" rIns="45720" bIns="27432" anchor="ctr">
             <a:spAutoFit/>
           </a:bodyPr>
           <a:lstStyle/>
@@ -13128,6 +13106,7 @@
           <a:lstStyle/>
           <a:p>
             <a:pPr algn="ctr"/>
+            <a:endParaRPr/>
           </a:p>
         </p:txBody>
       </p:sp>
@@ -13201,7 +13180,7 @@
           <a:noFill/>
         </p:spPr>
         <p:txBody>
-          <a:bodyPr wrap="square" anchor="ctr" lIns="45720" rIns="45720" tIns="27432" bIns="27432">
+          <a:bodyPr wrap="square" lIns="45720" tIns="27432" rIns="45720" bIns="27432" anchor="ctr">
             <a:spAutoFit/>
           </a:bodyPr>
           <a:lstStyle/>
@@ -13236,7 +13215,7 @@
           <a:noFill/>
         </p:spPr>
         <p:txBody>
-          <a:bodyPr wrap="square" anchor="ctr" lIns="45720" rIns="45720" tIns="27432" bIns="27432">
+          <a:bodyPr wrap="square" lIns="45720" tIns="27432" rIns="45720" bIns="27432" anchor="ctr">
             <a:spAutoFit/>
           </a:bodyPr>
           <a:lstStyle/>
@@ -13297,6 +13276,7 @@
           <a:lstStyle/>
           <a:p>
             <a:pPr algn="ctr"/>
+            <a:endParaRPr/>
           </a:p>
         </p:txBody>
       </p:sp>
@@ -13370,7 +13350,7 @@
           <a:noFill/>
         </p:spPr>
         <p:txBody>
-          <a:bodyPr wrap="square" anchor="ctr" lIns="45720" rIns="45720" tIns="27432" bIns="27432">
+          <a:bodyPr wrap="square" lIns="45720" tIns="27432" rIns="45720" bIns="27432" anchor="ctr">
             <a:spAutoFit/>
           </a:bodyPr>
           <a:lstStyle/>
@@ -13405,7 +13385,7 @@
           <a:noFill/>
         </p:spPr>
         <p:txBody>
-          <a:bodyPr wrap="square" anchor="ctr" lIns="45720" rIns="45720" tIns="27432" bIns="27432">
+          <a:bodyPr wrap="square" lIns="45720" tIns="27432" rIns="45720" bIns="27432" anchor="ctr">
             <a:spAutoFit/>
           </a:bodyPr>
           <a:lstStyle/>
@@ -13466,6 +13446,7 @@
           <a:lstStyle/>
           <a:p>
             <a:pPr algn="ctr"/>
+            <a:endParaRPr/>
           </a:p>
         </p:txBody>
       </p:sp>
@@ -13539,7 +13520,7 @@
           <a:noFill/>
         </p:spPr>
         <p:txBody>
-          <a:bodyPr wrap="square" anchor="ctr" lIns="45720" rIns="45720" tIns="27432" bIns="27432">
+          <a:bodyPr wrap="square" lIns="45720" tIns="27432" rIns="45720" bIns="27432" anchor="ctr">
             <a:spAutoFit/>
           </a:bodyPr>
           <a:lstStyle/>
@@ -13574,7 +13555,7 @@
           <a:noFill/>
         </p:spPr>
         <p:txBody>
-          <a:bodyPr wrap="square" anchor="ctr" lIns="45720" rIns="45720" tIns="27432" bIns="27432">
+          <a:bodyPr wrap="square" lIns="45720" tIns="27432" rIns="45720" bIns="27432" anchor="ctr">
             <a:spAutoFit/>
           </a:bodyPr>
           <a:lstStyle/>
@@ -13635,6 +13616,7 @@
           <a:lstStyle/>
           <a:p>
             <a:pPr algn="ctr"/>
+            <a:endParaRPr/>
           </a:p>
         </p:txBody>
       </p:sp>
@@ -13708,7 +13690,7 @@
           <a:noFill/>
         </p:spPr>
         <p:txBody>
-          <a:bodyPr wrap="square" anchor="ctr" lIns="45720" rIns="45720" tIns="27432" bIns="27432">
+          <a:bodyPr wrap="square" lIns="45720" tIns="27432" rIns="45720" bIns="27432" anchor="ctr">
             <a:spAutoFit/>
           </a:bodyPr>
           <a:lstStyle/>
@@ -13743,7 +13725,7 @@
           <a:noFill/>
         </p:spPr>
         <p:txBody>
-          <a:bodyPr wrap="square" anchor="ctr" lIns="45720" rIns="45720" tIns="27432" bIns="27432">
+          <a:bodyPr wrap="square" lIns="45720" tIns="27432" rIns="45720" bIns="27432" anchor="ctr">
             <a:spAutoFit/>
           </a:bodyPr>
           <a:lstStyle/>
@@ -13770,7 +13752,7 @@
 </file>
 
 <file path=ppt/slides/slide9.xml><?xml version="1.0" encoding="utf-8"?>
-<p:sld xmlns:a="http://schemas.openxmlformats.org/drawingml/2006/main" xmlns:p="http://schemas.openxmlformats.org/presentationml/2006/main" xmlns:r="http://schemas.openxmlformats.org/officeDocument/2006/relationships">
+<p:sld xmlns:a="http://schemas.openxmlformats.org/drawingml/2006/main" xmlns:r="http://schemas.openxmlformats.org/officeDocument/2006/relationships" xmlns:p="http://schemas.openxmlformats.org/presentationml/2006/main">
   <p:cSld>
     <p:spTree>
       <p:nvGrpSpPr>
@@ -13778,7 +13760,14 @@
         <p:cNvGrpSpPr/>
         <p:nvPr/>
       </p:nvGrpSpPr>
-      <p:grpSpPr/>
+      <p:grpSpPr>
+        <a:xfrm>
+          <a:off x="0" y="0"/>
+          <a:ext cx="0" cy="0"/>
+          <a:chOff x="0" y="0"/>
+          <a:chExt cx="0" cy="0"/>
+        </a:xfrm>
+      </p:grpSpPr>
       <p:sp>
         <p:nvSpPr>
           <p:cNvPr id="2" name="Rectangle 1"/>
@@ -13820,6 +13809,7 @@
           <a:lstStyle/>
           <a:p>
             <a:pPr algn="ctr"/>
+            <a:endParaRPr/>
           </a:p>
         </p:txBody>
       </p:sp>
@@ -13832,7 +13822,7 @@
           <p:nvPr/>
         </p:nvPicPr>
         <p:blipFill>
-          <a:blip r:embed="rId2"/>
+          <a:blip r:embed="rId3"/>
           <a:stretch>
             <a:fillRect/>
           </a:stretch>
@@ -13864,7 +13854,7 @@
           <a:noFill/>
         </p:spPr>
         <p:txBody>
-          <a:bodyPr wrap="square" anchor="t" lIns="45720" rIns="45720" tIns="27432" bIns="27432">
+          <a:bodyPr wrap="square" lIns="45720" tIns="27432" rIns="45720" bIns="27432" anchor="t">
             <a:spAutoFit/>
           </a:bodyPr>
           <a:lstStyle/>
@@ -13899,7 +13889,7 @@
           <a:noFill/>
         </p:spPr>
         <p:txBody>
-          <a:bodyPr wrap="square" anchor="t" lIns="45720" rIns="45720" tIns="27432" bIns="27432">
+          <a:bodyPr wrap="square" lIns="45720" tIns="27432" rIns="45720" bIns="27432" anchor="t">
             <a:spAutoFit/>
           </a:bodyPr>
           <a:lstStyle/>
@@ -13958,6 +13948,7 @@
           <a:lstStyle/>
           <a:p>
             <a:pPr algn="ctr"/>
+            <a:endParaRPr/>
           </a:p>
         </p:txBody>
       </p:sp>
@@ -14300,44 +14291,44 @@
         <a:sysClr val="window" lastClr="FFFFFF"/>
       </a:lt1>
       <a:dk2>
-        <a:srgbClr val="1F497D"/>
+        <a:srgbClr val="44546A"/>
       </a:dk2>
       <a:lt2>
-        <a:srgbClr val="EEECE1"/>
+        <a:srgbClr val="E7E6E6"/>
       </a:lt2>
       <a:accent1>
-        <a:srgbClr val="4F81BD"/>
+        <a:srgbClr val="4472C4"/>
       </a:accent1>
       <a:accent2>
-        <a:srgbClr val="C0504D"/>
+        <a:srgbClr val="ED7D31"/>
       </a:accent2>
       <a:accent3>
-        <a:srgbClr val="9BBB59"/>
+        <a:srgbClr val="A5A5A5"/>
       </a:accent3>
       <a:accent4>
-        <a:srgbClr val="8064A2"/>
+        <a:srgbClr val="FFC000"/>
       </a:accent4>
       <a:accent5>
-        <a:srgbClr val="4BACC6"/>
+        <a:srgbClr val="5B9BD5"/>
       </a:accent5>
       <a:accent6>
-        <a:srgbClr val="F79646"/>
+        <a:srgbClr val="70AD47"/>
       </a:accent6>
       <a:hlink>
-        <a:srgbClr val="0000FF"/>
+        <a:srgbClr val="0563C1"/>
       </a:hlink>
       <a:folHlink>
-        <a:srgbClr val="800080"/>
+        <a:srgbClr val="954F72"/>
       </a:folHlink>
     </a:clrScheme>
     <a:fontScheme name="Office">
       <a:majorFont>
-        <a:latin typeface="Calibri"/>
+        <a:latin typeface="Calibri Light" panose="020F0302020204030204"/>
         <a:ea typeface=""/>
         <a:cs typeface=""/>
-        <a:font script="Jpan" typeface="ＭＳ Ｐゴシック"/>
+        <a:font script="Jpan" typeface="游ゴシック Light"/>
         <a:font script="Hang" typeface="맑은 고딕"/>
-        <a:font script="Hans" typeface="宋体"/>
+        <a:font script="Hans" typeface="等线 Light"/>
         <a:font script="Hant" typeface="新細明體"/>
         <a:font script="Arab" typeface="Times New Roman"/>
         <a:font script="Hebr" typeface="Times New Roman"/>
@@ -14365,14 +14356,31 @@
         <a:font script="Viet" typeface="Times New Roman"/>
         <a:font script="Uigh" typeface="Microsoft Uighur"/>
         <a:font script="Geor" typeface="Sylfaen"/>
+        <a:font script="Armn" typeface="Arial"/>
+        <a:font script="Bugi" typeface="Leelawadee UI"/>
+        <a:font script="Bopo" typeface="Microsoft JhengHei"/>
+        <a:font script="Java" typeface="Javanese Text"/>
+        <a:font script="Lisu" typeface="Segoe UI"/>
+        <a:font script="Mymr" typeface="Myanmar Text"/>
+        <a:font script="Nkoo" typeface="Ebrima"/>
+        <a:font script="Olck" typeface="Nirmala UI"/>
+        <a:font script="Osma" typeface="Ebrima"/>
+        <a:font script="Phag" typeface="Phagspa"/>
+        <a:font script="Syrn" typeface="Estrangelo Edessa"/>
+        <a:font script="Syrj" typeface="Estrangelo Edessa"/>
+        <a:font script="Syre" typeface="Estrangelo Edessa"/>
+        <a:font script="Sora" typeface="Nirmala UI"/>
+        <a:font script="Tale" typeface="Microsoft Tai Le"/>
+        <a:font script="Talu" typeface="Microsoft New Tai Lue"/>
+        <a:font script="Tfng" typeface="Ebrima"/>
       </a:majorFont>
       <a:minorFont>
-        <a:latin typeface="Calibri"/>
+        <a:latin typeface="Calibri" panose="020F0502020204030204"/>
         <a:ea typeface=""/>
         <a:cs typeface=""/>
-        <a:font script="Jpan" typeface="ＭＳ Ｐゴシック"/>
+        <a:font script="Jpan" typeface="游ゴシック"/>
         <a:font script="Hang" typeface="맑은 고딕"/>
-        <a:font script="Hans" typeface="宋体"/>
+        <a:font script="Hans" typeface="等线"/>
         <a:font script="Hant" typeface="新細明體"/>
         <a:font script="Arab" typeface="Arial"/>
         <a:font script="Hebr" typeface="Arial"/>
@@ -14400,6 +14408,23 @@
         <a:font script="Viet" typeface="Arial"/>
         <a:font script="Uigh" typeface="Microsoft Uighur"/>
         <a:font script="Geor" typeface="Sylfaen"/>
+        <a:font script="Armn" typeface="Arial"/>
+        <a:font script="Bugi" typeface="Leelawadee UI"/>
+        <a:font script="Bopo" typeface="Microsoft JhengHei"/>
+        <a:font script="Java" typeface="Javanese Text"/>
+        <a:font script="Lisu" typeface="Segoe UI"/>
+        <a:font script="Mymr" typeface="Myanmar Text"/>
+        <a:font script="Nkoo" typeface="Ebrima"/>
+        <a:font script="Olck" typeface="Nirmala UI"/>
+        <a:font script="Osma" typeface="Ebrima"/>
+        <a:font script="Phag" typeface="Phagspa"/>
+        <a:font script="Syrn" typeface="Estrangelo Edessa"/>
+        <a:font script="Syrj" typeface="Estrangelo Edessa"/>
+        <a:font script="Syre" typeface="Estrangelo Edessa"/>
+        <a:font script="Sora" typeface="Nirmala UI"/>
+        <a:font script="Tale" typeface="Microsoft Tai Le"/>
+        <a:font script="Talu" typeface="Microsoft New Tai Lue"/>
+        <a:font script="Tfng" typeface="Ebrima"/>
       </a:minorFont>
     </a:fontScheme>
     <a:fmtScheme name="Office">
@@ -14411,200 +14436,141 @@
           <a:gsLst>
             <a:gs pos="0">
               <a:schemeClr val="phClr">
-                <a:tint val="50000"/>
-                <a:satMod val="300000"/>
+                <a:lumMod val="110000"/>
+                <a:satMod val="105000"/>
+                <a:tint val="67000"/>
               </a:schemeClr>
             </a:gs>
-            <a:gs pos="35000">
+            <a:gs pos="50000">
               <a:schemeClr val="phClr">
-                <a:tint val="37000"/>
-                <a:satMod val="300000"/>
+                <a:lumMod val="105000"/>
+                <a:satMod val="103000"/>
+                <a:tint val="73000"/>
               </a:schemeClr>
             </a:gs>
             <a:gs pos="100000">
               <a:schemeClr val="phClr">
-                <a:tint val="15000"/>
-                <a:satMod val="350000"/>
+                <a:lumMod val="105000"/>
+                <a:satMod val="109000"/>
+                <a:tint val="81000"/>
               </a:schemeClr>
             </a:gs>
           </a:gsLst>
-          <a:lin ang="16200000" scaled="1"/>
+          <a:lin ang="5400000" scaled="0"/>
         </a:gradFill>
         <a:gradFill rotWithShape="1">
           <a:gsLst>
             <a:gs pos="0">
               <a:schemeClr val="phClr">
-                <a:tint val="100000"/>
+                <a:satMod val="103000"/>
+                <a:lumMod val="102000"/>
+                <a:tint val="94000"/>
+              </a:schemeClr>
+            </a:gs>
+            <a:gs pos="50000">
+              <a:schemeClr val="phClr">
+                <a:satMod val="110000"/>
+                <a:lumMod val="100000"/>
                 <a:shade val="100000"/>
-                <a:satMod val="130000"/>
               </a:schemeClr>
             </a:gs>
             <a:gs pos="100000">
               <a:schemeClr val="phClr">
-                <a:tint val="50000"/>
-                <a:shade val="100000"/>
-                <a:satMod val="350000"/>
+                <a:lumMod val="99000"/>
+                <a:satMod val="120000"/>
+                <a:shade val="78000"/>
               </a:schemeClr>
             </a:gs>
           </a:gsLst>
-          <a:lin ang="16200000" scaled="0"/>
+          <a:lin ang="5400000" scaled="0"/>
         </a:gradFill>
       </a:fillStyleLst>
       <a:lnStyleLst>
-        <a:ln w="9525" cap="flat" cmpd="sng" algn="ctr">
-          <a:solidFill>
-            <a:schemeClr val="phClr">
-              <a:shade val="95000"/>
-              <a:satMod val="105000"/>
-            </a:schemeClr>
-          </a:solidFill>
-          <a:prstDash val="solid"/>
-        </a:ln>
-        <a:ln w="25400" cap="flat" cmpd="sng" algn="ctr">
+        <a:ln w="6350" cap="flat" cmpd="sng" algn="ctr">
           <a:solidFill>
             <a:schemeClr val="phClr"/>
           </a:solidFill>
           <a:prstDash val="solid"/>
+          <a:miter lim="800000"/>
         </a:ln>
-        <a:ln w="38100" cap="flat" cmpd="sng" algn="ctr">
+        <a:ln w="12700" cap="flat" cmpd="sng" algn="ctr">
           <a:solidFill>
             <a:schemeClr val="phClr"/>
           </a:solidFill>
           <a:prstDash val="solid"/>
+          <a:miter lim="800000"/>
+        </a:ln>
+        <a:ln w="19050" cap="flat" cmpd="sng" algn="ctr">
+          <a:solidFill>
+            <a:schemeClr val="phClr"/>
+          </a:solidFill>
+          <a:prstDash val="solid"/>
+          <a:miter lim="800000"/>
         </a:ln>
       </a:lnStyleLst>
       <a:effectStyleLst>
         <a:effectStyle>
+          <a:effectLst/>
+        </a:effectStyle>
+        <a:effectStyle>
+          <a:effectLst/>
+        </a:effectStyle>
+        <a:effectStyle>
           <a:effectLst>
-            <a:outerShdw blurRad="40000" dist="20000" dir="5400000" rotWithShape="0">
+            <a:outerShdw blurRad="57150" dist="19050" dir="5400000" algn="ctr" rotWithShape="0">
               <a:srgbClr val="000000">
-                <a:alpha val="38000"/>
+                <a:alpha val="63000"/>
               </a:srgbClr>
             </a:outerShdw>
           </a:effectLst>
-        </a:effectStyle>
-        <a:effectStyle>
-          <a:effectLst>
-            <a:outerShdw blurRad="40000" dist="23000" dir="5400000" rotWithShape="0">
-              <a:srgbClr val="000000">
-                <a:alpha val="35000"/>
-              </a:srgbClr>
-            </a:outerShdw>
-          </a:effectLst>
-        </a:effectStyle>
-        <a:effectStyle>
-          <a:effectLst>
-            <a:outerShdw blurRad="40000" dist="23000" dir="5400000" rotWithShape="0">
-              <a:srgbClr val="000000">
-                <a:alpha val="35000"/>
-              </a:srgbClr>
-            </a:outerShdw>
-          </a:effectLst>
-          <a:scene3d>
-            <a:camera prst="orthographicFront">
-              <a:rot lat="0" lon="0" rev="0"/>
-            </a:camera>
-            <a:lightRig rig="threePt" dir="t">
-              <a:rot lat="0" lon="0" rev="1200000"/>
-            </a:lightRig>
-          </a:scene3d>
-          <a:sp3d>
-            <a:bevelT w="63500" h="25400"/>
-          </a:sp3d>
         </a:effectStyle>
       </a:effectStyleLst>
       <a:bgFillStyleLst>
         <a:solidFill>
           <a:schemeClr val="phClr"/>
         </a:solidFill>
+        <a:solidFill>
+          <a:schemeClr val="phClr">
+            <a:tint val="95000"/>
+            <a:satMod val="170000"/>
+          </a:schemeClr>
+        </a:solidFill>
         <a:gradFill rotWithShape="1">
           <a:gsLst>
             <a:gs pos="0">
               <a:schemeClr val="phClr">
-                <a:tint val="40000"/>
-                <a:satMod val="350000"/>
+                <a:tint val="93000"/>
+                <a:satMod val="150000"/>
+                <a:shade val="98000"/>
+                <a:lumMod val="102000"/>
               </a:schemeClr>
             </a:gs>
-            <a:gs pos="40000">
+            <a:gs pos="50000">
               <a:schemeClr val="phClr">
-                <a:tint val="45000"/>
-                <a:shade val="99000"/>
-                <a:satMod val="350000"/>
+                <a:tint val="98000"/>
+                <a:satMod val="130000"/>
+                <a:shade val="90000"/>
+                <a:lumMod val="103000"/>
               </a:schemeClr>
             </a:gs>
             <a:gs pos="100000">
               <a:schemeClr val="phClr">
-                <a:shade val="20000"/>
-                <a:satMod val="255000"/>
+                <a:shade val="63000"/>
+                <a:satMod val="120000"/>
               </a:schemeClr>
             </a:gs>
           </a:gsLst>
-          <a:path path="circle">
-            <a:fillToRect l="50000" t="-80000" r="50000" b="180000"/>
-          </a:path>
-        </a:gradFill>
-        <a:gradFill rotWithShape="1">
-          <a:gsLst>
-            <a:gs pos="0">
-              <a:schemeClr val="phClr">
-                <a:tint val="80000"/>
-                <a:satMod val="300000"/>
-              </a:schemeClr>
-            </a:gs>
-            <a:gs pos="100000">
-              <a:schemeClr val="phClr">
-                <a:shade val="30000"/>
-                <a:satMod val="200000"/>
-              </a:schemeClr>
-            </a:gs>
-          </a:gsLst>
-          <a:path path="circle">
-            <a:fillToRect l="50000" t="50000" r="50000" b="50000"/>
-          </a:path>
+          <a:lin ang="5400000" scaled="0"/>
         </a:gradFill>
       </a:bgFillStyleLst>
     </a:fmtScheme>
   </a:themeElements>
-  <a:objectDefaults>
-    <a:spDef>
-      <a:spPr/>
-      <a:bodyPr/>
-      <a:lstStyle/>
-      <a:style>
-        <a:lnRef idx="1">
-          <a:schemeClr val="accent1"/>
-        </a:lnRef>
-        <a:fillRef idx="3">
-          <a:schemeClr val="accent1"/>
-        </a:fillRef>
-        <a:effectRef idx="2">
-          <a:schemeClr val="accent1"/>
-        </a:effectRef>
-        <a:fontRef idx="minor">
-          <a:schemeClr val="lt1"/>
-        </a:fontRef>
-      </a:style>
-    </a:spDef>
-    <a:lnDef>
-      <a:spPr/>
-      <a:bodyPr/>
-      <a:lstStyle/>
-      <a:style>
-        <a:lnRef idx="2">
-          <a:schemeClr val="accent1"/>
-        </a:lnRef>
-        <a:fillRef idx="0">
-          <a:schemeClr val="accent1"/>
-        </a:fillRef>
-        <a:effectRef idx="1">
-          <a:schemeClr val="accent1"/>
-        </a:effectRef>
-        <a:fontRef idx="minor">
-          <a:schemeClr val="tx1"/>
-        </a:fontRef>
-      </a:style>
-    </a:lnDef>
-  </a:objectDefaults>
+  <a:objectDefaults/>
   <a:extraClrSchemeLst/>
+  <a:extLst>
+    <a:ext uri="{05A4C25C-085E-4340-85A3-A5531E510DB2}">
+      <thm15:themeFamily xmlns:thm15="http://schemas.microsoft.com/office/thememl/2012/main" name="Office Theme" id="{62F939B6-93AF-4DB8-9C6B-D6C7DFDC589F}" vid="{4A3C46E8-61CC-4603-A589-7422A47A8E4A}"/>
+    </a:ext>
+  </a:extLst>
 </a:theme>
 </file>
--- a/Documents/Factory-Second-Meeting.pptx
+++ b/Documents/Factory-Second-Meeting.pptx
@@ -12,8 +12,8 @@
     <p:sldId id="257" r:id="rId3"/>
     <p:sldId id="258" r:id="rId4"/>
     <p:sldId id="259" r:id="rId5"/>
-    <p:sldId id="260" r:id="rId6"/>
-    <p:sldId id="261" r:id="rId7"/>
+    <p:sldId id="265" r:id="rId6"/>
+    <p:sldId id="260" r:id="rId7"/>
     <p:sldId id="262" r:id="rId8"/>
     <p:sldId id="263" r:id="rId9"/>
     <p:sldId id="264" r:id="rId10"/>
@@ -373,9 +373,7 @@
           <a:bodyPr/>
           <a:lstStyle/>
           <a:p>
-            <a:r>
-              <a:t>DRAFT built from our working assumptions, not from the customer's own words. Before presenting, replace each card with their actual language and confirm with them. Ask: did we miss anything? Audience: CIO (risk, cost, governance) and Head of Engineering (behavior preserved, fits process, trustworthy output).</a:t>
-            </a:r>
+            <a:endParaRPr dirty="0"/>
           </a:p>
         </p:txBody>
       </p:sp>
@@ -443,9 +441,7 @@
           <a:bodyPr/>
           <a:lstStyle/>
           <a:p>
-            <a:r>
-              <a:t>Every item here is from docs.factory.com (read 26-27 Oct 2026). Software Factory and OpenCompute are private preview: confirm access before promising them. Readiness commands and Missions: confirm on the demo plan.</a:t>
-            </a:r>
+            <a:endParaRPr dirty="0"/>
           </a:p>
         </p:txBody>
       </p:sp>
@@ -514,7 +510,36 @@
           <a:lstStyle/>
           <a:p>
             <a:r>
-              <a:t>Be fair: other agents also offer subagents, skills, hooks, MCP and headless modes. The argument is the packaged, governed, org-wide default and the measured result, not exclusive features. Back it with the demo scorecard, which you must build from your own dry run. Do not quote numbers you have not measured.</a:t>
+              <a:rPr lang="en-CA" dirty="0"/>
+              <a:t>LLMs offer</a:t>
+            </a:r>
+            <a:r>
+              <a:rPr dirty="0"/>
+              <a:t> agents, skills, hooks, MCP and headless modes. </a:t>
+            </a:r>
+            <a:r>
+              <a:rPr lang="en-CA" dirty="0"/>
+              <a:t>Though Factory adds the governance layer that enables AI to be a safe and repeatable</a:t>
+            </a:r>
+            <a:r>
+              <a:rPr dirty="0"/>
+              <a:t>, governed, org-wide default </a:t>
+            </a:r>
+            <a:r>
+              <a:rPr lang="en-CA" dirty="0"/>
+              <a:t>with </a:t>
+            </a:r>
+            <a:r>
+              <a:rPr dirty="0"/>
+              <a:t>measured result</a:t>
+            </a:r>
+            <a:r>
+              <a:rPr lang="en-CA" dirty="0"/>
+              <a:t>s</a:t>
+            </a:r>
+            <a:r>
+              <a:rPr dirty="0"/>
+              <a:t>. </a:t>
             </a:r>
           </a:p>
         </p:txBody>
@@ -583,9 +608,7 @@
           <a:bodyPr/>
           <a:lstStyle/>
           <a:p>
-            <a:r>
-              <a:t>All figures are quoted from factory.com/case-studies (blackstone, comarch, nav, chainguard) as written on those pages. They are Factory's published customer stories, not our measurements and not independently verified. Pick the two closest to the audience: Blackstone (control, air-gap, model independence) and Comarch (migrations).</a:t>
-            </a:r>
+            <a:endParaRPr dirty="0"/>
           </a:p>
         </p:txBody>
       </p:sp>
@@ -653,9 +676,7 @@
           <a:bodyPr/>
           <a:lstStyle/>
           <a:p>
-            <a:r>
-              <a:t>About 24 minutes plus an optional module (Environments, Droid Computers, Remote Control). Order and timings are from demo-runbook.md. Anything your plan does not include gets replaced by the docs page. Show only measured numbers on the scorecard.</a:t>
-            </a:r>
+            <a:endParaRPr dirty="0"/>
           </a:p>
         </p:txBody>
       </p:sp>
@@ -724,7 +745,7 @@
           <a:lstStyle/>
           <a:p>
             <a:r>
-              <a:t>The phases and weeks are my proposal in enterprise-rollout.md. Factory publishes no phased rollout, so present this as a starting point to adapt. Deployment guidance from the docs: start with Factory Managed; consider Private (your VPC, private preview) only if a requirement rules Managed out.</a:t>
+              <a:t>Owners and dates are blank on purpose: agree them in the room. Open items to confirm with Factory beforehand: SSO and SCIM specifics, Software Factory and OpenCompute preview access, pricing and credit model for their volume, comparable references.</a:t>
             </a:r>
           </a:p>
         </p:txBody>
@@ -750,76 +771,6 @@
 </file>
 
 <file path=ppt/notesSlides/notesSlide8.xml><?xml version="1.0" encoding="utf-8"?>
-<p:notes xmlns:a="http://schemas.openxmlformats.org/drawingml/2006/main" xmlns:r="http://schemas.openxmlformats.org/officeDocument/2006/relationships" xmlns:p="http://schemas.openxmlformats.org/presentationml/2006/main">
-  <p:cSld>
-    <p:spTree>
-      <p:nvGrpSpPr>
-        <p:cNvPr id="1" name=""/>
-        <p:cNvGrpSpPr/>
-        <p:nvPr/>
-      </p:nvGrpSpPr>
-      <p:grpSpPr>
-        <a:xfrm>
-          <a:off x="0" y="0"/>
-          <a:ext cx="0" cy="0"/>
-          <a:chOff x="0" y="0"/>
-          <a:chExt cx="0" cy="0"/>
-        </a:xfrm>
-      </p:grpSpPr>
-      <p:sp>
-        <p:nvSpPr>
-          <p:cNvPr id="2" name="Slide Image Placeholder 1"/>
-          <p:cNvSpPr>
-            <a:spLocks noGrp="1" noRot="1" noChangeAspect="1"/>
-          </p:cNvSpPr>
-          <p:nvPr>
-            <p:ph type="sldImg" idx="2"/>
-          </p:nvPr>
-        </p:nvSpPr>
-        <p:spPr/>
-      </p:sp>
-      <p:sp>
-        <p:nvSpPr>
-          <p:cNvPr id="3" name="Notes Placeholder 2"/>
-          <p:cNvSpPr>
-            <a:spLocks noGrp="1"/>
-          </p:cNvSpPr>
-          <p:nvPr>
-            <p:ph type="body" sz="quarter" idx="3"/>
-          </p:nvPr>
-        </p:nvSpPr>
-        <p:spPr/>
-        <p:txBody>
-          <a:bodyPr/>
-          <a:lstStyle/>
-          <a:p>
-            <a:r>
-              <a:t>Owners and dates are blank on purpose: agree them in the room. Open items to confirm with Factory beforehand: SSO and SCIM specifics, Software Factory and OpenCompute preview access, pricing and credit model for their volume, comparable references.</a:t>
-            </a:r>
-          </a:p>
-        </p:txBody>
-      </p:sp>
-      <p:sp>
-        <p:nvSpPr>
-          <p:cNvPr id="4" name="Slide Number Placeholder 3"/>
-          <p:cNvSpPr>
-            <a:spLocks noGrp="1"/>
-          </p:cNvSpPr>
-          <p:nvPr>
-            <p:ph type="sldNum" sz="quarter" idx="5"/>
-          </p:nvPr>
-        </p:nvSpPr>
-        <p:spPr/>
-      </p:sp>
-    </p:spTree>
-  </p:cSld>
-  <p:clrMapOvr>
-    <a:masterClrMapping/>
-  </p:clrMapOvr>
-</p:notes>
-</file>
-
-<file path=ppt/notesSlides/notesSlide9.xml><?xml version="1.0" encoding="utf-8"?>
 <p:notes xmlns:a="http://schemas.openxmlformats.org/drawingml/2006/main" xmlns:r="http://schemas.openxmlformats.org/officeDocument/2006/relationships" xmlns:p="http://schemas.openxmlformats.org/presentationml/2006/main">
   <p:cSld>
     <p:spTree>
@@ -4102,7 +4053,9 @@
           <p:nvPr/>
         </p:nvPicPr>
         <p:blipFill>
-          <a:blip r:embed="rId3"/>
+          <a:blip r:embed="rId3">
+            <a:biLevel thresh="25000"/>
+          </a:blip>
           <a:stretch>
             <a:fillRect/>
           </a:stretch>
@@ -4139,8 +4092,8 @@
         </p:blipFill>
         <p:spPr>
           <a:xfrm>
-            <a:off x="3309258" y="3977640"/>
-            <a:ext cx="1883806" cy="613942"/>
+            <a:off x="914400" y="4906958"/>
+            <a:ext cx="2530344" cy="824652"/>
           </a:xfrm>
           <a:prstGeom prst="rect">
             <a:avLst/>
@@ -4341,7 +4294,9 @@
           <p:nvPr/>
         </p:nvPicPr>
         <p:blipFill>
-          <a:blip r:embed="rId3"/>
+          <a:blip r:embed="rId3">
+            <a:biLevel thresh="25000"/>
+          </a:blip>
           <a:stretch>
             <a:fillRect/>
           </a:stretch>
@@ -4798,8 +4753,8 @@
         </p:nvSpPr>
         <p:spPr>
           <a:xfrm>
-            <a:off x="7013448" y="1984248"/>
-            <a:ext cx="4370831" cy="548640"/>
+            <a:off x="7013448" y="2107757"/>
+            <a:ext cx="4370831" cy="301621"/>
           </a:xfrm>
           <a:prstGeom prst="rect">
             <a:avLst/>
@@ -4814,14 +4769,29 @@
           <a:p>
             <a:pPr algn="l"/>
             <a:r>
-              <a:rPr sz="1600" b="1">
+              <a:rPr sz="1600" b="1" dirty="0">
                 <a:solidFill>
                   <a:srgbClr val="F5F5F5"/>
                 </a:solidFill>
                 <a:latin typeface="Arial"/>
               </a:rPr>
-              <a:t>Move to modern Python and a modern UI</a:t>
-            </a:r>
+              <a:t>Move to modern </a:t>
+            </a:r>
+            <a:r>
+              <a:rPr lang="en-CA" sz="1600" b="1" dirty="0">
+                <a:solidFill>
+                  <a:srgbClr val="F5F5F5"/>
+                </a:solidFill>
+                <a:latin typeface="Arial"/>
+              </a:rPr>
+              <a:t>a Modern App</a:t>
+            </a:r>
+            <a:endParaRPr sz="1600" b="1" dirty="0">
+              <a:solidFill>
+                <a:srgbClr val="F5F5F5"/>
+              </a:solidFill>
+              <a:latin typeface="Arial"/>
+            </a:endParaRPr>
           </a:p>
         </p:txBody>
       </p:sp>
@@ -5033,7 +5003,7 @@
           <a:p>
             <a:pPr algn="l"/>
             <a:r>
-              <a:rPr sz="1600" b="1">
+              <a:rPr sz="1600" b="1" dirty="0">
                 <a:solidFill>
                   <a:srgbClr val="F5F5F5"/>
                 </a:solidFill>
@@ -5487,30 +5457,6 @@
           </a:p>
         </p:txBody>
       </p:sp>
-      <p:pic>
-        <p:nvPicPr>
-          <p:cNvPr id="6" name="Picture 5" descr="logo_orange.png"/>
-          <p:cNvPicPr>
-            <a:picLocks noChangeAspect="1"/>
-          </p:cNvPicPr>
-          <p:nvPr/>
-        </p:nvPicPr>
-        <p:blipFill>
-          <a:blip r:embed="rId3"/>
-          <a:stretch>
-            <a:fillRect/>
-          </a:stretch>
-        </p:blipFill>
-        <p:spPr>
-          <a:xfrm>
-            <a:off x="11155680" y="457200"/>
-            <a:ext cx="502920" cy="502920"/>
-          </a:xfrm>
-          <a:prstGeom prst="rect">
-            <a:avLst/>
-          </a:prstGeom>
-        </p:spPr>
-      </p:pic>
       <p:sp>
         <p:nvSpPr>
           <p:cNvPr id="7" name="TextBox 6"/>
@@ -5542,41 +5488,6 @@
                 <a:latin typeface="Arial"/>
               </a:rPr>
               <a:t>3</a:t>
-            </a:r>
-          </a:p>
-        </p:txBody>
-      </p:sp>
-      <p:sp>
-        <p:nvSpPr>
-          <p:cNvPr id="8" name="TextBox 7"/>
-          <p:cNvSpPr txBox="1"/>
-          <p:nvPr/>
-        </p:nvSpPr>
-        <p:spPr>
-          <a:xfrm>
-            <a:off x="548640" y="6400800"/>
-            <a:ext cx="5486400" cy="274320"/>
-          </a:xfrm>
-          <a:prstGeom prst="rect">
-            <a:avLst/>
-          </a:prstGeom>
-          <a:noFill/>
-        </p:spPr>
-        <p:txBody>
-          <a:bodyPr wrap="square" lIns="45720" tIns="27432" rIns="45720" bIns="27432" anchor="t">
-            <a:spAutoFit/>
-          </a:bodyPr>
-          <a:lstStyle/>
-          <a:p>
-            <a:pPr algn="l"/>
-            <a:r>
-              <a:rPr sz="1000" b="0">
-                <a:solidFill>
-                  <a:srgbClr val="A3A3A3"/>
-                </a:solidFill>
-                <a:latin typeface="Arial"/>
-              </a:rPr>
-              <a:t>Second meeting: what we heard and the demo</a:t>
             </a:r>
           </a:p>
         </p:txBody>
@@ -6577,6 +6488,38 @@
           </a:p>
         </p:txBody>
       </p:sp>
+      <p:pic>
+        <p:nvPicPr>
+          <p:cNvPr id="33" name="Picture 32" descr="logo_orange.png">
+            <a:extLst>
+              <a:ext uri="{FF2B5EF4-FFF2-40B4-BE49-F238E27FC236}">
+                <a16:creationId xmlns:a16="http://schemas.microsoft.com/office/drawing/2014/main" id="{6DDCE4C2-5F42-C9B0-5066-AC418ACC7D6F}"/>
+              </a:ext>
+            </a:extLst>
+          </p:cNvPr>
+          <p:cNvPicPr>
+            <a:picLocks noChangeAspect="1"/>
+          </p:cNvPicPr>
+          <p:nvPr/>
+        </p:nvPicPr>
+        <p:blipFill>
+          <a:blip r:embed="rId3">
+            <a:biLevel thresh="25000"/>
+          </a:blip>
+          <a:stretch>
+            <a:fillRect/>
+          </a:stretch>
+        </p:blipFill>
+        <p:spPr>
+          <a:xfrm>
+            <a:off x="10905060" y="498348"/>
+            <a:ext cx="502920" cy="502920"/>
+          </a:xfrm>
+          <a:prstGeom prst="rect">
+            <a:avLst/>
+          </a:prstGeom>
+        </p:spPr>
+      </p:pic>
     </p:spTree>
   </p:cSld>
   <p:clrMapOvr>
@@ -6762,30 +6705,6 @@
           </a:p>
         </p:txBody>
       </p:sp>
-      <p:pic>
-        <p:nvPicPr>
-          <p:cNvPr id="6" name="Picture 5" descr="logo_orange.png"/>
-          <p:cNvPicPr>
-            <a:picLocks noChangeAspect="1"/>
-          </p:cNvPicPr>
-          <p:nvPr/>
-        </p:nvPicPr>
-        <p:blipFill>
-          <a:blip r:embed="rId3"/>
-          <a:stretch>
-            <a:fillRect/>
-          </a:stretch>
-        </p:blipFill>
-        <p:spPr>
-          <a:xfrm>
-            <a:off x="11155680" y="457200"/>
-            <a:ext cx="502920" cy="502920"/>
-          </a:xfrm>
-          <a:prstGeom prst="rect">
-            <a:avLst/>
-          </a:prstGeom>
-        </p:spPr>
-      </p:pic>
       <p:sp>
         <p:nvSpPr>
           <p:cNvPr id="7" name="TextBox 6"/>
@@ -6817,41 +6736,6 @@
                 <a:latin typeface="Arial"/>
               </a:rPr>
               <a:t>4</a:t>
-            </a:r>
-          </a:p>
-        </p:txBody>
-      </p:sp>
-      <p:sp>
-        <p:nvSpPr>
-          <p:cNvPr id="8" name="TextBox 7"/>
-          <p:cNvSpPr txBox="1"/>
-          <p:nvPr/>
-        </p:nvSpPr>
-        <p:spPr>
-          <a:xfrm>
-            <a:off x="548640" y="6400800"/>
-            <a:ext cx="5486400" cy="274320"/>
-          </a:xfrm>
-          <a:prstGeom prst="rect">
-            <a:avLst/>
-          </a:prstGeom>
-          <a:noFill/>
-        </p:spPr>
-        <p:txBody>
-          <a:bodyPr wrap="square" lIns="45720" tIns="27432" rIns="45720" bIns="27432" anchor="t">
-            <a:spAutoFit/>
-          </a:bodyPr>
-          <a:lstStyle/>
-          <a:p>
-            <a:pPr algn="l"/>
-            <a:r>
-              <a:rPr sz="1000" b="0">
-                <a:solidFill>
-                  <a:srgbClr val="A3A3A3"/>
-                </a:solidFill>
-                <a:latin typeface="Arial"/>
-              </a:rPr>
-              <a:t>Second meeting: what we heard and the demo</a:t>
             </a:r>
           </a:p>
         </p:txBody>
@@ -7740,8 +7624,8 @@
         </p:nvSpPr>
         <p:spPr>
           <a:xfrm>
-            <a:off x="731520" y="5989320"/>
-            <a:ext cx="10698480" cy="365760"/>
+            <a:off x="868680" y="1307592"/>
+            <a:ext cx="10698480" cy="255455"/>
           </a:xfrm>
           <a:prstGeom prst="rect">
             <a:avLst/>
@@ -7756,17 +7640,85 @@
           <a:p>
             <a:pPr algn="l"/>
             <a:r>
-              <a:rPr sz="1300" b="1">
+              <a:rPr sz="1300" b="1" dirty="0">
                 <a:solidFill>
                   <a:srgbClr val="D15010"/>
                 </a:solidFill>
                 <a:latin typeface="Arial"/>
               </a:rPr>
-              <a:t>The difference is not any single feature. It is a governed, org-wide default that you can measure.</a:t>
-            </a:r>
-          </a:p>
-        </p:txBody>
-      </p:sp>
+              <a:t>The difference is not any single feature. It is a governed</a:t>
+            </a:r>
+            <a:r>
+              <a:rPr lang="en-CA" sz="1300" b="1" dirty="0">
+                <a:solidFill>
+                  <a:srgbClr val="D15010"/>
+                </a:solidFill>
+                <a:latin typeface="Arial"/>
+              </a:rPr>
+              <a:t> and </a:t>
+            </a:r>
+            <a:r>
+              <a:rPr sz="1300" b="1" dirty="0">
+                <a:solidFill>
+                  <a:srgbClr val="D15010"/>
+                </a:solidFill>
+                <a:latin typeface="Arial"/>
+              </a:rPr>
+              <a:t>org-wide</a:t>
+            </a:r>
+            <a:r>
+              <a:rPr lang="en-CA" sz="1300" b="1" dirty="0">
+                <a:solidFill>
+                  <a:srgbClr val="D15010"/>
+                </a:solidFill>
+                <a:latin typeface="Arial"/>
+              </a:rPr>
+              <a:t> process</a:t>
+            </a:r>
+            <a:r>
+              <a:rPr sz="1300" b="1" dirty="0">
+                <a:solidFill>
+                  <a:srgbClr val="D15010"/>
+                </a:solidFill>
+                <a:latin typeface="Arial"/>
+              </a:rPr>
+              <a:t> that you can measure</a:t>
+            </a:r>
+          </a:p>
+        </p:txBody>
+      </p:sp>
+      <p:pic>
+        <p:nvPicPr>
+          <p:cNvPr id="30" name="Picture 29" descr="logo_orange.png">
+            <a:extLst>
+              <a:ext uri="{FF2B5EF4-FFF2-40B4-BE49-F238E27FC236}">
+                <a16:creationId xmlns:a16="http://schemas.microsoft.com/office/drawing/2014/main" id="{8012554E-CBBB-6384-8147-B5C33DF1F367}"/>
+              </a:ext>
+            </a:extLst>
+          </p:cNvPr>
+          <p:cNvPicPr>
+            <a:picLocks noChangeAspect="1"/>
+          </p:cNvPicPr>
+          <p:nvPr/>
+        </p:nvPicPr>
+        <p:blipFill>
+          <a:blip r:embed="rId3">
+            <a:biLevel thresh="25000"/>
+          </a:blip>
+          <a:stretch>
+            <a:fillRect/>
+          </a:stretch>
+        </p:blipFill>
+        <p:spPr>
+          <a:xfrm>
+            <a:off x="10905060" y="498348"/>
+            <a:ext cx="502920" cy="502920"/>
+          </a:xfrm>
+          <a:prstGeom prst="rect">
+            <a:avLst/>
+          </a:prstGeom>
+        </p:spPr>
+      </p:pic>
     </p:spTree>
   </p:cSld>
   <p:clrMapOvr>
@@ -7794,25 +7746,27 @@
       </p:grpSpPr>
       <p:sp>
         <p:nvSpPr>
-          <p:cNvPr id="2" name="Rectangle 1"/>
+          <p:cNvPr id="4" name="Rectangle 3">
+            <a:extLst>
+              <a:ext uri="{FF2B5EF4-FFF2-40B4-BE49-F238E27FC236}">
+                <a16:creationId xmlns:a16="http://schemas.microsoft.com/office/drawing/2014/main" id="{DC5020AA-86D7-81E6-96D6-BFBB718D4DDD}"/>
+              </a:ext>
+            </a:extLst>
+          </p:cNvPr>
           <p:cNvSpPr/>
           <p:nvPr/>
         </p:nvSpPr>
         <p:spPr>
           <a:xfrm>
             <a:off x="0" y="0"/>
-            <a:ext cx="12191695" cy="6858000"/>
+            <a:ext cx="12192000" cy="6858000"/>
           </a:xfrm>
           <a:prstGeom prst="rect">
             <a:avLst/>
           </a:prstGeom>
           <a:solidFill>
-            <a:srgbClr val="0D0D0D"/>
+            <a:schemeClr val="tx1"/>
           </a:solidFill>
-          <a:ln>
-            <a:noFill/>
-          </a:ln>
-          <a:effectLst/>
         </p:spPr>
         <p:style>
           <a:lnRef idx="1">
@@ -7833,142 +7787,98 @@
           <a:lstStyle/>
           <a:p>
             <a:pPr algn="ctr"/>
-            <a:endParaRPr/>
-          </a:p>
-        </p:txBody>
-      </p:sp>
-      <p:sp>
-        <p:nvSpPr>
-          <p:cNvPr id="3" name="Rectangle 2"/>
-          <p:cNvSpPr/>
-          <p:nvPr/>
-        </p:nvSpPr>
-        <p:spPr>
-          <a:xfrm>
-            <a:off x="548640" y="502920"/>
-            <a:ext cx="73152" cy="868680"/>
-          </a:xfrm>
-          <a:prstGeom prst="rect">
-            <a:avLst/>
-          </a:prstGeom>
-          <a:solidFill>
-            <a:srgbClr val="D15010"/>
-          </a:solidFill>
+            <a:endParaRPr lang="en-US"/>
+          </a:p>
+        </p:txBody>
+      </p:sp>
+      <p:sp>
+        <p:nvSpPr>
+          <p:cNvPr id="2" name="Title 1">
+            <a:extLst>
+              <a:ext uri="{FF2B5EF4-FFF2-40B4-BE49-F238E27FC236}">
+                <a16:creationId xmlns:a16="http://schemas.microsoft.com/office/drawing/2014/main" id="{07A56F8E-9FB7-DBDA-9589-35C6FDF761F7}"/>
+              </a:ext>
+            </a:extLst>
+          </p:cNvPr>
+          <p:cNvSpPr>
+            <a:spLocks noGrp="1"/>
+          </p:cNvSpPr>
+          <p:nvPr>
+            <p:ph type="title"/>
+          </p:nvPr>
+        </p:nvSpPr>
+        <p:spPr>
           <a:ln>
             <a:noFill/>
           </a:ln>
-          <a:effectLst/>
-        </p:spPr>
-        <p:style>
-          <a:lnRef idx="1">
-            <a:schemeClr val="accent1"/>
-          </a:lnRef>
-          <a:fillRef idx="3">
-            <a:schemeClr val="accent1"/>
-          </a:fillRef>
-          <a:effectRef idx="2">
-            <a:schemeClr val="accent1"/>
-          </a:effectRef>
-          <a:fontRef idx="minor">
-            <a:schemeClr val="lt1"/>
-          </a:fontRef>
-        </p:style>
-        <p:txBody>
-          <a:bodyPr rtlCol="0" anchor="ctr"/>
-          <a:lstStyle/>
-          <a:p>
-            <a:pPr algn="ctr"/>
-            <a:endParaRPr/>
-          </a:p>
-        </p:txBody>
-      </p:sp>
-      <p:sp>
-        <p:nvSpPr>
-          <p:cNvPr id="4" name="TextBox 3"/>
-          <p:cNvSpPr txBox="1"/>
-          <p:nvPr/>
-        </p:nvSpPr>
-        <p:spPr>
-          <a:xfrm>
-            <a:off x="731520" y="457200"/>
-            <a:ext cx="9144000" cy="320040"/>
-          </a:xfrm>
-          <a:prstGeom prst="rect">
-            <a:avLst/>
-          </a:prstGeom>
-          <a:noFill/>
-        </p:spPr>
-        <p:txBody>
-          <a:bodyPr wrap="square" lIns="45720" tIns="27432" rIns="45720" bIns="27432" anchor="t">
-            <a:spAutoFit/>
-          </a:bodyPr>
-          <a:lstStyle/>
-          <a:p>
-            <a:pPr algn="l"/>
-            <a:r>
-              <a:rPr sz="1200" b="1">
-                <a:solidFill>
-                  <a:srgbClr val="D15010"/>
-                </a:solidFill>
-                <a:latin typeface="Arial"/>
-              </a:rPr>
-              <a:t>CUSTOMER-REPORTED RESULTS</a:t>
-            </a:r>
-          </a:p>
-        </p:txBody>
-      </p:sp>
-      <p:sp>
-        <p:nvSpPr>
-          <p:cNvPr id="5" name="TextBox 4"/>
-          <p:cNvSpPr txBox="1"/>
-          <p:nvPr/>
-        </p:nvSpPr>
-        <p:spPr>
-          <a:xfrm>
-            <a:off x="731520" y="749808"/>
-            <a:ext cx="10515600" cy="731520"/>
-          </a:xfrm>
-          <a:prstGeom prst="rect">
-            <a:avLst/>
-          </a:prstGeom>
-          <a:noFill/>
-        </p:spPr>
-        <p:txBody>
-          <a:bodyPr wrap="square" lIns="45720" tIns="27432" rIns="45720" bIns="27432" anchor="t">
-            <a:spAutoFit/>
-          </a:bodyPr>
-          <a:lstStyle/>
-          <a:p>
-            <a:pPr algn="l"/>
-            <a:r>
-              <a:rPr sz="3200" b="1">
-                <a:solidFill>
-                  <a:srgbClr val="F5F5F5"/>
-                </a:solidFill>
-                <a:latin typeface="Arial"/>
-              </a:rPr>
-              <a:t>Success stories</a:t>
-            </a:r>
+        </p:spPr>
+        <p:txBody>
+          <a:bodyPr/>
+          <a:lstStyle/>
+          <a:p>
+            <a:r>
+              <a:rPr lang="en-US" sz="6600" cap="none" dirty="0">
+                <a:ln w="10160">
+                  <a:noFill/>
+                  <a:prstDash val="solid"/>
+                </a:ln>
+                <a:solidFill>
+                  <a:srgbClr val="FFFFFF"/>
+                </a:solidFill>
+                <a:effectLst>
+                  <a:outerShdw blurRad="38100" dist="22860" dir="5400000" algn="tl" rotWithShape="0">
+                    <a:srgbClr val="000000">
+                      <a:alpha val="30000"/>
+                    </a:srgbClr>
+                  </a:outerShdw>
+                </a:effectLst>
+              </a:rPr>
+              <a:t>Demo</a:t>
+            </a:r>
+            <a:endParaRPr lang="en-US" cap="none" dirty="0">
+              <a:ln w="10160">
+                <a:noFill/>
+                <a:prstDash val="solid"/>
+              </a:ln>
+              <a:solidFill>
+                <a:srgbClr val="FFFFFF"/>
+              </a:solidFill>
+              <a:effectLst>
+                <a:outerShdw blurRad="38100" dist="22860" dir="5400000" algn="tl" rotWithShape="0">
+                  <a:srgbClr val="000000">
+                    <a:alpha val="30000"/>
+                  </a:srgbClr>
+                </a:outerShdw>
+              </a:effectLst>
+            </a:endParaRPr>
           </a:p>
         </p:txBody>
       </p:sp>
       <p:pic>
         <p:nvPicPr>
-          <p:cNvPr id="6" name="Picture 5" descr="logo_orange.png"/>
+          <p:cNvPr id="5" name="Picture 4" descr="logo_orange.png">
+            <a:extLst>
+              <a:ext uri="{FF2B5EF4-FFF2-40B4-BE49-F238E27FC236}">
+                <a16:creationId xmlns:a16="http://schemas.microsoft.com/office/drawing/2014/main" id="{E6BF8F92-29F5-9764-DB9E-99E1C6CC400C}"/>
+              </a:ext>
+            </a:extLst>
+          </p:cNvPr>
           <p:cNvPicPr>
             <a:picLocks noChangeAspect="1"/>
           </p:cNvPicPr>
           <p:nvPr/>
         </p:nvPicPr>
         <p:blipFill>
-          <a:blip r:embed="rId3"/>
+          <a:blip r:embed="rId2">
+            <a:biLevel thresh="25000"/>
+          </a:blip>
           <a:stretch>
             <a:fillRect/>
           </a:stretch>
         </p:blipFill>
         <p:spPr>
           <a:xfrm>
-            <a:off x="11155680" y="457200"/>
+            <a:off x="10905060" y="498348"/>
             <a:ext cx="502920" cy="502920"/>
           </a:xfrm>
           <a:prstGeom prst="rect">
@@ -7976,980 +7886,12 @@
           </a:prstGeom>
         </p:spPr>
       </p:pic>
-      <p:sp>
-        <p:nvSpPr>
-          <p:cNvPr id="7" name="TextBox 6"/>
-          <p:cNvSpPr txBox="1"/>
-          <p:nvPr/>
-        </p:nvSpPr>
-        <p:spPr>
-          <a:xfrm>
-            <a:off x="11155680" y="6400800"/>
-            <a:ext cx="731520" cy="274320"/>
-          </a:xfrm>
-          <a:prstGeom prst="rect">
-            <a:avLst/>
-          </a:prstGeom>
-          <a:noFill/>
-        </p:spPr>
-        <p:txBody>
-          <a:bodyPr wrap="square" lIns="45720" tIns="27432" rIns="45720" bIns="27432" anchor="t">
-            <a:spAutoFit/>
-          </a:bodyPr>
-          <a:lstStyle/>
-          <a:p>
-            <a:pPr algn="r"/>
-            <a:r>
-              <a:rPr sz="1000" b="0">
-                <a:solidFill>
-                  <a:srgbClr val="A3A3A3"/>
-                </a:solidFill>
-                <a:latin typeface="Arial"/>
-              </a:rPr>
-              <a:t>5</a:t>
-            </a:r>
-          </a:p>
-        </p:txBody>
-      </p:sp>
-      <p:sp>
-        <p:nvSpPr>
-          <p:cNvPr id="8" name="TextBox 7"/>
-          <p:cNvSpPr txBox="1"/>
-          <p:nvPr/>
-        </p:nvSpPr>
-        <p:spPr>
-          <a:xfrm>
-            <a:off x="548640" y="6400800"/>
-            <a:ext cx="5486400" cy="274320"/>
-          </a:xfrm>
-          <a:prstGeom prst="rect">
-            <a:avLst/>
-          </a:prstGeom>
-          <a:noFill/>
-        </p:spPr>
-        <p:txBody>
-          <a:bodyPr wrap="square" lIns="45720" tIns="27432" rIns="45720" bIns="27432" anchor="t">
-            <a:spAutoFit/>
-          </a:bodyPr>
-          <a:lstStyle/>
-          <a:p>
-            <a:pPr algn="l"/>
-            <a:r>
-              <a:rPr sz="1000" b="0">
-                <a:solidFill>
-                  <a:srgbClr val="A3A3A3"/>
-                </a:solidFill>
-                <a:latin typeface="Arial"/>
-              </a:rPr>
-              <a:t>Second meeting: what we heard and the demo</a:t>
-            </a:r>
-          </a:p>
-        </p:txBody>
-      </p:sp>
-      <p:sp>
-        <p:nvSpPr>
-          <p:cNvPr id="9" name="Rectangle 8"/>
-          <p:cNvSpPr/>
-          <p:nvPr/>
-        </p:nvSpPr>
-        <p:spPr>
-          <a:xfrm>
-            <a:off x="731520" y="1783080"/>
-            <a:ext cx="2651760" cy="4023360"/>
-          </a:xfrm>
-          <a:prstGeom prst="rect">
-            <a:avLst/>
-          </a:prstGeom>
-          <a:solidFill>
-            <a:srgbClr val="1A1A1A"/>
-          </a:solidFill>
-          <a:ln w="9525">
-            <a:solidFill>
-              <a:srgbClr val="2E2E2E"/>
-            </a:solidFill>
-          </a:ln>
-          <a:effectLst/>
-        </p:spPr>
-        <p:style>
-          <a:lnRef idx="1">
-            <a:schemeClr val="accent1"/>
-          </a:lnRef>
-          <a:fillRef idx="3">
-            <a:schemeClr val="accent1"/>
-          </a:fillRef>
-          <a:effectRef idx="2">
-            <a:schemeClr val="accent1"/>
-          </a:effectRef>
-          <a:fontRef idx="minor">
-            <a:schemeClr val="lt1"/>
-          </a:fontRef>
-        </p:style>
-        <p:txBody>
-          <a:bodyPr rtlCol="0" anchor="ctr"/>
-          <a:lstStyle/>
-          <a:p>
-            <a:pPr algn="ctr"/>
-            <a:endParaRPr/>
-          </a:p>
-        </p:txBody>
-      </p:sp>
-      <p:sp>
-        <p:nvSpPr>
-          <p:cNvPr id="10" name="Rectangle 9"/>
-          <p:cNvSpPr/>
-          <p:nvPr/>
-        </p:nvSpPr>
-        <p:spPr>
-          <a:xfrm>
-            <a:off x="731520" y="1783080"/>
-            <a:ext cx="2651760" cy="54864"/>
-          </a:xfrm>
-          <a:prstGeom prst="rect">
-            <a:avLst/>
-          </a:prstGeom>
-          <a:solidFill>
-            <a:srgbClr val="D15010"/>
-          </a:solidFill>
-          <a:ln>
-            <a:noFill/>
-          </a:ln>
-          <a:effectLst/>
-        </p:spPr>
-        <p:style>
-          <a:lnRef idx="1">
-            <a:schemeClr val="accent1"/>
-          </a:lnRef>
-          <a:fillRef idx="3">
-            <a:schemeClr val="accent1"/>
-          </a:fillRef>
-          <a:effectRef idx="2">
-            <a:schemeClr val="accent1"/>
-          </a:effectRef>
-          <a:fontRef idx="minor">
-            <a:schemeClr val="lt1"/>
-          </a:fontRef>
-        </p:style>
-        <p:txBody>
-          <a:bodyPr rtlCol="0" anchor="ctr"/>
-          <a:lstStyle/>
-          <a:p>
-            <a:pPr algn="ctr"/>
-            <a:endParaRPr/>
-          </a:p>
-        </p:txBody>
-      </p:sp>
-      <p:sp>
-        <p:nvSpPr>
-          <p:cNvPr id="11" name="TextBox 10"/>
-          <p:cNvSpPr txBox="1"/>
-          <p:nvPr/>
-        </p:nvSpPr>
-        <p:spPr>
-          <a:xfrm>
-            <a:off x="914400" y="1965960"/>
-            <a:ext cx="2286000" cy="411480"/>
-          </a:xfrm>
-          <a:prstGeom prst="rect">
-            <a:avLst/>
-          </a:prstGeom>
-          <a:noFill/>
-        </p:spPr>
-        <p:txBody>
-          <a:bodyPr wrap="square" lIns="45720" tIns="27432" rIns="45720" bIns="27432" anchor="t">
-            <a:spAutoFit/>
-          </a:bodyPr>
-          <a:lstStyle/>
-          <a:p>
-            <a:pPr algn="l"/>
-            <a:r>
-              <a:rPr sz="2000" b="1">
-                <a:solidFill>
-                  <a:srgbClr val="F5F5F5"/>
-                </a:solidFill>
-                <a:latin typeface="Arial"/>
-              </a:rPr>
-              <a:t>Blackstone</a:t>
-            </a:r>
-          </a:p>
-        </p:txBody>
-      </p:sp>
-      <p:sp>
-        <p:nvSpPr>
-          <p:cNvPr id="12" name="TextBox 11"/>
-          <p:cNvSpPr txBox="1"/>
-          <p:nvPr/>
-        </p:nvSpPr>
-        <p:spPr>
-          <a:xfrm>
-            <a:off x="914400" y="2377440"/>
-            <a:ext cx="2286000" cy="365760"/>
-          </a:xfrm>
-          <a:prstGeom prst="rect">
-            <a:avLst/>
-          </a:prstGeom>
-          <a:noFill/>
-        </p:spPr>
-        <p:txBody>
-          <a:bodyPr wrap="square" lIns="45720" tIns="27432" rIns="45720" bIns="27432" anchor="t">
-            <a:spAutoFit/>
-          </a:bodyPr>
-          <a:lstStyle/>
-          <a:p>
-            <a:pPr algn="l"/>
-            <a:r>
-              <a:rPr sz="1100" b="1">
-                <a:solidFill>
-                  <a:srgbClr val="D15010"/>
-                </a:solidFill>
-                <a:latin typeface="Arial"/>
-              </a:rPr>
-              <a:t>Asset manager</a:t>
-            </a:r>
-          </a:p>
-        </p:txBody>
-      </p:sp>
-      <p:sp>
-        <p:nvSpPr>
-          <p:cNvPr id="13" name="TextBox 12"/>
-          <p:cNvSpPr txBox="1"/>
-          <p:nvPr/>
-        </p:nvSpPr>
-        <p:spPr>
-          <a:xfrm>
-            <a:off x="914400" y="2834640"/>
-            <a:ext cx="2286000" cy="2926080"/>
-          </a:xfrm>
-          <a:prstGeom prst="rect">
-            <a:avLst/>
-          </a:prstGeom>
-          <a:noFill/>
-        </p:spPr>
-        <p:txBody>
-          <a:bodyPr wrap="square" lIns="45720" tIns="27432" rIns="45720" bIns="27432" anchor="t">
-            <a:spAutoFit/>
-          </a:bodyPr>
-          <a:lstStyle/>
-          <a:p>
-            <a:pPr algn="l">
-              <a:spcAft>
-                <a:spcPts val="1000"/>
-              </a:spcAft>
-            </a:pPr>
-            <a:r>
-              <a:rPr sz="1300" b="0">
-                <a:solidFill>
-                  <a:srgbClr val="F5F5F5"/>
-                </a:solidFill>
-                <a:latin typeface="Arial"/>
-              </a:rPr>
-              <a:t>Needed agents to run inside its own data center and no dependence on one model vendor.</a:t>
-            </a:r>
-          </a:p>
-          <a:p>
-            <a:pPr algn="l">
-              <a:spcAft>
-                <a:spcPts val="1000"/>
-              </a:spcAft>
-            </a:pPr>
-            <a:r>
-              <a:rPr sz="1300" b="0">
-                <a:solidFill>
-                  <a:srgbClr val="F5F5F5"/>
-                </a:solidFill>
-                <a:latin typeface="Arial"/>
-              </a:rPr>
-              <a:t>Onboarding a new developer went “from up to two weeks to minutes.”</a:t>
-            </a:r>
-          </a:p>
-        </p:txBody>
-      </p:sp>
-      <p:sp>
-        <p:nvSpPr>
-          <p:cNvPr id="14" name="Rectangle 13"/>
-          <p:cNvSpPr/>
-          <p:nvPr/>
-        </p:nvSpPr>
-        <p:spPr>
-          <a:xfrm>
-            <a:off x="3520439" y="1783080"/>
-            <a:ext cx="2651760" cy="4023360"/>
-          </a:xfrm>
-          <a:prstGeom prst="rect">
-            <a:avLst/>
-          </a:prstGeom>
-          <a:solidFill>
-            <a:srgbClr val="1A1A1A"/>
-          </a:solidFill>
-          <a:ln w="9525">
-            <a:solidFill>
-              <a:srgbClr val="2E2E2E"/>
-            </a:solidFill>
-          </a:ln>
-          <a:effectLst/>
-        </p:spPr>
-        <p:style>
-          <a:lnRef idx="1">
-            <a:schemeClr val="accent1"/>
-          </a:lnRef>
-          <a:fillRef idx="3">
-            <a:schemeClr val="accent1"/>
-          </a:fillRef>
-          <a:effectRef idx="2">
-            <a:schemeClr val="accent1"/>
-          </a:effectRef>
-          <a:fontRef idx="minor">
-            <a:schemeClr val="lt1"/>
-          </a:fontRef>
-        </p:style>
-        <p:txBody>
-          <a:bodyPr rtlCol="0" anchor="ctr"/>
-          <a:lstStyle/>
-          <a:p>
-            <a:pPr algn="ctr"/>
-            <a:endParaRPr/>
-          </a:p>
-        </p:txBody>
-      </p:sp>
-      <p:sp>
-        <p:nvSpPr>
-          <p:cNvPr id="15" name="Rectangle 14"/>
-          <p:cNvSpPr/>
-          <p:nvPr/>
-        </p:nvSpPr>
-        <p:spPr>
-          <a:xfrm>
-            <a:off x="3520439" y="1783080"/>
-            <a:ext cx="2651760" cy="54864"/>
-          </a:xfrm>
-          <a:prstGeom prst="rect">
-            <a:avLst/>
-          </a:prstGeom>
-          <a:solidFill>
-            <a:srgbClr val="D15010"/>
-          </a:solidFill>
-          <a:ln>
-            <a:noFill/>
-          </a:ln>
-          <a:effectLst/>
-        </p:spPr>
-        <p:style>
-          <a:lnRef idx="1">
-            <a:schemeClr val="accent1"/>
-          </a:lnRef>
-          <a:fillRef idx="3">
-            <a:schemeClr val="accent1"/>
-          </a:fillRef>
-          <a:effectRef idx="2">
-            <a:schemeClr val="accent1"/>
-          </a:effectRef>
-          <a:fontRef idx="minor">
-            <a:schemeClr val="lt1"/>
-          </a:fontRef>
-        </p:style>
-        <p:txBody>
-          <a:bodyPr rtlCol="0" anchor="ctr"/>
-          <a:lstStyle/>
-          <a:p>
-            <a:pPr algn="ctr"/>
-            <a:endParaRPr/>
-          </a:p>
-        </p:txBody>
-      </p:sp>
-      <p:sp>
-        <p:nvSpPr>
-          <p:cNvPr id="16" name="TextBox 15"/>
-          <p:cNvSpPr txBox="1"/>
-          <p:nvPr/>
-        </p:nvSpPr>
-        <p:spPr>
-          <a:xfrm>
-            <a:off x="3703320" y="1965960"/>
-            <a:ext cx="2286000" cy="411480"/>
-          </a:xfrm>
-          <a:prstGeom prst="rect">
-            <a:avLst/>
-          </a:prstGeom>
-          <a:noFill/>
-        </p:spPr>
-        <p:txBody>
-          <a:bodyPr wrap="square" lIns="45720" tIns="27432" rIns="45720" bIns="27432" anchor="t">
-            <a:spAutoFit/>
-          </a:bodyPr>
-          <a:lstStyle/>
-          <a:p>
-            <a:pPr algn="l"/>
-            <a:r>
-              <a:rPr sz="2000" b="1">
-                <a:solidFill>
-                  <a:srgbClr val="F5F5F5"/>
-                </a:solidFill>
-                <a:latin typeface="Arial"/>
-              </a:rPr>
-              <a:t>Comarch</a:t>
-            </a:r>
-          </a:p>
-        </p:txBody>
-      </p:sp>
-      <p:sp>
-        <p:nvSpPr>
-          <p:cNvPr id="17" name="TextBox 16"/>
-          <p:cNvSpPr txBox="1"/>
-          <p:nvPr/>
-        </p:nvSpPr>
-        <p:spPr>
-          <a:xfrm>
-            <a:off x="3703320" y="2377440"/>
-            <a:ext cx="2286000" cy="365760"/>
-          </a:xfrm>
-          <a:prstGeom prst="rect">
-            <a:avLst/>
-          </a:prstGeom>
-          <a:noFill/>
-        </p:spPr>
-        <p:txBody>
-          <a:bodyPr wrap="square" lIns="45720" tIns="27432" rIns="45720" bIns="27432" anchor="t">
-            <a:spAutoFit/>
-          </a:bodyPr>
-          <a:lstStyle/>
-          <a:p>
-            <a:pPr algn="l"/>
-            <a:r>
-              <a:rPr sz="1100" b="1">
-                <a:solidFill>
-                  <a:srgbClr val="D15010"/>
-                </a:solidFill>
-                <a:latin typeface="Arial"/>
-              </a:rPr>
-              <a:t>IT services, 5,000 specialists</a:t>
-            </a:r>
-          </a:p>
-        </p:txBody>
-      </p:sp>
-      <p:sp>
-        <p:nvSpPr>
-          <p:cNvPr id="18" name="TextBox 17"/>
-          <p:cNvSpPr txBox="1"/>
-          <p:nvPr/>
-        </p:nvSpPr>
-        <p:spPr>
-          <a:xfrm>
-            <a:off x="3703320" y="2834640"/>
-            <a:ext cx="2286000" cy="2926080"/>
-          </a:xfrm>
-          <a:prstGeom prst="rect">
-            <a:avLst/>
-          </a:prstGeom>
-          <a:noFill/>
-        </p:spPr>
-        <p:txBody>
-          <a:bodyPr wrap="square" lIns="45720" tIns="27432" rIns="45720" bIns="27432" anchor="t">
-            <a:spAutoFit/>
-          </a:bodyPr>
-          <a:lstStyle/>
-          <a:p>
-            <a:pPr algn="l">
-              <a:spcAft>
-                <a:spcPts val="1000"/>
-              </a:spcAft>
-            </a:pPr>
-            <a:r>
-              <a:rPr sz="1300" b="0">
-                <a:solidFill>
-                  <a:srgbClr val="F5F5F5"/>
-                </a:solidFill>
-                <a:latin typeface="Arial"/>
-              </a:rPr>
-              <a:t>Scoped XSLT modernization: “10,000 man days” estimated, completed “in 45 days.”</a:t>
-            </a:r>
-          </a:p>
-          <a:p>
-            <a:pPr algn="l">
-              <a:spcAft>
-                <a:spcPts val="1000"/>
-              </a:spcAft>
-            </a:pPr>
-            <a:r>
-              <a:rPr sz="1300" b="0">
-                <a:solidFill>
-                  <a:srgbClr val="F5F5F5"/>
-                </a:solidFill>
-                <a:latin typeface="Arial"/>
-              </a:rPr>
-              <a:t>Database migration scoped at “45 days,” completed by a Factory mission “in 6 hours.”</a:t>
-            </a:r>
-          </a:p>
-        </p:txBody>
-      </p:sp>
-      <p:sp>
-        <p:nvSpPr>
-          <p:cNvPr id="19" name="Rectangle 18"/>
-          <p:cNvSpPr/>
-          <p:nvPr/>
-        </p:nvSpPr>
-        <p:spPr>
-          <a:xfrm>
-            <a:off x="6309359" y="1783080"/>
-            <a:ext cx="2651760" cy="4023360"/>
-          </a:xfrm>
-          <a:prstGeom prst="rect">
-            <a:avLst/>
-          </a:prstGeom>
-          <a:solidFill>
-            <a:srgbClr val="1A1A1A"/>
-          </a:solidFill>
-          <a:ln w="9525">
-            <a:solidFill>
-              <a:srgbClr val="2E2E2E"/>
-            </a:solidFill>
-          </a:ln>
-          <a:effectLst/>
-        </p:spPr>
-        <p:style>
-          <a:lnRef idx="1">
-            <a:schemeClr val="accent1"/>
-          </a:lnRef>
-          <a:fillRef idx="3">
-            <a:schemeClr val="accent1"/>
-          </a:fillRef>
-          <a:effectRef idx="2">
-            <a:schemeClr val="accent1"/>
-          </a:effectRef>
-          <a:fontRef idx="minor">
-            <a:schemeClr val="lt1"/>
-          </a:fontRef>
-        </p:style>
-        <p:txBody>
-          <a:bodyPr rtlCol="0" anchor="ctr"/>
-          <a:lstStyle/>
-          <a:p>
-            <a:pPr algn="ctr"/>
-            <a:endParaRPr/>
-          </a:p>
-        </p:txBody>
-      </p:sp>
-      <p:sp>
-        <p:nvSpPr>
-          <p:cNvPr id="20" name="Rectangle 19"/>
-          <p:cNvSpPr/>
-          <p:nvPr/>
-        </p:nvSpPr>
-        <p:spPr>
-          <a:xfrm>
-            <a:off x="6309359" y="1783080"/>
-            <a:ext cx="2651760" cy="54864"/>
-          </a:xfrm>
-          <a:prstGeom prst="rect">
-            <a:avLst/>
-          </a:prstGeom>
-          <a:solidFill>
-            <a:srgbClr val="D15010"/>
-          </a:solidFill>
-          <a:ln>
-            <a:noFill/>
-          </a:ln>
-          <a:effectLst/>
-        </p:spPr>
-        <p:style>
-          <a:lnRef idx="1">
-            <a:schemeClr val="accent1"/>
-          </a:lnRef>
-          <a:fillRef idx="3">
-            <a:schemeClr val="accent1"/>
-          </a:fillRef>
-          <a:effectRef idx="2">
-            <a:schemeClr val="accent1"/>
-          </a:effectRef>
-          <a:fontRef idx="minor">
-            <a:schemeClr val="lt1"/>
-          </a:fontRef>
-        </p:style>
-        <p:txBody>
-          <a:bodyPr rtlCol="0" anchor="ctr"/>
-          <a:lstStyle/>
-          <a:p>
-            <a:pPr algn="ctr"/>
-            <a:endParaRPr/>
-          </a:p>
-        </p:txBody>
-      </p:sp>
-      <p:sp>
-        <p:nvSpPr>
-          <p:cNvPr id="21" name="TextBox 20"/>
-          <p:cNvSpPr txBox="1"/>
-          <p:nvPr/>
-        </p:nvSpPr>
-        <p:spPr>
-          <a:xfrm>
-            <a:off x="6492240" y="1965960"/>
-            <a:ext cx="2286000" cy="411480"/>
-          </a:xfrm>
-          <a:prstGeom prst="rect">
-            <a:avLst/>
-          </a:prstGeom>
-          <a:noFill/>
-        </p:spPr>
-        <p:txBody>
-          <a:bodyPr wrap="square" lIns="45720" tIns="27432" rIns="45720" bIns="27432" anchor="t">
-            <a:spAutoFit/>
-          </a:bodyPr>
-          <a:lstStyle/>
-          <a:p>
-            <a:pPr algn="l"/>
-            <a:r>
-              <a:rPr sz="2000" b="1">
-                <a:solidFill>
-                  <a:srgbClr val="F5F5F5"/>
-                </a:solidFill>
-                <a:latin typeface="Arial"/>
-              </a:rPr>
-              <a:t>Nav</a:t>
-            </a:r>
-          </a:p>
-        </p:txBody>
-      </p:sp>
-      <p:sp>
-        <p:nvSpPr>
-          <p:cNvPr id="22" name="TextBox 21"/>
-          <p:cNvSpPr txBox="1"/>
-          <p:nvPr/>
-        </p:nvSpPr>
-        <p:spPr>
-          <a:xfrm>
-            <a:off x="6492240" y="2377440"/>
-            <a:ext cx="2286000" cy="365760"/>
-          </a:xfrm>
-          <a:prstGeom prst="rect">
-            <a:avLst/>
-          </a:prstGeom>
-          <a:noFill/>
-        </p:spPr>
-        <p:txBody>
-          <a:bodyPr wrap="square" lIns="45720" tIns="27432" rIns="45720" bIns="27432" anchor="t">
-            <a:spAutoFit/>
-          </a:bodyPr>
-          <a:lstStyle/>
-          <a:p>
-            <a:pPr algn="l"/>
-            <a:r>
-              <a:rPr sz="1100" b="1">
-                <a:solidFill>
-                  <a:srgbClr val="D15010"/>
-                </a:solidFill>
-                <a:latin typeface="Arial"/>
-              </a:rPr>
-              <a:t>Fintech, legacy Rails plus Java</a:t>
-            </a:r>
-          </a:p>
-        </p:txBody>
-      </p:sp>
-      <p:sp>
-        <p:nvSpPr>
-          <p:cNvPr id="23" name="TextBox 22"/>
-          <p:cNvSpPr txBox="1"/>
-          <p:nvPr/>
-        </p:nvSpPr>
-        <p:spPr>
-          <a:xfrm>
-            <a:off x="6492240" y="2834640"/>
-            <a:ext cx="2286000" cy="2926080"/>
-          </a:xfrm>
-          <a:prstGeom prst="rect">
-            <a:avLst/>
-          </a:prstGeom>
-          <a:noFill/>
-        </p:spPr>
-        <p:txBody>
-          <a:bodyPr wrap="square" lIns="45720" tIns="27432" rIns="45720" bIns="27432" anchor="t">
-            <a:spAutoFit/>
-          </a:bodyPr>
-          <a:lstStyle/>
-          <a:p>
-            <a:pPr algn="l">
-              <a:spcAft>
-                <a:spcPts val="1000"/>
-              </a:spcAft>
-            </a:pPr>
-            <a:r>
-              <a:rPr sz="1300" b="0">
-                <a:solidFill>
-                  <a:srgbClr val="F5F5F5"/>
-                </a:solidFill>
-                <a:latin typeface="Arial"/>
-              </a:rPr>
-              <a:t>“60%” reduction in context-switching time.</a:t>
-            </a:r>
-          </a:p>
-          <a:p>
-            <a:pPr algn="l">
-              <a:spcAft>
-                <a:spcPts val="1000"/>
-              </a:spcAft>
-            </a:pPr>
-            <a:r>
-              <a:rPr sz="1300" b="0">
-                <a:solidFill>
-                  <a:srgbClr val="F5F5F5"/>
-                </a:solidFill>
-                <a:latin typeface="Arial"/>
-              </a:rPr>
-              <a:t>“2x” faster feature development cycles.</a:t>
-            </a:r>
-          </a:p>
-        </p:txBody>
-      </p:sp>
-      <p:sp>
-        <p:nvSpPr>
-          <p:cNvPr id="24" name="Rectangle 23"/>
-          <p:cNvSpPr/>
-          <p:nvPr/>
-        </p:nvSpPr>
-        <p:spPr>
-          <a:xfrm>
-            <a:off x="9098280" y="1783080"/>
-            <a:ext cx="2651760" cy="4023360"/>
-          </a:xfrm>
-          <a:prstGeom prst="rect">
-            <a:avLst/>
-          </a:prstGeom>
-          <a:solidFill>
-            <a:srgbClr val="1A1A1A"/>
-          </a:solidFill>
-          <a:ln w="9525">
-            <a:solidFill>
-              <a:srgbClr val="2E2E2E"/>
-            </a:solidFill>
-          </a:ln>
-          <a:effectLst/>
-        </p:spPr>
-        <p:style>
-          <a:lnRef idx="1">
-            <a:schemeClr val="accent1"/>
-          </a:lnRef>
-          <a:fillRef idx="3">
-            <a:schemeClr val="accent1"/>
-          </a:fillRef>
-          <a:effectRef idx="2">
-            <a:schemeClr val="accent1"/>
-          </a:effectRef>
-          <a:fontRef idx="minor">
-            <a:schemeClr val="lt1"/>
-          </a:fontRef>
-        </p:style>
-        <p:txBody>
-          <a:bodyPr rtlCol="0" anchor="ctr"/>
-          <a:lstStyle/>
-          <a:p>
-            <a:pPr algn="ctr"/>
-            <a:endParaRPr/>
-          </a:p>
-        </p:txBody>
-      </p:sp>
-      <p:sp>
-        <p:nvSpPr>
-          <p:cNvPr id="25" name="Rectangle 24"/>
-          <p:cNvSpPr/>
-          <p:nvPr/>
-        </p:nvSpPr>
-        <p:spPr>
-          <a:xfrm>
-            <a:off x="9098280" y="1783080"/>
-            <a:ext cx="2651760" cy="54864"/>
-          </a:xfrm>
-          <a:prstGeom prst="rect">
-            <a:avLst/>
-          </a:prstGeom>
-          <a:solidFill>
-            <a:srgbClr val="D15010"/>
-          </a:solidFill>
-          <a:ln>
-            <a:noFill/>
-          </a:ln>
-          <a:effectLst/>
-        </p:spPr>
-        <p:style>
-          <a:lnRef idx="1">
-            <a:schemeClr val="accent1"/>
-          </a:lnRef>
-          <a:fillRef idx="3">
-            <a:schemeClr val="accent1"/>
-          </a:fillRef>
-          <a:effectRef idx="2">
-            <a:schemeClr val="accent1"/>
-          </a:effectRef>
-          <a:fontRef idx="minor">
-            <a:schemeClr val="lt1"/>
-          </a:fontRef>
-        </p:style>
-        <p:txBody>
-          <a:bodyPr rtlCol="0" anchor="ctr"/>
-          <a:lstStyle/>
-          <a:p>
-            <a:pPr algn="ctr"/>
-            <a:endParaRPr/>
-          </a:p>
-        </p:txBody>
-      </p:sp>
-      <p:sp>
-        <p:nvSpPr>
-          <p:cNvPr id="26" name="TextBox 25"/>
-          <p:cNvSpPr txBox="1"/>
-          <p:nvPr/>
-        </p:nvSpPr>
-        <p:spPr>
-          <a:xfrm>
-            <a:off x="9281159" y="1965960"/>
-            <a:ext cx="2286000" cy="411480"/>
-          </a:xfrm>
-          <a:prstGeom prst="rect">
-            <a:avLst/>
-          </a:prstGeom>
-          <a:noFill/>
-        </p:spPr>
-        <p:txBody>
-          <a:bodyPr wrap="square" lIns="45720" tIns="27432" rIns="45720" bIns="27432" anchor="t">
-            <a:spAutoFit/>
-          </a:bodyPr>
-          <a:lstStyle/>
-          <a:p>
-            <a:pPr algn="l"/>
-            <a:r>
-              <a:rPr sz="2000" b="1">
-                <a:solidFill>
-                  <a:srgbClr val="F5F5F5"/>
-                </a:solidFill>
-                <a:latin typeface="Arial"/>
-              </a:rPr>
-              <a:t>Chainguard</a:t>
-            </a:r>
-          </a:p>
-        </p:txBody>
-      </p:sp>
-      <p:sp>
-        <p:nvSpPr>
-          <p:cNvPr id="27" name="TextBox 26"/>
-          <p:cNvSpPr txBox="1"/>
-          <p:nvPr/>
-        </p:nvSpPr>
-        <p:spPr>
-          <a:xfrm>
-            <a:off x="9281159" y="2377440"/>
-            <a:ext cx="2286000" cy="365760"/>
-          </a:xfrm>
-          <a:prstGeom prst="rect">
-            <a:avLst/>
-          </a:prstGeom>
-          <a:noFill/>
-        </p:spPr>
-        <p:txBody>
-          <a:bodyPr wrap="square" lIns="45720" tIns="27432" rIns="45720" bIns="27432" anchor="t">
-            <a:spAutoFit/>
-          </a:bodyPr>
-          <a:lstStyle/>
-          <a:p>
-            <a:pPr algn="l"/>
-            <a:r>
-              <a:rPr sz="1100" b="1">
-                <a:solidFill>
-                  <a:srgbClr val="D15010"/>
-                </a:solidFill>
-                <a:latin typeface="Arial"/>
-              </a:rPr>
-              <a:t>Secure open source software</a:t>
-            </a:r>
-          </a:p>
-        </p:txBody>
-      </p:sp>
-      <p:sp>
-        <p:nvSpPr>
-          <p:cNvPr id="28" name="TextBox 27"/>
-          <p:cNvSpPr txBox="1"/>
-          <p:nvPr/>
-        </p:nvSpPr>
-        <p:spPr>
-          <a:xfrm>
-            <a:off x="9281159" y="2834640"/>
-            <a:ext cx="2286000" cy="2926080"/>
-          </a:xfrm>
-          <a:prstGeom prst="rect">
-            <a:avLst/>
-          </a:prstGeom>
-          <a:noFill/>
-        </p:spPr>
-        <p:txBody>
-          <a:bodyPr wrap="square" lIns="45720" tIns="27432" rIns="45720" bIns="27432" anchor="t">
-            <a:spAutoFit/>
-          </a:bodyPr>
-          <a:lstStyle/>
-          <a:p>
-            <a:pPr algn="l">
-              <a:spcAft>
-                <a:spcPts val="1000"/>
-              </a:spcAft>
-            </a:pPr>
-            <a:r>
-              <a:rPr sz="1300" b="0">
-                <a:solidFill>
-                  <a:srgbClr val="F5F5F5"/>
-                </a:solidFill>
-                <a:latin typeface="Arial"/>
-              </a:rPr>
-              <a:t>One session kept going for two weeks without losing context.</a:t>
-            </a:r>
-          </a:p>
-          <a:p>
-            <a:pPr algn="l">
-              <a:spcAft>
-                <a:spcPts val="1000"/>
-              </a:spcAft>
-            </a:pPr>
-            <a:r>
-              <a:rPr sz="1300" b="0">
-                <a:solidFill>
-                  <a:srgbClr val="F5F5F5"/>
-                </a:solidFill>
-                <a:latin typeface="Arial"/>
-              </a:rPr>
-              <a:t>Listed results: 6 repositories, 80 packages built.</a:t>
-            </a:r>
-          </a:p>
-        </p:txBody>
-      </p:sp>
-      <p:sp>
-        <p:nvSpPr>
-          <p:cNvPr id="29" name="TextBox 28"/>
-          <p:cNvSpPr txBox="1"/>
-          <p:nvPr/>
-        </p:nvSpPr>
-        <p:spPr>
-          <a:xfrm>
-            <a:off x="731520" y="5943600"/>
-            <a:ext cx="10698480" cy="365760"/>
-          </a:xfrm>
-          <a:prstGeom prst="rect">
-            <a:avLst/>
-          </a:prstGeom>
-          <a:noFill/>
-        </p:spPr>
-        <p:txBody>
-          <a:bodyPr wrap="square" lIns="45720" tIns="27432" rIns="45720" bIns="27432" anchor="t">
-            <a:spAutoFit/>
-          </a:bodyPr>
-          <a:lstStyle/>
-          <a:p>
-            <a:pPr algn="l"/>
-            <a:r>
-              <a:rPr sz="1100" b="0">
-                <a:solidFill>
-                  <a:srgbClr val="A3A3A3"/>
-                </a:solidFill>
-                <a:latin typeface="Arial"/>
-              </a:rPr>
-              <a:t>Results are customer-reported, from factory.com/case-studies. Your results will differ.</a:t>
-            </a:r>
-          </a:p>
-        </p:txBody>
-      </p:sp>
     </p:spTree>
+    <p:extLst>
+      <p:ext uri="{BB962C8B-B14F-4D97-AF65-F5344CB8AC3E}">
+        <p14:creationId xmlns:p14="http://schemas.microsoft.com/office/powerpoint/2010/main" val="4025110427"/>
+      </p:ext>
+    </p:extLst>
   </p:cSld>
   <p:clrMapOvr>
     <a:masterClrMapping/>
@@ -9094,7 +8036,7 @@
                 </a:solidFill>
                 <a:latin typeface="Arial"/>
               </a:rPr>
-              <a:t>ONE CHANGE, THE WHOLE LIFECYCLE</a:t>
+              <a:t>CUSTOMER-REPORTED RESULTS</a:t>
             </a:r>
           </a:p>
         </p:txBody>
@@ -9129,35 +8071,11 @@
                 </a:solidFill>
                 <a:latin typeface="Arial"/>
               </a:rPr>
-              <a:t>The flow of the demo</a:t>
-            </a:r>
-          </a:p>
-        </p:txBody>
-      </p:sp>
-      <p:pic>
-        <p:nvPicPr>
-          <p:cNvPr id="6" name="Picture 5" descr="logo_orange.png"/>
-          <p:cNvPicPr>
-            <a:picLocks noChangeAspect="1"/>
-          </p:cNvPicPr>
-          <p:nvPr/>
-        </p:nvPicPr>
-        <p:blipFill>
-          <a:blip r:embed="rId3"/>
-          <a:stretch>
-            <a:fillRect/>
-          </a:stretch>
-        </p:blipFill>
-        <p:spPr>
-          <a:xfrm>
-            <a:off x="11155680" y="457200"/>
-            <a:ext cx="502920" cy="502920"/>
-          </a:xfrm>
-          <a:prstGeom prst="rect">
-            <a:avLst/>
-          </a:prstGeom>
-        </p:spPr>
-      </p:pic>
+              <a:t>Success stories</a:t>
+            </a:r>
+          </a:p>
+        </p:txBody>
+      </p:sp>
       <p:sp>
         <p:nvSpPr>
           <p:cNvPr id="7" name="TextBox 6"/>
@@ -9188,42 +8106,7 @@
                 </a:solidFill>
                 <a:latin typeface="Arial"/>
               </a:rPr>
-              <a:t>6</a:t>
-            </a:r>
-          </a:p>
-        </p:txBody>
-      </p:sp>
-      <p:sp>
-        <p:nvSpPr>
-          <p:cNvPr id="8" name="TextBox 7"/>
-          <p:cNvSpPr txBox="1"/>
-          <p:nvPr/>
-        </p:nvSpPr>
-        <p:spPr>
-          <a:xfrm>
-            <a:off x="548640" y="6400800"/>
-            <a:ext cx="5486400" cy="274320"/>
-          </a:xfrm>
-          <a:prstGeom prst="rect">
-            <a:avLst/>
-          </a:prstGeom>
-          <a:noFill/>
-        </p:spPr>
-        <p:txBody>
-          <a:bodyPr wrap="square" lIns="45720" tIns="27432" rIns="45720" bIns="27432" anchor="t">
-            <a:spAutoFit/>
-          </a:bodyPr>
-          <a:lstStyle/>
-          <a:p>
-            <a:pPr algn="l"/>
-            <a:r>
-              <a:rPr sz="1000" b="0">
-                <a:solidFill>
-                  <a:srgbClr val="A3A3A3"/>
-                </a:solidFill>
-                <a:latin typeface="Arial"/>
-              </a:rPr>
-              <a:t>Second meeting: what we heard and the demo</a:t>
+              <a:t>5</a:t>
             </a:r>
           </a:p>
         </p:txBody>
@@ -9237,7 +8120,7 @@
         <p:spPr>
           <a:xfrm>
             <a:off x="731520" y="1783080"/>
-            <a:ext cx="2651760" cy="2011680"/>
+            <a:ext cx="2651760" cy="4023360"/>
           </a:xfrm>
           <a:prstGeom prst="rect">
             <a:avLst/>
@@ -9322,102 +8205,14 @@
       </p:sp>
       <p:sp>
         <p:nvSpPr>
-          <p:cNvPr id="11" name="Oval 10"/>
-          <p:cNvSpPr/>
-          <p:nvPr/>
-        </p:nvSpPr>
-        <p:spPr>
-          <a:xfrm>
-            <a:off x="932688" y="2039112"/>
-            <a:ext cx="420624" cy="420624"/>
-          </a:xfrm>
-          <a:prstGeom prst="ellipse">
-            <a:avLst/>
-          </a:prstGeom>
-          <a:solidFill>
-            <a:srgbClr val="D15010"/>
-          </a:solidFill>
-          <a:ln>
-            <a:noFill/>
-          </a:ln>
-          <a:effectLst/>
-        </p:spPr>
-        <p:style>
-          <a:lnRef idx="1">
-            <a:schemeClr val="accent1"/>
-          </a:lnRef>
-          <a:fillRef idx="3">
-            <a:schemeClr val="accent1"/>
-          </a:fillRef>
-          <a:effectRef idx="2">
-            <a:schemeClr val="accent1"/>
-          </a:effectRef>
-          <a:fontRef idx="minor">
-            <a:schemeClr val="lt1"/>
-          </a:fontRef>
-        </p:style>
-        <p:txBody>
-          <a:bodyPr lIns="0" rIns="0" rtlCol="0" anchor="ctr"/>
-          <a:lstStyle/>
-          <a:p>
-            <a:pPr algn="ctr"/>
-            <a:r>
-              <a:rPr sz="1400" b="1">
-                <a:solidFill>
-                  <a:srgbClr val="F5F5F5"/>
-                </a:solidFill>
-                <a:latin typeface="Arial"/>
-              </a:rPr>
-              <a:t>1</a:t>
-            </a:r>
-          </a:p>
-        </p:txBody>
-      </p:sp>
-      <p:sp>
-        <p:nvSpPr>
-          <p:cNvPr id="12" name="TextBox 11"/>
+          <p:cNvPr id="11" name="TextBox 10"/>
           <p:cNvSpPr txBox="1"/>
           <p:nvPr/>
         </p:nvSpPr>
         <p:spPr>
           <a:xfrm>
-            <a:off x="1481328" y="1984248"/>
-            <a:ext cx="1719072" cy="548640"/>
-          </a:xfrm>
-          <a:prstGeom prst="rect">
-            <a:avLst/>
-          </a:prstGeom>
-          <a:noFill/>
-        </p:spPr>
-        <p:txBody>
-          <a:bodyPr wrap="square" lIns="45720" tIns="27432" rIns="45720" bIns="27432" anchor="ctr">
-            <a:spAutoFit/>
-          </a:bodyPr>
-          <a:lstStyle/>
-          <a:p>
-            <a:pPr algn="l"/>
-            <a:r>
-              <a:rPr sz="1600" b="1">
-                <a:solidFill>
-                  <a:srgbClr val="F5F5F5"/>
-                </a:solidFill>
-                <a:latin typeface="Arial"/>
-              </a:rPr>
-              <a:t>The problem</a:t>
-            </a:r>
-          </a:p>
-        </p:txBody>
-      </p:sp>
-      <p:sp>
-        <p:nvSpPr>
-          <p:cNvPr id="13" name="TextBox 12"/>
-          <p:cNvSpPr txBox="1"/>
-          <p:nvPr/>
-        </p:nvSpPr>
-        <p:spPr>
-          <a:xfrm>
-            <a:off x="960120" y="2651760"/>
-            <a:ext cx="2194560" cy="1051560"/>
+            <a:off x="914400" y="1965960"/>
+            <a:ext cx="2286000" cy="411480"/>
           </a:xfrm>
           <a:prstGeom prst="rect">
             <a:avLst/>
@@ -9430,19 +8225,105 @@
           </a:bodyPr>
           <a:lstStyle/>
           <a:p>
+            <a:pPr algn="l"/>
+            <a:r>
+              <a:rPr sz="2000" b="1">
+                <a:solidFill>
+                  <a:srgbClr val="F5F5F5"/>
+                </a:solidFill>
+                <a:latin typeface="Arial"/>
+              </a:rPr>
+              <a:t>Blackstone</a:t>
+            </a:r>
+          </a:p>
+        </p:txBody>
+      </p:sp>
+      <p:sp>
+        <p:nvSpPr>
+          <p:cNvPr id="12" name="TextBox 11"/>
+          <p:cNvSpPr txBox="1"/>
+          <p:nvPr/>
+        </p:nvSpPr>
+        <p:spPr>
+          <a:xfrm>
+            <a:off x="914400" y="2377440"/>
+            <a:ext cx="2286000" cy="365760"/>
+          </a:xfrm>
+          <a:prstGeom prst="rect">
+            <a:avLst/>
+          </a:prstGeom>
+          <a:noFill/>
+        </p:spPr>
+        <p:txBody>
+          <a:bodyPr wrap="square" lIns="45720" tIns="27432" rIns="45720" bIns="27432" anchor="t">
+            <a:spAutoFit/>
+          </a:bodyPr>
+          <a:lstStyle/>
+          <a:p>
+            <a:pPr algn="l"/>
+            <a:r>
+              <a:rPr sz="1100" b="1">
+                <a:solidFill>
+                  <a:srgbClr val="D15010"/>
+                </a:solidFill>
+                <a:latin typeface="Arial"/>
+              </a:rPr>
+              <a:t>Asset manager</a:t>
+            </a:r>
+          </a:p>
+        </p:txBody>
+      </p:sp>
+      <p:sp>
+        <p:nvSpPr>
+          <p:cNvPr id="13" name="TextBox 12"/>
+          <p:cNvSpPr txBox="1"/>
+          <p:nvPr/>
+        </p:nvSpPr>
+        <p:spPr>
+          <a:xfrm>
+            <a:off x="914400" y="2834640"/>
+            <a:ext cx="2286000" cy="2926080"/>
+          </a:xfrm>
+          <a:prstGeom prst="rect">
+            <a:avLst/>
+          </a:prstGeom>
+          <a:noFill/>
+        </p:spPr>
+        <p:txBody>
+          <a:bodyPr wrap="square" lIns="45720" tIns="27432" rIns="45720" bIns="27432" anchor="t">
+            <a:spAutoFit/>
+          </a:bodyPr>
+          <a:lstStyle/>
+          <a:p>
             <a:pPr algn="l">
               <a:spcAft>
-                <a:spcPts val="400"/>
+                <a:spcPts val="1000"/>
               </a:spcAft>
             </a:pPr>
             <a:r>
-              <a:rPr sz="1200" b="0">
-                <a:solidFill>
-                  <a:srgbClr val="A3A3A3"/>
-                </a:solidFill>
-                <a:latin typeface="Arial"/>
-              </a:rPr>
-              <a:t>Run the green-screen app and show the hidden rules.</a:t>
+              <a:rPr sz="1300" b="0">
+                <a:solidFill>
+                  <a:srgbClr val="F5F5F5"/>
+                </a:solidFill>
+                <a:latin typeface="Arial"/>
+              </a:rPr>
+              <a:t>Needed agents to run inside its own data center and no dependence on one model vendor.</a:t>
+            </a:r>
+          </a:p>
+          <a:p>
+            <a:pPr algn="l">
+              <a:spcAft>
+                <a:spcPts val="1000"/>
+              </a:spcAft>
+            </a:pPr>
+            <a:r>
+              <a:rPr sz="1300" b="0">
+                <a:solidFill>
+                  <a:srgbClr val="F5F5F5"/>
+                </a:solidFill>
+                <a:latin typeface="Arial"/>
+              </a:rPr>
+              <a:t>Onboarding a new developer went “from up to two weeks to minutes.”</a:t>
             </a:r>
           </a:p>
         </p:txBody>
@@ -9456,7 +8337,7 @@
         <p:spPr>
           <a:xfrm>
             <a:off x="3520439" y="1783080"/>
-            <a:ext cx="2651760" cy="2011680"/>
+            <a:ext cx="2651760" cy="4023360"/>
           </a:xfrm>
           <a:prstGeom prst="rect">
             <a:avLst/>
@@ -9541,102 +8422,14 @@
       </p:sp>
       <p:sp>
         <p:nvSpPr>
-          <p:cNvPr id="16" name="Oval 15"/>
-          <p:cNvSpPr/>
-          <p:nvPr/>
-        </p:nvSpPr>
-        <p:spPr>
-          <a:xfrm>
-            <a:off x="3721607" y="2039112"/>
-            <a:ext cx="420624" cy="420624"/>
-          </a:xfrm>
-          <a:prstGeom prst="ellipse">
-            <a:avLst/>
-          </a:prstGeom>
-          <a:solidFill>
-            <a:srgbClr val="D15010"/>
-          </a:solidFill>
-          <a:ln>
-            <a:noFill/>
-          </a:ln>
-          <a:effectLst/>
-        </p:spPr>
-        <p:style>
-          <a:lnRef idx="1">
-            <a:schemeClr val="accent1"/>
-          </a:lnRef>
-          <a:fillRef idx="3">
-            <a:schemeClr val="accent1"/>
-          </a:fillRef>
-          <a:effectRef idx="2">
-            <a:schemeClr val="accent1"/>
-          </a:effectRef>
-          <a:fontRef idx="minor">
-            <a:schemeClr val="lt1"/>
-          </a:fontRef>
-        </p:style>
-        <p:txBody>
-          <a:bodyPr lIns="0" rIns="0" rtlCol="0" anchor="ctr"/>
-          <a:lstStyle/>
-          <a:p>
-            <a:pPr algn="ctr"/>
-            <a:r>
-              <a:rPr sz="1400" b="1">
-                <a:solidFill>
-                  <a:srgbClr val="F5F5F5"/>
-                </a:solidFill>
-                <a:latin typeface="Arial"/>
-              </a:rPr>
-              <a:t>2</a:t>
-            </a:r>
-          </a:p>
-        </p:txBody>
-      </p:sp>
-      <p:sp>
-        <p:nvSpPr>
-          <p:cNvPr id="17" name="TextBox 16"/>
+          <p:cNvPr id="16" name="TextBox 15"/>
           <p:cNvSpPr txBox="1"/>
           <p:nvPr/>
         </p:nvSpPr>
         <p:spPr>
           <a:xfrm>
-            <a:off x="4270248" y="1984248"/>
-            <a:ext cx="1719072" cy="548640"/>
-          </a:xfrm>
-          <a:prstGeom prst="rect">
-            <a:avLst/>
-          </a:prstGeom>
-          <a:noFill/>
-        </p:spPr>
-        <p:txBody>
-          <a:bodyPr wrap="square" lIns="45720" tIns="27432" rIns="45720" bIns="27432" anchor="ctr">
-            <a:spAutoFit/>
-          </a:bodyPr>
-          <a:lstStyle/>
-          <a:p>
-            <a:pPr algn="l"/>
-            <a:r>
-              <a:rPr sz="1600" b="1">
-                <a:solidFill>
-                  <a:srgbClr val="F5F5F5"/>
-                </a:solidFill>
-                <a:latin typeface="Arial"/>
-              </a:rPr>
-              <a:t>Intake</a:t>
-            </a:r>
-          </a:p>
-        </p:txBody>
-      </p:sp>
-      <p:sp>
-        <p:nvSpPr>
-          <p:cNvPr id="18" name="TextBox 17"/>
-          <p:cNvSpPr txBox="1"/>
-          <p:nvPr/>
-        </p:nvSpPr>
-        <p:spPr>
-          <a:xfrm>
-            <a:off x="3749039" y="2651760"/>
-            <a:ext cx="2194560" cy="1051560"/>
+            <a:off x="3703320" y="1965960"/>
+            <a:ext cx="2286000" cy="411480"/>
           </a:xfrm>
           <a:prstGeom prst="rect">
             <a:avLst/>
@@ -9649,19 +8442,105 @@
           </a:bodyPr>
           <a:lstStyle/>
           <a:p>
+            <a:pPr algn="l"/>
+            <a:r>
+              <a:rPr sz="2000" b="1">
+                <a:solidFill>
+                  <a:srgbClr val="F5F5F5"/>
+                </a:solidFill>
+                <a:latin typeface="Arial"/>
+              </a:rPr>
+              <a:t>Comarch</a:t>
+            </a:r>
+          </a:p>
+        </p:txBody>
+      </p:sp>
+      <p:sp>
+        <p:nvSpPr>
+          <p:cNvPr id="17" name="TextBox 16"/>
+          <p:cNvSpPr txBox="1"/>
+          <p:nvPr/>
+        </p:nvSpPr>
+        <p:spPr>
+          <a:xfrm>
+            <a:off x="3703320" y="2377440"/>
+            <a:ext cx="2286000" cy="365760"/>
+          </a:xfrm>
+          <a:prstGeom prst="rect">
+            <a:avLst/>
+          </a:prstGeom>
+          <a:noFill/>
+        </p:spPr>
+        <p:txBody>
+          <a:bodyPr wrap="square" lIns="45720" tIns="27432" rIns="45720" bIns="27432" anchor="t">
+            <a:spAutoFit/>
+          </a:bodyPr>
+          <a:lstStyle/>
+          <a:p>
+            <a:pPr algn="l"/>
+            <a:r>
+              <a:rPr sz="1100" b="1">
+                <a:solidFill>
+                  <a:srgbClr val="D15010"/>
+                </a:solidFill>
+                <a:latin typeface="Arial"/>
+              </a:rPr>
+              <a:t>IT services, 5,000 specialists</a:t>
+            </a:r>
+          </a:p>
+        </p:txBody>
+      </p:sp>
+      <p:sp>
+        <p:nvSpPr>
+          <p:cNvPr id="18" name="TextBox 17"/>
+          <p:cNvSpPr txBox="1"/>
+          <p:nvPr/>
+        </p:nvSpPr>
+        <p:spPr>
+          <a:xfrm>
+            <a:off x="3703320" y="2834640"/>
+            <a:ext cx="2286000" cy="2926080"/>
+          </a:xfrm>
+          <a:prstGeom prst="rect">
+            <a:avLst/>
+          </a:prstGeom>
+          <a:noFill/>
+        </p:spPr>
+        <p:txBody>
+          <a:bodyPr wrap="square" lIns="45720" tIns="27432" rIns="45720" bIns="27432" anchor="t">
+            <a:spAutoFit/>
+          </a:bodyPr>
+          <a:lstStyle/>
+          <a:p>
             <a:pPr algn="l">
               <a:spcAft>
-                <a:spcPts val="400"/>
+                <a:spcPts val="1000"/>
               </a:spcAft>
             </a:pPr>
             <a:r>
-              <a:rPr sz="1200" b="0">
-                <a:solidFill>
-                  <a:srgbClr val="A3A3A3"/>
-                </a:solidFill>
-                <a:latin typeface="Arial"/>
-              </a:rPr>
-              <a:t>A Jira ticket is assigned to Factory; an automation watches for new ones.</a:t>
+              <a:rPr sz="1300" b="0">
+                <a:solidFill>
+                  <a:srgbClr val="F5F5F5"/>
+                </a:solidFill>
+                <a:latin typeface="Arial"/>
+              </a:rPr>
+              <a:t>Scoped XSLT modernization: “10,000 man days” estimated, completed “in 45 days.”</a:t>
+            </a:r>
+          </a:p>
+          <a:p>
+            <a:pPr algn="l">
+              <a:spcAft>
+                <a:spcPts val="1000"/>
+              </a:spcAft>
+            </a:pPr>
+            <a:r>
+              <a:rPr sz="1300" b="0">
+                <a:solidFill>
+                  <a:srgbClr val="F5F5F5"/>
+                </a:solidFill>
+                <a:latin typeface="Arial"/>
+              </a:rPr>
+              <a:t>Database migration scoped at “45 days,” completed by a Factory mission “in 6 hours.”</a:t>
             </a:r>
           </a:p>
         </p:txBody>
@@ -9675,7 +8554,7 @@
         <p:spPr>
           <a:xfrm>
             <a:off x="6309359" y="1783080"/>
-            <a:ext cx="2651760" cy="2011680"/>
+            <a:ext cx="2651760" cy="4023360"/>
           </a:xfrm>
           <a:prstGeom prst="rect">
             <a:avLst/>
@@ -9760,102 +8639,14 @@
       </p:sp>
       <p:sp>
         <p:nvSpPr>
-          <p:cNvPr id="21" name="Oval 20"/>
-          <p:cNvSpPr/>
-          <p:nvPr/>
-        </p:nvSpPr>
-        <p:spPr>
-          <a:xfrm>
-            <a:off x="6510527" y="2039112"/>
-            <a:ext cx="420624" cy="420624"/>
-          </a:xfrm>
-          <a:prstGeom prst="ellipse">
-            <a:avLst/>
-          </a:prstGeom>
-          <a:solidFill>
-            <a:srgbClr val="D15010"/>
-          </a:solidFill>
-          <a:ln>
-            <a:noFill/>
-          </a:ln>
-          <a:effectLst/>
-        </p:spPr>
-        <p:style>
-          <a:lnRef idx="1">
-            <a:schemeClr val="accent1"/>
-          </a:lnRef>
-          <a:fillRef idx="3">
-            <a:schemeClr val="accent1"/>
-          </a:fillRef>
-          <a:effectRef idx="2">
-            <a:schemeClr val="accent1"/>
-          </a:effectRef>
-          <a:fontRef idx="minor">
-            <a:schemeClr val="lt1"/>
-          </a:fontRef>
-        </p:style>
-        <p:txBody>
-          <a:bodyPr lIns="0" rIns="0" rtlCol="0" anchor="ctr"/>
-          <a:lstStyle/>
-          <a:p>
-            <a:pPr algn="ctr"/>
-            <a:r>
-              <a:rPr sz="1400" b="1">
-                <a:solidFill>
-                  <a:srgbClr val="F5F5F5"/>
-                </a:solidFill>
-                <a:latin typeface="Arial"/>
-              </a:rPr>
-              <a:t>3</a:t>
-            </a:r>
-          </a:p>
-        </p:txBody>
-      </p:sp>
-      <p:sp>
-        <p:nvSpPr>
-          <p:cNvPr id="22" name="TextBox 21"/>
+          <p:cNvPr id="21" name="TextBox 20"/>
           <p:cNvSpPr txBox="1"/>
           <p:nvPr/>
         </p:nvSpPr>
         <p:spPr>
           <a:xfrm>
-            <a:off x="7059168" y="1984248"/>
-            <a:ext cx="1719072" cy="548640"/>
-          </a:xfrm>
-          <a:prstGeom prst="rect">
-            <a:avLst/>
-          </a:prstGeom>
-          <a:noFill/>
-        </p:spPr>
-        <p:txBody>
-          <a:bodyPr wrap="square" lIns="45720" tIns="27432" rIns="45720" bIns="27432" anchor="ctr">
-            <a:spAutoFit/>
-          </a:bodyPr>
-          <a:lstStyle/>
-          <a:p>
-            <a:pPr algn="l"/>
-            <a:r>
-              <a:rPr sz="1600" b="1">
-                <a:solidFill>
-                  <a:srgbClr val="F5F5F5"/>
-                </a:solidFill>
-                <a:latin typeface="Arial"/>
-              </a:rPr>
-              <a:t>Readiness</a:t>
-            </a:r>
-          </a:p>
-        </p:txBody>
-      </p:sp>
-      <p:sp>
-        <p:nvSpPr>
-          <p:cNvPr id="23" name="TextBox 22"/>
-          <p:cNvSpPr txBox="1"/>
-          <p:nvPr/>
-        </p:nvSpPr>
-        <p:spPr>
-          <a:xfrm>
-            <a:off x="6537959" y="2651760"/>
-            <a:ext cx="2194560" cy="1051560"/>
+            <a:off x="6492240" y="1965960"/>
+            <a:ext cx="2286000" cy="411480"/>
           </a:xfrm>
           <a:prstGeom prst="rect">
             <a:avLst/>
@@ -9868,19 +8659,105 @@
           </a:bodyPr>
           <a:lstStyle/>
           <a:p>
+            <a:pPr algn="l"/>
+            <a:r>
+              <a:rPr sz="2000" b="1">
+                <a:solidFill>
+                  <a:srgbClr val="F5F5F5"/>
+                </a:solidFill>
+                <a:latin typeface="Arial"/>
+              </a:rPr>
+              <a:t>Nav</a:t>
+            </a:r>
+          </a:p>
+        </p:txBody>
+      </p:sp>
+      <p:sp>
+        <p:nvSpPr>
+          <p:cNvPr id="22" name="TextBox 21"/>
+          <p:cNvSpPr txBox="1"/>
+          <p:nvPr/>
+        </p:nvSpPr>
+        <p:spPr>
+          <a:xfrm>
+            <a:off x="6492240" y="2377440"/>
+            <a:ext cx="2286000" cy="365760"/>
+          </a:xfrm>
+          <a:prstGeom prst="rect">
+            <a:avLst/>
+          </a:prstGeom>
+          <a:noFill/>
+        </p:spPr>
+        <p:txBody>
+          <a:bodyPr wrap="square" lIns="45720" tIns="27432" rIns="45720" bIns="27432" anchor="t">
+            <a:spAutoFit/>
+          </a:bodyPr>
+          <a:lstStyle/>
+          <a:p>
+            <a:pPr algn="l"/>
+            <a:r>
+              <a:rPr sz="1100" b="1">
+                <a:solidFill>
+                  <a:srgbClr val="D15010"/>
+                </a:solidFill>
+                <a:latin typeface="Arial"/>
+              </a:rPr>
+              <a:t>Fintech, legacy Rails plus Java</a:t>
+            </a:r>
+          </a:p>
+        </p:txBody>
+      </p:sp>
+      <p:sp>
+        <p:nvSpPr>
+          <p:cNvPr id="23" name="TextBox 22"/>
+          <p:cNvSpPr txBox="1"/>
+          <p:nvPr/>
+        </p:nvSpPr>
+        <p:spPr>
+          <a:xfrm>
+            <a:off x="6492240" y="2834640"/>
+            <a:ext cx="2286000" cy="2926080"/>
+          </a:xfrm>
+          <a:prstGeom prst="rect">
+            <a:avLst/>
+          </a:prstGeom>
+          <a:noFill/>
+        </p:spPr>
+        <p:txBody>
+          <a:bodyPr wrap="square" lIns="45720" tIns="27432" rIns="45720" bIns="27432" anchor="t">
+            <a:spAutoFit/>
+          </a:bodyPr>
+          <a:lstStyle/>
+          <a:p>
             <a:pPr algn="l">
               <a:spcAft>
-                <a:spcPts val="400"/>
+                <a:spcPts val="1000"/>
               </a:spcAft>
             </a:pPr>
             <a:r>
-              <a:rPr sz="1200" b="0">
-                <a:solidFill>
-                  <a:srgbClr val="A3A3A3"/>
-                </a:solidFill>
-                <a:latin typeface="Arial"/>
-              </a:rPr>
-              <a:t>Readiness report, plus tests that pin today’s behavior.</a:t>
+              <a:rPr sz="1300" b="0">
+                <a:solidFill>
+                  <a:srgbClr val="F5F5F5"/>
+                </a:solidFill>
+                <a:latin typeface="Arial"/>
+              </a:rPr>
+              <a:t>“60%” reduction in context-switching time.</a:t>
+            </a:r>
+          </a:p>
+          <a:p>
+            <a:pPr algn="l">
+              <a:spcAft>
+                <a:spcPts val="1000"/>
+              </a:spcAft>
+            </a:pPr>
+            <a:r>
+              <a:rPr sz="1300" b="0">
+                <a:solidFill>
+                  <a:srgbClr val="F5F5F5"/>
+                </a:solidFill>
+                <a:latin typeface="Arial"/>
+              </a:rPr>
+              <a:t>“2x” faster feature development cycles.</a:t>
             </a:r>
           </a:p>
         </p:txBody>
@@ -9894,7 +8771,7 @@
         <p:spPr>
           <a:xfrm>
             <a:off x="9098280" y="1783080"/>
-            <a:ext cx="2651760" cy="2011680"/>
+            <a:ext cx="2651760" cy="4023360"/>
           </a:xfrm>
           <a:prstGeom prst="rect">
             <a:avLst/>
@@ -9979,102 +8856,14 @@
       </p:sp>
       <p:sp>
         <p:nvSpPr>
-          <p:cNvPr id="26" name="Oval 25"/>
-          <p:cNvSpPr/>
-          <p:nvPr/>
-        </p:nvSpPr>
-        <p:spPr>
-          <a:xfrm>
-            <a:off x="9299448" y="2039112"/>
-            <a:ext cx="420624" cy="420624"/>
-          </a:xfrm>
-          <a:prstGeom prst="ellipse">
-            <a:avLst/>
-          </a:prstGeom>
-          <a:solidFill>
-            <a:srgbClr val="D15010"/>
-          </a:solidFill>
-          <a:ln>
-            <a:noFill/>
-          </a:ln>
-          <a:effectLst/>
-        </p:spPr>
-        <p:style>
-          <a:lnRef idx="1">
-            <a:schemeClr val="accent1"/>
-          </a:lnRef>
-          <a:fillRef idx="3">
-            <a:schemeClr val="accent1"/>
-          </a:fillRef>
-          <a:effectRef idx="2">
-            <a:schemeClr val="accent1"/>
-          </a:effectRef>
-          <a:fontRef idx="minor">
-            <a:schemeClr val="lt1"/>
-          </a:fontRef>
-        </p:style>
-        <p:txBody>
-          <a:bodyPr lIns="0" rIns="0" rtlCol="0" anchor="ctr"/>
-          <a:lstStyle/>
-          <a:p>
-            <a:pPr algn="ctr"/>
-            <a:r>
-              <a:rPr sz="1400" b="1">
-                <a:solidFill>
-                  <a:srgbClr val="F5F5F5"/>
-                </a:solidFill>
-                <a:latin typeface="Arial"/>
-              </a:rPr>
-              <a:t>4</a:t>
-            </a:r>
-          </a:p>
-        </p:txBody>
-      </p:sp>
-      <p:sp>
-        <p:nvSpPr>
-          <p:cNvPr id="27" name="TextBox 26"/>
+          <p:cNvPr id="26" name="TextBox 25"/>
           <p:cNvSpPr txBox="1"/>
           <p:nvPr/>
         </p:nvSpPr>
         <p:spPr>
           <a:xfrm>
-            <a:off x="9848088" y="1984248"/>
-            <a:ext cx="1719072" cy="548640"/>
-          </a:xfrm>
-          <a:prstGeom prst="rect">
-            <a:avLst/>
-          </a:prstGeom>
-          <a:noFill/>
-        </p:spPr>
-        <p:txBody>
-          <a:bodyPr wrap="square" lIns="45720" tIns="27432" rIns="45720" bIns="27432" anchor="ctr">
-            <a:spAutoFit/>
-          </a:bodyPr>
-          <a:lstStyle/>
-          <a:p>
-            <a:pPr algn="l"/>
-            <a:r>
-              <a:rPr sz="1600" b="1">
-                <a:solidFill>
-                  <a:srgbClr val="F5F5F5"/>
-                </a:solidFill>
-                <a:latin typeface="Arial"/>
-              </a:rPr>
-              <a:t>Standardize</a:t>
-            </a:r>
-          </a:p>
-        </p:txBody>
-      </p:sp>
-      <p:sp>
-        <p:nvSpPr>
-          <p:cNvPr id="28" name="TextBox 27"/>
-          <p:cNvSpPr txBox="1"/>
-          <p:nvPr/>
-        </p:nvSpPr>
-        <p:spPr>
-          <a:xfrm>
-            <a:off x="9326880" y="2651760"/>
-            <a:ext cx="2194560" cy="1051560"/>
+            <a:off x="9281159" y="1965960"/>
+            <a:ext cx="2286000" cy="411480"/>
           </a:xfrm>
           <a:prstGeom prst="rect">
             <a:avLst/>
@@ -10087,213 +8876,29 @@
           </a:bodyPr>
           <a:lstStyle/>
           <a:p>
-            <a:pPr algn="l">
-              <a:spcAft>
-                <a:spcPts val="400"/>
-              </a:spcAft>
-            </a:pPr>
-            <a:r>
-              <a:rPr sz="1200" b="0">
-                <a:solidFill>
-                  <a:srgbClr val="A3A3A3"/>
-                </a:solidFill>
-                <a:latin typeface="Arial"/>
-              </a:rPr>
-              <a:t>AGENTS.md, a skill, a hook and a reviewer droid, shared org-wide.</a:t>
-            </a:r>
-          </a:p>
-        </p:txBody>
-      </p:sp>
-      <p:sp>
-        <p:nvSpPr>
-          <p:cNvPr id="29" name="Rectangle 28"/>
-          <p:cNvSpPr/>
-          <p:nvPr/>
-        </p:nvSpPr>
-        <p:spPr>
-          <a:xfrm>
-            <a:off x="731520" y="3977639"/>
-            <a:ext cx="2651760" cy="2011680"/>
-          </a:xfrm>
-          <a:prstGeom prst="rect">
-            <a:avLst/>
-          </a:prstGeom>
-          <a:solidFill>
-            <a:srgbClr val="1A1A1A"/>
-          </a:solidFill>
-          <a:ln w="9525">
-            <a:solidFill>
-              <a:srgbClr val="2E2E2E"/>
-            </a:solidFill>
-          </a:ln>
-          <a:effectLst/>
-        </p:spPr>
-        <p:style>
-          <a:lnRef idx="1">
-            <a:schemeClr val="accent1"/>
-          </a:lnRef>
-          <a:fillRef idx="3">
-            <a:schemeClr val="accent1"/>
-          </a:fillRef>
-          <a:effectRef idx="2">
-            <a:schemeClr val="accent1"/>
-          </a:effectRef>
-          <a:fontRef idx="minor">
-            <a:schemeClr val="lt1"/>
-          </a:fontRef>
-        </p:style>
-        <p:txBody>
-          <a:bodyPr rtlCol="0" anchor="ctr"/>
-          <a:lstStyle/>
-          <a:p>
-            <a:pPr algn="ctr"/>
-            <a:endParaRPr/>
-          </a:p>
-        </p:txBody>
-      </p:sp>
-      <p:sp>
-        <p:nvSpPr>
-          <p:cNvPr id="30" name="Rectangle 29"/>
-          <p:cNvSpPr/>
-          <p:nvPr/>
-        </p:nvSpPr>
-        <p:spPr>
-          <a:xfrm>
-            <a:off x="731520" y="3977639"/>
-            <a:ext cx="2651760" cy="54864"/>
-          </a:xfrm>
-          <a:prstGeom prst="rect">
-            <a:avLst/>
-          </a:prstGeom>
-          <a:solidFill>
-            <a:srgbClr val="D15010"/>
-          </a:solidFill>
-          <a:ln>
-            <a:noFill/>
-          </a:ln>
-          <a:effectLst/>
-        </p:spPr>
-        <p:style>
-          <a:lnRef idx="1">
-            <a:schemeClr val="accent1"/>
-          </a:lnRef>
-          <a:fillRef idx="3">
-            <a:schemeClr val="accent1"/>
-          </a:fillRef>
-          <a:effectRef idx="2">
-            <a:schemeClr val="accent1"/>
-          </a:effectRef>
-          <a:fontRef idx="minor">
-            <a:schemeClr val="lt1"/>
-          </a:fontRef>
-        </p:style>
-        <p:txBody>
-          <a:bodyPr rtlCol="0" anchor="ctr"/>
-          <a:lstStyle/>
-          <a:p>
-            <a:pPr algn="ctr"/>
-            <a:endParaRPr/>
-          </a:p>
-        </p:txBody>
-      </p:sp>
-      <p:sp>
-        <p:nvSpPr>
-          <p:cNvPr id="31" name="Oval 30"/>
-          <p:cNvSpPr/>
-          <p:nvPr/>
-        </p:nvSpPr>
-        <p:spPr>
-          <a:xfrm>
-            <a:off x="932688" y="4233672"/>
-            <a:ext cx="420624" cy="420624"/>
-          </a:xfrm>
-          <a:prstGeom prst="ellipse">
-            <a:avLst/>
-          </a:prstGeom>
-          <a:solidFill>
-            <a:srgbClr val="D15010"/>
-          </a:solidFill>
-          <a:ln>
-            <a:noFill/>
-          </a:ln>
-          <a:effectLst/>
-        </p:spPr>
-        <p:style>
-          <a:lnRef idx="1">
-            <a:schemeClr val="accent1"/>
-          </a:lnRef>
-          <a:fillRef idx="3">
-            <a:schemeClr val="accent1"/>
-          </a:fillRef>
-          <a:effectRef idx="2">
-            <a:schemeClr val="accent1"/>
-          </a:effectRef>
-          <a:fontRef idx="minor">
-            <a:schemeClr val="lt1"/>
-          </a:fontRef>
-        </p:style>
-        <p:txBody>
-          <a:bodyPr lIns="0" rIns="0" rtlCol="0" anchor="ctr"/>
-          <a:lstStyle/>
-          <a:p>
-            <a:pPr algn="ctr"/>
-            <a:r>
-              <a:rPr sz="1400" b="1">
+            <a:pPr algn="l"/>
+            <a:r>
+              <a:rPr sz="2000" b="1">
                 <a:solidFill>
                   <a:srgbClr val="F5F5F5"/>
                 </a:solidFill>
                 <a:latin typeface="Arial"/>
               </a:rPr>
-              <a:t>5</a:t>
-            </a:r>
-          </a:p>
-        </p:txBody>
-      </p:sp>
-      <p:sp>
-        <p:nvSpPr>
-          <p:cNvPr id="32" name="TextBox 31"/>
+              <a:t>Chainguard</a:t>
+            </a:r>
+          </a:p>
+        </p:txBody>
+      </p:sp>
+      <p:sp>
+        <p:nvSpPr>
+          <p:cNvPr id="27" name="TextBox 26"/>
           <p:cNvSpPr txBox="1"/>
           <p:nvPr/>
         </p:nvSpPr>
         <p:spPr>
           <a:xfrm>
-            <a:off x="1481328" y="4178807"/>
-            <a:ext cx="1719072" cy="548640"/>
-          </a:xfrm>
-          <a:prstGeom prst="rect">
-            <a:avLst/>
-          </a:prstGeom>
-          <a:noFill/>
-        </p:spPr>
-        <p:txBody>
-          <a:bodyPr wrap="square" lIns="45720" tIns="27432" rIns="45720" bIns="27432" anchor="ctr">
-            <a:spAutoFit/>
-          </a:bodyPr>
-          <a:lstStyle/>
-          <a:p>
-            <a:pPr algn="l"/>
-            <a:r>
-              <a:rPr sz="1600" b="1">
-                <a:solidFill>
-                  <a:srgbClr val="F5F5F5"/>
-                </a:solidFill>
-                <a:latin typeface="Arial"/>
-              </a:rPr>
-              <a:t>Mission</a:t>
-            </a:r>
-          </a:p>
-        </p:txBody>
-      </p:sp>
-      <p:sp>
-        <p:nvSpPr>
-          <p:cNvPr id="33" name="TextBox 32"/>
-          <p:cNvSpPr txBox="1"/>
-          <p:nvPr/>
-        </p:nvSpPr>
-        <p:spPr>
-          <a:xfrm>
-            <a:off x="960120" y="4846320"/>
-            <a:ext cx="2194560" cy="1051560"/>
+            <a:off x="9281159" y="2377440"/>
+            <a:ext cx="2286000" cy="365760"/>
           </a:xfrm>
           <a:prstGeom prst="rect">
             <a:avLst/>
@@ -10306,213 +8911,29 @@
           </a:bodyPr>
           <a:lstStyle/>
           <a:p>
-            <a:pPr algn="l">
-              <a:spcAft>
-                <a:spcPts val="400"/>
-              </a:spcAft>
-            </a:pPr>
-            <a:r>
-              <a:rPr sz="1200" b="0">
-                <a:solidFill>
-                  <a:srgbClr val="A3A3A3"/>
-                </a:solidFill>
-                <a:latin typeface="Arial"/>
-              </a:rPr>
-              <a:t>Plan, approve, then build the new app in milestones.</a:t>
-            </a:r>
-          </a:p>
-        </p:txBody>
-      </p:sp>
-      <p:sp>
-        <p:nvSpPr>
-          <p:cNvPr id="34" name="Rectangle 33"/>
-          <p:cNvSpPr/>
-          <p:nvPr/>
-        </p:nvSpPr>
-        <p:spPr>
-          <a:xfrm>
-            <a:off x="3520439" y="3977639"/>
-            <a:ext cx="2651760" cy="2011680"/>
-          </a:xfrm>
-          <a:prstGeom prst="rect">
-            <a:avLst/>
-          </a:prstGeom>
-          <a:solidFill>
-            <a:srgbClr val="1A1A1A"/>
-          </a:solidFill>
-          <a:ln w="9525">
-            <a:solidFill>
-              <a:srgbClr val="2E2E2E"/>
-            </a:solidFill>
-          </a:ln>
-          <a:effectLst/>
-        </p:spPr>
-        <p:style>
-          <a:lnRef idx="1">
-            <a:schemeClr val="accent1"/>
-          </a:lnRef>
-          <a:fillRef idx="3">
-            <a:schemeClr val="accent1"/>
-          </a:fillRef>
-          <a:effectRef idx="2">
-            <a:schemeClr val="accent1"/>
-          </a:effectRef>
-          <a:fontRef idx="minor">
-            <a:schemeClr val="lt1"/>
-          </a:fontRef>
-        </p:style>
-        <p:txBody>
-          <a:bodyPr rtlCol="0" anchor="ctr"/>
-          <a:lstStyle/>
-          <a:p>
-            <a:pPr algn="ctr"/>
-            <a:endParaRPr/>
-          </a:p>
-        </p:txBody>
-      </p:sp>
-      <p:sp>
-        <p:nvSpPr>
-          <p:cNvPr id="35" name="Rectangle 34"/>
-          <p:cNvSpPr/>
-          <p:nvPr/>
-        </p:nvSpPr>
-        <p:spPr>
-          <a:xfrm>
-            <a:off x="3520439" y="3977639"/>
-            <a:ext cx="2651760" cy="54864"/>
-          </a:xfrm>
-          <a:prstGeom prst="rect">
-            <a:avLst/>
-          </a:prstGeom>
-          <a:solidFill>
-            <a:srgbClr val="D15010"/>
-          </a:solidFill>
-          <a:ln>
-            <a:noFill/>
-          </a:ln>
-          <a:effectLst/>
-        </p:spPr>
-        <p:style>
-          <a:lnRef idx="1">
-            <a:schemeClr val="accent1"/>
-          </a:lnRef>
-          <a:fillRef idx="3">
-            <a:schemeClr val="accent1"/>
-          </a:fillRef>
-          <a:effectRef idx="2">
-            <a:schemeClr val="accent1"/>
-          </a:effectRef>
-          <a:fontRef idx="minor">
-            <a:schemeClr val="lt1"/>
-          </a:fontRef>
-        </p:style>
-        <p:txBody>
-          <a:bodyPr rtlCol="0" anchor="ctr"/>
-          <a:lstStyle/>
-          <a:p>
-            <a:pPr algn="ctr"/>
-            <a:endParaRPr/>
-          </a:p>
-        </p:txBody>
-      </p:sp>
-      <p:sp>
-        <p:nvSpPr>
-          <p:cNvPr id="36" name="Oval 35"/>
-          <p:cNvSpPr/>
-          <p:nvPr/>
-        </p:nvSpPr>
-        <p:spPr>
-          <a:xfrm>
-            <a:off x="3721607" y="4233672"/>
-            <a:ext cx="420624" cy="420624"/>
-          </a:xfrm>
-          <a:prstGeom prst="ellipse">
-            <a:avLst/>
-          </a:prstGeom>
-          <a:solidFill>
-            <a:srgbClr val="D15010"/>
-          </a:solidFill>
-          <a:ln>
-            <a:noFill/>
-          </a:ln>
-          <a:effectLst/>
-        </p:spPr>
-        <p:style>
-          <a:lnRef idx="1">
-            <a:schemeClr val="accent1"/>
-          </a:lnRef>
-          <a:fillRef idx="3">
-            <a:schemeClr val="accent1"/>
-          </a:fillRef>
-          <a:effectRef idx="2">
-            <a:schemeClr val="accent1"/>
-          </a:effectRef>
-          <a:fontRef idx="minor">
-            <a:schemeClr val="lt1"/>
-          </a:fontRef>
-        </p:style>
-        <p:txBody>
-          <a:bodyPr lIns="0" rIns="0" rtlCol="0" anchor="ctr"/>
-          <a:lstStyle/>
-          <a:p>
-            <a:pPr algn="ctr"/>
-            <a:r>
-              <a:rPr sz="1400" b="1">
-                <a:solidFill>
-                  <a:srgbClr val="F5F5F5"/>
-                </a:solidFill>
-                <a:latin typeface="Arial"/>
-              </a:rPr>
-              <a:t>6</a:t>
-            </a:r>
-          </a:p>
-        </p:txBody>
-      </p:sp>
-      <p:sp>
-        <p:nvSpPr>
-          <p:cNvPr id="37" name="TextBox 36"/>
+            <a:pPr algn="l"/>
+            <a:r>
+              <a:rPr sz="1100" b="1">
+                <a:solidFill>
+                  <a:srgbClr val="D15010"/>
+                </a:solidFill>
+                <a:latin typeface="Arial"/>
+              </a:rPr>
+              <a:t>Secure open source software</a:t>
+            </a:r>
+          </a:p>
+        </p:txBody>
+      </p:sp>
+      <p:sp>
+        <p:nvSpPr>
+          <p:cNvPr id="28" name="TextBox 27"/>
           <p:cNvSpPr txBox="1"/>
           <p:nvPr/>
         </p:nvSpPr>
         <p:spPr>
           <a:xfrm>
-            <a:off x="4270248" y="4178807"/>
-            <a:ext cx="1719072" cy="548640"/>
-          </a:xfrm>
-          <a:prstGeom prst="rect">
-            <a:avLst/>
-          </a:prstGeom>
-          <a:noFill/>
-        </p:spPr>
-        <p:txBody>
-          <a:bodyPr wrap="square" lIns="45720" tIns="27432" rIns="45720" bIns="27432" anchor="ctr">
-            <a:spAutoFit/>
-          </a:bodyPr>
-          <a:lstStyle/>
-          <a:p>
-            <a:pPr algn="l"/>
-            <a:r>
-              <a:rPr sz="1600" b="1">
-                <a:solidFill>
-                  <a:srgbClr val="F5F5F5"/>
-                </a:solidFill>
-                <a:latin typeface="Arial"/>
-              </a:rPr>
-              <a:t>Validate</a:t>
-            </a:r>
-          </a:p>
-        </p:txBody>
-      </p:sp>
-      <p:sp>
-        <p:nvSpPr>
-          <p:cNvPr id="38" name="TextBox 37"/>
-          <p:cNvSpPr txBox="1"/>
-          <p:nvPr/>
-        </p:nvSpPr>
-        <p:spPr>
-          <a:xfrm>
-            <a:off x="3749039" y="4846320"/>
-            <a:ext cx="2194560" cy="1051560"/>
+            <a:off x="9281159" y="2834640"/>
+            <a:ext cx="2286000" cy="2926080"/>
           </a:xfrm>
           <a:prstGeom prst="rect">
             <a:avLst/>
@@ -10527,211 +8948,47 @@
           <a:p>
             <a:pPr algn="l">
               <a:spcAft>
-                <a:spcPts val="400"/>
+                <a:spcPts val="1000"/>
               </a:spcAft>
             </a:pPr>
             <a:r>
-              <a:rPr sz="1200" b="0">
-                <a:solidFill>
-                  <a:srgbClr val="A3A3A3"/>
-                </a:solidFill>
-                <a:latin typeface="Arial"/>
-              </a:rPr>
-              <a:t>Review, QA and security audit on the pull request.</a:t>
-            </a:r>
-          </a:p>
-        </p:txBody>
-      </p:sp>
-      <p:sp>
-        <p:nvSpPr>
-          <p:cNvPr id="39" name="Rectangle 38"/>
-          <p:cNvSpPr/>
-          <p:nvPr/>
-        </p:nvSpPr>
-        <p:spPr>
-          <a:xfrm>
-            <a:off x="6309359" y="3977639"/>
-            <a:ext cx="2651760" cy="2011680"/>
-          </a:xfrm>
-          <a:prstGeom prst="rect">
-            <a:avLst/>
-          </a:prstGeom>
-          <a:solidFill>
-            <a:srgbClr val="1A1A1A"/>
-          </a:solidFill>
-          <a:ln w="9525">
-            <a:solidFill>
-              <a:srgbClr val="2E2E2E"/>
-            </a:solidFill>
-          </a:ln>
-          <a:effectLst/>
-        </p:spPr>
-        <p:style>
-          <a:lnRef idx="1">
-            <a:schemeClr val="accent1"/>
-          </a:lnRef>
-          <a:fillRef idx="3">
-            <a:schemeClr val="accent1"/>
-          </a:fillRef>
-          <a:effectRef idx="2">
-            <a:schemeClr val="accent1"/>
-          </a:effectRef>
-          <a:fontRef idx="minor">
-            <a:schemeClr val="lt1"/>
-          </a:fontRef>
-        </p:style>
-        <p:txBody>
-          <a:bodyPr rtlCol="0" anchor="ctr"/>
-          <a:lstStyle/>
-          <a:p>
-            <a:pPr algn="ctr"/>
-            <a:endParaRPr/>
-          </a:p>
-        </p:txBody>
-      </p:sp>
-      <p:sp>
-        <p:nvSpPr>
-          <p:cNvPr id="40" name="Rectangle 39"/>
-          <p:cNvSpPr/>
-          <p:nvPr/>
-        </p:nvSpPr>
-        <p:spPr>
-          <a:xfrm>
-            <a:off x="6309359" y="3977639"/>
-            <a:ext cx="2651760" cy="54864"/>
-          </a:xfrm>
-          <a:prstGeom prst="rect">
-            <a:avLst/>
-          </a:prstGeom>
-          <a:solidFill>
-            <a:srgbClr val="D15010"/>
-          </a:solidFill>
-          <a:ln>
-            <a:noFill/>
-          </a:ln>
-          <a:effectLst/>
-        </p:spPr>
-        <p:style>
-          <a:lnRef idx="1">
-            <a:schemeClr val="accent1"/>
-          </a:lnRef>
-          <a:fillRef idx="3">
-            <a:schemeClr val="accent1"/>
-          </a:fillRef>
-          <a:effectRef idx="2">
-            <a:schemeClr val="accent1"/>
-          </a:effectRef>
-          <a:fontRef idx="minor">
-            <a:schemeClr val="lt1"/>
-          </a:fontRef>
-        </p:style>
-        <p:txBody>
-          <a:bodyPr rtlCol="0" anchor="ctr"/>
-          <a:lstStyle/>
-          <a:p>
-            <a:pPr algn="ctr"/>
-            <a:endParaRPr/>
-          </a:p>
-        </p:txBody>
-      </p:sp>
-      <p:sp>
-        <p:nvSpPr>
-          <p:cNvPr id="41" name="Oval 40"/>
-          <p:cNvSpPr/>
-          <p:nvPr/>
-        </p:nvSpPr>
-        <p:spPr>
-          <a:xfrm>
-            <a:off x="6510527" y="4233672"/>
-            <a:ext cx="420624" cy="420624"/>
-          </a:xfrm>
-          <a:prstGeom prst="ellipse">
-            <a:avLst/>
-          </a:prstGeom>
-          <a:solidFill>
-            <a:srgbClr val="D15010"/>
-          </a:solidFill>
-          <a:ln>
-            <a:noFill/>
-          </a:ln>
-          <a:effectLst/>
-        </p:spPr>
-        <p:style>
-          <a:lnRef idx="1">
-            <a:schemeClr val="accent1"/>
-          </a:lnRef>
-          <a:fillRef idx="3">
-            <a:schemeClr val="accent1"/>
-          </a:fillRef>
-          <a:effectRef idx="2">
-            <a:schemeClr val="accent1"/>
-          </a:effectRef>
-          <a:fontRef idx="minor">
-            <a:schemeClr val="lt1"/>
-          </a:fontRef>
-        </p:style>
-        <p:txBody>
-          <a:bodyPr lIns="0" rIns="0" rtlCol="0" anchor="ctr"/>
-          <a:lstStyle/>
-          <a:p>
-            <a:pPr algn="ctr"/>
-            <a:r>
-              <a:rPr sz="1400" b="1">
+              <a:rPr sz="1300" b="0">
                 <a:solidFill>
                   <a:srgbClr val="F5F5F5"/>
                 </a:solidFill>
                 <a:latin typeface="Arial"/>
               </a:rPr>
-              <a:t>7</a:t>
-            </a:r>
-          </a:p>
-        </p:txBody>
-      </p:sp>
-      <p:sp>
-        <p:nvSpPr>
-          <p:cNvPr id="42" name="TextBox 41"/>
+              <a:t>One session kept going for two weeks without losing context.</a:t>
+            </a:r>
+          </a:p>
+          <a:p>
+            <a:pPr algn="l">
+              <a:spcAft>
+                <a:spcPts val="1000"/>
+              </a:spcAft>
+            </a:pPr>
+            <a:r>
+              <a:rPr sz="1300" b="0">
+                <a:solidFill>
+                  <a:srgbClr val="F5F5F5"/>
+                </a:solidFill>
+                <a:latin typeface="Arial"/>
+              </a:rPr>
+              <a:t>Listed results: 6 repositories, 80 packages built.</a:t>
+            </a:r>
+          </a:p>
+        </p:txBody>
+      </p:sp>
+      <p:sp>
+        <p:nvSpPr>
+          <p:cNvPr id="29" name="TextBox 28"/>
           <p:cNvSpPr txBox="1"/>
           <p:nvPr/>
         </p:nvSpPr>
         <p:spPr>
           <a:xfrm>
-            <a:off x="7059168" y="4178807"/>
-            <a:ext cx="1719072" cy="548640"/>
-          </a:xfrm>
-          <a:prstGeom prst="rect">
-            <a:avLst/>
-          </a:prstGeom>
-          <a:noFill/>
-        </p:spPr>
-        <p:txBody>
-          <a:bodyPr wrap="square" lIns="45720" tIns="27432" rIns="45720" bIns="27432" anchor="ctr">
-            <a:spAutoFit/>
-          </a:bodyPr>
-          <a:lstStyle/>
-          <a:p>
-            <a:pPr algn="l"/>
-            <a:r>
-              <a:rPr sz="1600" b="1">
-                <a:solidFill>
-                  <a:srgbClr val="F5F5F5"/>
-                </a:solidFill>
-                <a:latin typeface="Arial"/>
-              </a:rPr>
-              <a:t>Software Factory</a:t>
-            </a:r>
-          </a:p>
-        </p:txBody>
-      </p:sp>
-      <p:sp>
-        <p:nvSpPr>
-          <p:cNvPr id="43" name="TextBox 42"/>
-          <p:cNvSpPr txBox="1"/>
-          <p:nvPr/>
-        </p:nvSpPr>
-        <p:spPr>
-          <a:xfrm>
-            <a:off x="6537959" y="4846320"/>
-            <a:ext cx="2194560" cy="1051560"/>
+            <a:off x="731520" y="5943600"/>
+            <a:ext cx="10698480" cy="224677"/>
           </a:xfrm>
           <a:prstGeom prst="rect">
             <a:avLst/>
@@ -10744,242 +9001,69 @@
           </a:bodyPr>
           <a:lstStyle/>
           <a:p>
-            <a:pPr algn="l">
-              <a:spcAft>
-                <a:spcPts val="400"/>
-              </a:spcAft>
-            </a:pPr>
-            <a:r>
-              <a:rPr sz="1200" b="0">
+            <a:pPr algn="l"/>
+            <a:r>
+              <a:rPr sz="1100" b="0" dirty="0">
                 <a:solidFill>
                   <a:srgbClr val="A3A3A3"/>
                 </a:solidFill>
                 <a:latin typeface="Arial"/>
               </a:rPr>
-              <a:t>Coverage across triage, validate, release, document, monitor.</a:t>
-            </a:r>
-          </a:p>
-        </p:txBody>
-      </p:sp>
-      <p:sp>
-        <p:nvSpPr>
-          <p:cNvPr id="44" name="Rectangle 43"/>
-          <p:cNvSpPr/>
-          <p:nvPr/>
-        </p:nvSpPr>
-        <p:spPr>
-          <a:xfrm>
-            <a:off x="9098280" y="3977639"/>
-            <a:ext cx="2651760" cy="2011680"/>
-          </a:xfrm>
-          <a:prstGeom prst="rect">
-            <a:avLst/>
-          </a:prstGeom>
-          <a:solidFill>
-            <a:srgbClr val="1A1A1A"/>
-          </a:solidFill>
-          <a:ln w="9525">
-            <a:solidFill>
-              <a:srgbClr val="2E2E2E"/>
-            </a:solidFill>
-          </a:ln>
-          <a:effectLst/>
-        </p:spPr>
-        <p:style>
-          <a:lnRef idx="1">
-            <a:schemeClr val="accent1"/>
-          </a:lnRef>
-          <a:fillRef idx="3">
-            <a:schemeClr val="accent1"/>
-          </a:fillRef>
-          <a:effectRef idx="2">
-            <a:schemeClr val="accent1"/>
-          </a:effectRef>
-          <a:fontRef idx="minor">
-            <a:schemeClr val="lt1"/>
-          </a:fontRef>
-        </p:style>
-        <p:txBody>
-          <a:bodyPr rtlCol="0" anchor="ctr"/>
-          <a:lstStyle/>
-          <a:p>
-            <a:pPr algn="ctr"/>
-            <a:endParaRPr/>
-          </a:p>
-        </p:txBody>
-      </p:sp>
-      <p:sp>
-        <p:nvSpPr>
-          <p:cNvPr id="45" name="Rectangle 44"/>
-          <p:cNvSpPr/>
-          <p:nvPr/>
-        </p:nvSpPr>
-        <p:spPr>
-          <a:xfrm>
-            <a:off x="9098280" y="3977639"/>
-            <a:ext cx="2651760" cy="54864"/>
-          </a:xfrm>
-          <a:prstGeom prst="rect">
-            <a:avLst/>
-          </a:prstGeom>
-          <a:solidFill>
-            <a:srgbClr val="D15010"/>
-          </a:solidFill>
-          <a:ln>
-            <a:noFill/>
-          </a:ln>
-          <a:effectLst/>
-        </p:spPr>
-        <p:style>
-          <a:lnRef idx="1">
-            <a:schemeClr val="accent1"/>
-          </a:lnRef>
-          <a:fillRef idx="3">
-            <a:schemeClr val="accent1"/>
-          </a:fillRef>
-          <a:effectRef idx="2">
-            <a:schemeClr val="accent1"/>
-          </a:effectRef>
-          <a:fontRef idx="minor">
-            <a:schemeClr val="lt1"/>
-          </a:fontRef>
-        </p:style>
-        <p:txBody>
-          <a:bodyPr rtlCol="0" anchor="ctr"/>
-          <a:lstStyle/>
-          <a:p>
-            <a:pPr algn="ctr"/>
-            <a:endParaRPr/>
-          </a:p>
-        </p:txBody>
-      </p:sp>
-      <p:sp>
-        <p:nvSpPr>
-          <p:cNvPr id="46" name="Oval 45"/>
-          <p:cNvSpPr/>
-          <p:nvPr/>
-        </p:nvSpPr>
-        <p:spPr>
-          <a:xfrm>
-            <a:off x="9299448" y="4233672"/>
-            <a:ext cx="420624" cy="420624"/>
-          </a:xfrm>
-          <a:prstGeom prst="ellipse">
-            <a:avLst/>
-          </a:prstGeom>
-          <a:solidFill>
-            <a:srgbClr val="D15010"/>
-          </a:solidFill>
-          <a:ln>
-            <a:noFill/>
-          </a:ln>
-          <a:effectLst/>
-        </p:spPr>
-        <p:style>
-          <a:lnRef idx="1">
-            <a:schemeClr val="accent1"/>
-          </a:lnRef>
-          <a:fillRef idx="3">
-            <a:schemeClr val="accent1"/>
-          </a:fillRef>
-          <a:effectRef idx="2">
-            <a:schemeClr val="accent1"/>
-          </a:effectRef>
-          <a:fontRef idx="minor">
-            <a:schemeClr val="lt1"/>
-          </a:fontRef>
-        </p:style>
-        <p:txBody>
-          <a:bodyPr lIns="0" rIns="0" rtlCol="0" anchor="ctr"/>
-          <a:lstStyle/>
-          <a:p>
-            <a:pPr algn="ctr"/>
-            <a:r>
-              <a:rPr sz="1400" b="1">
-                <a:solidFill>
-                  <a:srgbClr val="F5F5F5"/>
-                </a:solidFill>
-                <a:latin typeface="Arial"/>
-              </a:rPr>
-              <a:t>8</a:t>
-            </a:r>
-          </a:p>
-        </p:txBody>
-      </p:sp>
-      <p:sp>
-        <p:nvSpPr>
-          <p:cNvPr id="47" name="TextBox 46"/>
-          <p:cNvSpPr txBox="1"/>
-          <p:nvPr/>
-        </p:nvSpPr>
-        <p:spPr>
-          <a:xfrm>
-            <a:off x="9848088" y="4178807"/>
-            <a:ext cx="1719072" cy="548640"/>
-          </a:xfrm>
-          <a:prstGeom prst="rect">
-            <a:avLst/>
-          </a:prstGeom>
-          <a:noFill/>
-        </p:spPr>
-        <p:txBody>
-          <a:bodyPr wrap="square" lIns="45720" tIns="27432" rIns="45720" bIns="27432" anchor="ctr">
-            <a:spAutoFit/>
-          </a:bodyPr>
-          <a:lstStyle/>
-          <a:p>
-            <a:pPr algn="l"/>
-            <a:r>
-              <a:rPr sz="1600" b="1">
-                <a:solidFill>
-                  <a:srgbClr val="F5F5F5"/>
-                </a:solidFill>
-                <a:latin typeface="Arial"/>
-              </a:rPr>
-              <a:t>Govern and prove</a:t>
-            </a:r>
-          </a:p>
-        </p:txBody>
-      </p:sp>
-      <p:sp>
-        <p:nvSpPr>
-          <p:cNvPr id="48" name="TextBox 47"/>
-          <p:cNvSpPr txBox="1"/>
-          <p:nvPr/>
-        </p:nvSpPr>
-        <p:spPr>
-          <a:xfrm>
-            <a:off x="9326880" y="4846320"/>
-            <a:ext cx="2194560" cy="1051560"/>
-          </a:xfrm>
-          <a:prstGeom prst="rect">
-            <a:avLst/>
-          </a:prstGeom>
-          <a:noFill/>
-        </p:spPr>
-        <p:txBody>
-          <a:bodyPr wrap="square" lIns="45720" tIns="27432" rIns="45720" bIns="27432" anchor="t">
-            <a:spAutoFit/>
-          </a:bodyPr>
-          <a:lstStyle/>
-          <a:p>
-            <a:pPr algn="l">
-              <a:spcAft>
-                <a:spcPts val="400"/>
-              </a:spcAft>
-            </a:pPr>
-            <a:r>
-              <a:rPr sz="1200" b="0">
+              <a:t>Results are customer-reported, from </a:t>
+            </a:r>
+            <a:r>
+              <a:rPr sz="1100" b="0" dirty="0" err="1">
                 <a:solidFill>
                   <a:srgbClr val="A3A3A3"/>
                 </a:solidFill>
                 <a:latin typeface="Arial"/>
               </a:rPr>
-              <a:t>Policy and telemetry, then the scorecard of what was preserved.</a:t>
-            </a:r>
-          </a:p>
-        </p:txBody>
-      </p:sp>
+              <a:t>factory.com</a:t>
+            </a:r>
+            <a:r>
+              <a:rPr sz="1100" b="0" dirty="0">
+                <a:solidFill>
+                  <a:srgbClr val="A3A3A3"/>
+                </a:solidFill>
+                <a:latin typeface="Arial"/>
+              </a:rPr>
+              <a:t>/case-studies. </a:t>
+            </a:r>
+          </a:p>
+        </p:txBody>
+      </p:sp>
+      <p:pic>
+        <p:nvPicPr>
+          <p:cNvPr id="30" name="Picture 29" descr="logo_orange.png">
+            <a:extLst>
+              <a:ext uri="{FF2B5EF4-FFF2-40B4-BE49-F238E27FC236}">
+                <a16:creationId xmlns:a16="http://schemas.microsoft.com/office/drawing/2014/main" id="{1AFAF873-1BAE-9375-216E-A78104893E47}"/>
+              </a:ext>
+            </a:extLst>
+          </p:cNvPr>
+          <p:cNvPicPr>
+            <a:picLocks noChangeAspect="1"/>
+          </p:cNvPicPr>
+          <p:nvPr/>
+        </p:nvPicPr>
+        <p:blipFill>
+          <a:blip r:embed="rId3">
+            <a:biLevel thresh="25000"/>
+          </a:blip>
+          <a:stretch>
+            <a:fillRect/>
+          </a:stretch>
+        </p:blipFill>
+        <p:spPr>
+          <a:xfrm>
+            <a:off x="10905060" y="498348"/>
+            <a:ext cx="502920" cy="502920"/>
+          </a:xfrm>
+          <a:prstGeom prst="rect">
+            <a:avLst/>
+          </a:prstGeom>
+        </p:spPr>
+      </p:pic>
     </p:spTree>
   </p:cSld>
   <p:clrMapOvr>
@@ -11165,30 +9249,6 @@
           </a:p>
         </p:txBody>
       </p:sp>
-      <p:pic>
-        <p:nvPicPr>
-          <p:cNvPr id="6" name="Picture 5" descr="logo_orange.png"/>
-          <p:cNvPicPr>
-            <a:picLocks noChangeAspect="1"/>
-          </p:cNvPicPr>
-          <p:nvPr/>
-        </p:nvPicPr>
-        <p:blipFill>
-          <a:blip r:embed="rId3"/>
-          <a:stretch>
-            <a:fillRect/>
-          </a:stretch>
-        </p:blipFill>
-        <p:spPr>
-          <a:xfrm>
-            <a:off x="11155680" y="457200"/>
-            <a:ext cx="502920" cy="502920"/>
-          </a:xfrm>
-          <a:prstGeom prst="rect">
-            <a:avLst/>
-          </a:prstGeom>
-        </p:spPr>
-      </p:pic>
       <p:sp>
         <p:nvSpPr>
           <p:cNvPr id="7" name="TextBox 6"/>
@@ -11220,41 +9280,6 @@
                 <a:latin typeface="Arial"/>
               </a:rPr>
               <a:t>7</a:t>
-            </a:r>
-          </a:p>
-        </p:txBody>
-      </p:sp>
-      <p:sp>
-        <p:nvSpPr>
-          <p:cNvPr id="8" name="TextBox 7"/>
-          <p:cNvSpPr txBox="1"/>
-          <p:nvPr/>
-        </p:nvSpPr>
-        <p:spPr>
-          <a:xfrm>
-            <a:off x="548640" y="6400800"/>
-            <a:ext cx="5486400" cy="274320"/>
-          </a:xfrm>
-          <a:prstGeom prst="rect">
-            <a:avLst/>
-          </a:prstGeom>
-          <a:noFill/>
-        </p:spPr>
-        <p:txBody>
-          <a:bodyPr wrap="square" lIns="45720" tIns="27432" rIns="45720" bIns="27432" anchor="t">
-            <a:spAutoFit/>
-          </a:bodyPr>
-          <a:lstStyle/>
-          <a:p>
-            <a:pPr algn="l"/>
-            <a:r>
-              <a:rPr sz="1000" b="0">
-                <a:solidFill>
-                  <a:srgbClr val="A3A3A3"/>
-                </a:solidFill>
-                <a:latin typeface="Arial"/>
-              </a:rPr>
-              <a:t>Second meeting: what we heard and the demo</a:t>
             </a:r>
           </a:p>
         </p:txBody>
@@ -12614,6 +10639,38 @@
           </a:p>
         </p:txBody>
       </p:sp>
+      <p:pic>
+        <p:nvPicPr>
+          <p:cNvPr id="36" name="Picture 35" descr="logo_orange.png">
+            <a:extLst>
+              <a:ext uri="{FF2B5EF4-FFF2-40B4-BE49-F238E27FC236}">
+                <a16:creationId xmlns:a16="http://schemas.microsoft.com/office/drawing/2014/main" id="{3086FF33-1D9F-3A25-3AB5-70E938894C40}"/>
+              </a:ext>
+            </a:extLst>
+          </p:cNvPr>
+          <p:cNvPicPr>
+            <a:picLocks noChangeAspect="1"/>
+          </p:cNvPicPr>
+          <p:nvPr/>
+        </p:nvPicPr>
+        <p:blipFill>
+          <a:blip r:embed="rId3">
+            <a:biLevel thresh="25000"/>
+          </a:blip>
+          <a:stretch>
+            <a:fillRect/>
+          </a:stretch>
+        </p:blipFill>
+        <p:spPr>
+          <a:xfrm>
+            <a:off x="10905060" y="498348"/>
+            <a:ext cx="502920" cy="502920"/>
+          </a:xfrm>
+          <a:prstGeom prst="rect">
+            <a:avLst/>
+          </a:prstGeom>
+        </p:spPr>
+      </p:pic>
     </p:spTree>
   </p:cSld>
   <p:clrMapOvr>
@@ -12641,267 +10698,19 @@
       </p:grpSpPr>
       <p:sp>
         <p:nvSpPr>
-          <p:cNvPr id="2" name="Rectangle 1"/>
+          <p:cNvPr id="30" name="Rectangle 29">
+            <a:extLst>
+              <a:ext uri="{FF2B5EF4-FFF2-40B4-BE49-F238E27FC236}">
+                <a16:creationId xmlns:a16="http://schemas.microsoft.com/office/drawing/2014/main" id="{02A3C06A-68B9-57E8-541C-C7E856537B30}"/>
+              </a:ext>
+            </a:extLst>
+          </p:cNvPr>
           <p:cNvSpPr/>
           <p:nvPr/>
         </p:nvSpPr>
         <p:spPr>
           <a:xfrm>
-            <a:off x="0" y="0"/>
-            <a:ext cx="12191695" cy="6858000"/>
-          </a:xfrm>
-          <a:prstGeom prst="rect">
-            <a:avLst/>
-          </a:prstGeom>
-          <a:solidFill>
-            <a:srgbClr val="0D0D0D"/>
-          </a:solidFill>
-          <a:ln>
-            <a:noFill/>
-          </a:ln>
-          <a:effectLst/>
-        </p:spPr>
-        <p:style>
-          <a:lnRef idx="1">
-            <a:schemeClr val="accent1"/>
-          </a:lnRef>
-          <a:fillRef idx="3">
-            <a:schemeClr val="accent1"/>
-          </a:fillRef>
-          <a:effectRef idx="2">
-            <a:schemeClr val="accent1"/>
-          </a:effectRef>
-          <a:fontRef idx="minor">
-            <a:schemeClr val="lt1"/>
-          </a:fontRef>
-        </p:style>
-        <p:txBody>
-          <a:bodyPr rtlCol="0" anchor="ctr"/>
-          <a:lstStyle/>
-          <a:p>
-            <a:pPr algn="ctr"/>
-            <a:endParaRPr/>
-          </a:p>
-        </p:txBody>
-      </p:sp>
-      <p:sp>
-        <p:nvSpPr>
-          <p:cNvPr id="3" name="Rectangle 2"/>
-          <p:cNvSpPr/>
-          <p:nvPr/>
-        </p:nvSpPr>
-        <p:spPr>
-          <a:xfrm>
-            <a:off x="548640" y="502920"/>
-            <a:ext cx="73152" cy="868680"/>
-          </a:xfrm>
-          <a:prstGeom prst="rect">
-            <a:avLst/>
-          </a:prstGeom>
-          <a:solidFill>
-            <a:srgbClr val="D15010"/>
-          </a:solidFill>
-          <a:ln>
-            <a:noFill/>
-          </a:ln>
-          <a:effectLst/>
-        </p:spPr>
-        <p:style>
-          <a:lnRef idx="1">
-            <a:schemeClr val="accent1"/>
-          </a:lnRef>
-          <a:fillRef idx="3">
-            <a:schemeClr val="accent1"/>
-          </a:fillRef>
-          <a:effectRef idx="2">
-            <a:schemeClr val="accent1"/>
-          </a:effectRef>
-          <a:fontRef idx="minor">
-            <a:schemeClr val="lt1"/>
-          </a:fontRef>
-        </p:style>
-        <p:txBody>
-          <a:bodyPr rtlCol="0" anchor="ctr"/>
-          <a:lstStyle/>
-          <a:p>
-            <a:pPr algn="ctr"/>
-            <a:endParaRPr/>
-          </a:p>
-        </p:txBody>
-      </p:sp>
-      <p:sp>
-        <p:nvSpPr>
-          <p:cNvPr id="4" name="TextBox 3"/>
-          <p:cNvSpPr txBox="1"/>
-          <p:nvPr/>
-        </p:nvSpPr>
-        <p:spPr>
-          <a:xfrm>
-            <a:off x="731520" y="457200"/>
-            <a:ext cx="9144000" cy="320040"/>
-          </a:xfrm>
-          <a:prstGeom prst="rect">
-            <a:avLst/>
-          </a:prstGeom>
-          <a:noFill/>
-        </p:spPr>
-        <p:txBody>
-          <a:bodyPr wrap="square" lIns="45720" tIns="27432" rIns="45720" bIns="27432" anchor="t">
-            <a:spAutoFit/>
-          </a:bodyPr>
-          <a:lstStyle/>
-          <a:p>
-            <a:pPr algn="l"/>
-            <a:r>
-              <a:rPr sz="1200" b="1">
-                <a:solidFill>
-                  <a:srgbClr val="D15010"/>
-                </a:solidFill>
-                <a:latin typeface="Arial"/>
-              </a:rPr>
-              <a:t>WHAT WE PROPOSE</a:t>
-            </a:r>
-          </a:p>
-        </p:txBody>
-      </p:sp>
-      <p:sp>
-        <p:nvSpPr>
-          <p:cNvPr id="5" name="TextBox 4"/>
-          <p:cNvSpPr txBox="1"/>
-          <p:nvPr/>
-        </p:nvSpPr>
-        <p:spPr>
-          <a:xfrm>
-            <a:off x="731520" y="749808"/>
-            <a:ext cx="10515600" cy="731520"/>
-          </a:xfrm>
-          <a:prstGeom prst="rect">
-            <a:avLst/>
-          </a:prstGeom>
-          <a:noFill/>
-        </p:spPr>
-        <p:txBody>
-          <a:bodyPr wrap="square" lIns="45720" tIns="27432" rIns="45720" bIns="27432" anchor="t">
-            <a:spAutoFit/>
-          </a:bodyPr>
-          <a:lstStyle/>
-          <a:p>
-            <a:pPr algn="l"/>
-            <a:r>
-              <a:rPr sz="3200" b="1">
-                <a:solidFill>
-                  <a:srgbClr val="F5F5F5"/>
-                </a:solidFill>
-                <a:latin typeface="Arial"/>
-              </a:rPr>
-              <a:t>Next steps</a:t>
-            </a:r>
-          </a:p>
-        </p:txBody>
-      </p:sp>
-      <p:pic>
-        <p:nvPicPr>
-          <p:cNvPr id="6" name="Picture 5" descr="logo_orange.png"/>
-          <p:cNvPicPr>
-            <a:picLocks noChangeAspect="1"/>
-          </p:cNvPicPr>
-          <p:nvPr/>
-        </p:nvPicPr>
-        <p:blipFill>
-          <a:blip r:embed="rId3"/>
-          <a:stretch>
-            <a:fillRect/>
-          </a:stretch>
-        </p:blipFill>
-        <p:spPr>
-          <a:xfrm>
-            <a:off x="11155680" y="457200"/>
-            <a:ext cx="502920" cy="502920"/>
-          </a:xfrm>
-          <a:prstGeom prst="rect">
-            <a:avLst/>
-          </a:prstGeom>
-        </p:spPr>
-      </p:pic>
-      <p:sp>
-        <p:nvSpPr>
-          <p:cNvPr id="7" name="TextBox 6"/>
-          <p:cNvSpPr txBox="1"/>
-          <p:nvPr/>
-        </p:nvSpPr>
-        <p:spPr>
-          <a:xfrm>
-            <a:off x="11155680" y="6400800"/>
-            <a:ext cx="731520" cy="274320"/>
-          </a:xfrm>
-          <a:prstGeom prst="rect">
-            <a:avLst/>
-          </a:prstGeom>
-          <a:noFill/>
-        </p:spPr>
-        <p:txBody>
-          <a:bodyPr wrap="square" lIns="45720" tIns="27432" rIns="45720" bIns="27432" anchor="t">
-            <a:spAutoFit/>
-          </a:bodyPr>
-          <a:lstStyle/>
-          <a:p>
-            <a:pPr algn="r"/>
-            <a:r>
-              <a:rPr sz="1000" b="0">
-                <a:solidFill>
-                  <a:srgbClr val="A3A3A3"/>
-                </a:solidFill>
-                <a:latin typeface="Arial"/>
-              </a:rPr>
-              <a:t>8</a:t>
-            </a:r>
-          </a:p>
-        </p:txBody>
-      </p:sp>
-      <p:sp>
-        <p:nvSpPr>
-          <p:cNvPr id="8" name="TextBox 7"/>
-          <p:cNvSpPr txBox="1"/>
-          <p:nvPr/>
-        </p:nvSpPr>
-        <p:spPr>
-          <a:xfrm>
-            <a:off x="548640" y="6400800"/>
-            <a:ext cx="5486400" cy="274320"/>
-          </a:xfrm>
-          <a:prstGeom prst="rect">
-            <a:avLst/>
-          </a:prstGeom>
-          <a:noFill/>
-        </p:spPr>
-        <p:txBody>
-          <a:bodyPr wrap="square" lIns="45720" tIns="27432" rIns="45720" bIns="27432" anchor="t">
-            <a:spAutoFit/>
-          </a:bodyPr>
-          <a:lstStyle/>
-          <a:p>
-            <a:pPr algn="l"/>
-            <a:r>
-              <a:rPr sz="1000" b="0">
-                <a:solidFill>
-                  <a:srgbClr val="A3A3A3"/>
-                </a:solidFill>
-                <a:latin typeface="Arial"/>
-              </a:rPr>
-              <a:t>Second meeting: what we heard and the demo</a:t>
-            </a:r>
-          </a:p>
-        </p:txBody>
-      </p:sp>
-      <p:sp>
-        <p:nvSpPr>
-          <p:cNvPr id="9" name="Rectangle 8"/>
-          <p:cNvSpPr/>
-          <p:nvPr/>
-        </p:nvSpPr>
-        <p:spPr>
-          <a:xfrm>
-            <a:off x="731520" y="1783080"/>
+            <a:off x="746607" y="4002076"/>
             <a:ext cx="10698480" cy="731520"/>
           </a:xfrm>
           <a:prstGeom prst="rect">
@@ -12942,16 +10751,61 @@
       </p:sp>
       <p:sp>
         <p:nvSpPr>
-          <p:cNvPr id="10" name="Oval 9"/>
+          <p:cNvPr id="2" name="Rectangle 1"/>
           <p:cNvSpPr/>
           <p:nvPr/>
         </p:nvSpPr>
         <p:spPr>
           <a:xfrm>
-            <a:off x="914400" y="1929384"/>
-            <a:ext cx="438912" cy="438912"/>
-          </a:xfrm>
-          <a:prstGeom prst="ellipse">
+            <a:off x="0" y="-34935"/>
+            <a:ext cx="12191695" cy="6858000"/>
+          </a:xfrm>
+          <a:prstGeom prst="rect">
+            <a:avLst/>
+          </a:prstGeom>
+          <a:solidFill>
+            <a:srgbClr val="0D0D0D"/>
+          </a:solidFill>
+          <a:ln>
+            <a:noFill/>
+          </a:ln>
+          <a:effectLst/>
+        </p:spPr>
+        <p:style>
+          <a:lnRef idx="1">
+            <a:schemeClr val="accent1"/>
+          </a:lnRef>
+          <a:fillRef idx="3">
+            <a:schemeClr val="accent1"/>
+          </a:fillRef>
+          <a:effectRef idx="2">
+            <a:schemeClr val="accent1"/>
+          </a:effectRef>
+          <a:fontRef idx="minor">
+            <a:schemeClr val="lt1"/>
+          </a:fontRef>
+        </p:style>
+        <p:txBody>
+          <a:bodyPr rtlCol="0" anchor="ctr"/>
+          <a:lstStyle/>
+          <a:p>
+            <a:pPr algn="ctr"/>
+            <a:endParaRPr/>
+          </a:p>
+        </p:txBody>
+      </p:sp>
+      <p:sp>
+        <p:nvSpPr>
+          <p:cNvPr id="3" name="Rectangle 2"/>
+          <p:cNvSpPr/>
+          <p:nvPr/>
+        </p:nvSpPr>
+        <p:spPr>
+          <a:xfrm>
+            <a:off x="548640" y="502920"/>
+            <a:ext cx="73152" cy="868680"/>
+          </a:xfrm>
+          <a:prstGeom prst="rect">
             <a:avLst/>
           </a:prstGeom>
           <a:solidFill>
@@ -12981,28 +10835,20 @@
           <a:lstStyle/>
           <a:p>
             <a:pPr algn="ctr"/>
-            <a:r>
-              <a:rPr sz="1400" b="1">
-                <a:solidFill>
-                  <a:srgbClr val="F5F5F5"/>
-                </a:solidFill>
-                <a:latin typeface="Arial"/>
-              </a:rPr>
-              <a:t>1</a:t>
-            </a:r>
-          </a:p>
-        </p:txBody>
-      </p:sp>
-      <p:sp>
-        <p:nvSpPr>
-          <p:cNvPr id="11" name="TextBox 10"/>
+            <a:endParaRPr/>
+          </a:p>
+        </p:txBody>
+      </p:sp>
+      <p:sp>
+        <p:nvSpPr>
+          <p:cNvPr id="4" name="TextBox 3"/>
           <p:cNvSpPr txBox="1"/>
           <p:nvPr/>
         </p:nvSpPr>
         <p:spPr>
           <a:xfrm>
-            <a:off x="1554480" y="1874519"/>
-            <a:ext cx="3840480" cy="548640"/>
+            <a:off x="731520" y="457200"/>
+            <a:ext cx="9144000" cy="320040"/>
           </a:xfrm>
           <a:prstGeom prst="rect">
             <a:avLst/>
@@ -13010,34 +10856,34 @@
           <a:noFill/>
         </p:spPr>
         <p:txBody>
-          <a:bodyPr wrap="square" lIns="45720" tIns="27432" rIns="45720" bIns="27432" anchor="ctr">
+          <a:bodyPr wrap="square" lIns="45720" tIns="27432" rIns="45720" bIns="27432" anchor="t">
             <a:spAutoFit/>
           </a:bodyPr>
           <a:lstStyle/>
           <a:p>
             <a:pPr algn="l"/>
             <a:r>
-              <a:rPr sz="1600" b="1">
-                <a:solidFill>
-                  <a:srgbClr val="F5F5F5"/>
-                </a:solidFill>
-                <a:latin typeface="Arial"/>
-              </a:rPr>
-              <a:t>Confirm goals and success metrics</a:t>
-            </a:r>
-          </a:p>
-        </p:txBody>
-      </p:sp>
-      <p:sp>
-        <p:nvSpPr>
-          <p:cNvPr id="12" name="TextBox 11"/>
+              <a:rPr sz="1200" b="1">
+                <a:solidFill>
+                  <a:srgbClr val="D15010"/>
+                </a:solidFill>
+                <a:latin typeface="Arial"/>
+              </a:rPr>
+              <a:t>WHAT WE PROPOSE</a:t>
+            </a:r>
+          </a:p>
+        </p:txBody>
+      </p:sp>
+      <p:sp>
+        <p:nvSpPr>
+          <p:cNvPr id="5" name="TextBox 4"/>
           <p:cNvSpPr txBox="1"/>
           <p:nvPr/>
         </p:nvSpPr>
         <p:spPr>
           <a:xfrm>
-            <a:off x="5486400" y="1874519"/>
-            <a:ext cx="5760720" cy="548640"/>
+            <a:off x="731520" y="749808"/>
+            <a:ext cx="10515600" cy="731520"/>
           </a:xfrm>
           <a:prstGeom prst="rect">
             <a:avLst/>
@@ -13045,33 +10891,68 @@
           <a:noFill/>
         </p:spPr>
         <p:txBody>
-          <a:bodyPr wrap="square" lIns="45720" tIns="27432" rIns="45720" bIns="27432" anchor="ctr">
+          <a:bodyPr wrap="square" lIns="45720" tIns="27432" rIns="45720" bIns="27432" anchor="t">
             <a:spAutoFit/>
           </a:bodyPr>
           <a:lstStyle/>
           <a:p>
             <a:pPr algn="l"/>
             <a:r>
-              <a:rPr sz="1300" b="0">
+              <a:rPr sz="3200" b="1">
+                <a:solidFill>
+                  <a:srgbClr val="F5F5F5"/>
+                </a:solidFill>
+                <a:latin typeface="Arial"/>
+              </a:rPr>
+              <a:t>Next steps</a:t>
+            </a:r>
+          </a:p>
+        </p:txBody>
+      </p:sp>
+      <p:sp>
+        <p:nvSpPr>
+          <p:cNvPr id="7" name="TextBox 6"/>
+          <p:cNvSpPr txBox="1"/>
+          <p:nvPr/>
+        </p:nvSpPr>
+        <p:spPr>
+          <a:xfrm>
+            <a:off x="11155680" y="6400800"/>
+            <a:ext cx="731520" cy="274320"/>
+          </a:xfrm>
+          <a:prstGeom prst="rect">
+            <a:avLst/>
+          </a:prstGeom>
+          <a:noFill/>
+        </p:spPr>
+        <p:txBody>
+          <a:bodyPr wrap="square" lIns="45720" tIns="27432" rIns="45720" bIns="27432" anchor="t">
+            <a:spAutoFit/>
+          </a:bodyPr>
+          <a:lstStyle/>
+          <a:p>
+            <a:pPr algn="r"/>
+            <a:r>
+              <a:rPr sz="1000" b="0">
                 <a:solidFill>
                   <a:srgbClr val="A3A3A3"/>
                 </a:solidFill>
                 <a:latin typeface="Arial"/>
               </a:rPr>
-              <a:t>Agree what “done” and “safe” mean for the first migration.</a:t>
-            </a:r>
-          </a:p>
-        </p:txBody>
-      </p:sp>
-      <p:sp>
-        <p:nvSpPr>
-          <p:cNvPr id="13" name="Rectangle 12"/>
+              <a:t>8</a:t>
+            </a:r>
+          </a:p>
+        </p:txBody>
+      </p:sp>
+      <p:sp>
+        <p:nvSpPr>
+          <p:cNvPr id="9" name="Rectangle 8"/>
           <p:cNvSpPr/>
           <p:nvPr/>
         </p:nvSpPr>
         <p:spPr>
           <a:xfrm>
-            <a:off x="731520" y="2624328"/>
+            <a:off x="731520" y="2337868"/>
             <a:ext cx="10698480" cy="731520"/>
           </a:xfrm>
           <a:prstGeom prst="rect">
@@ -13112,13 +10993,13 @@
       </p:sp>
       <p:sp>
         <p:nvSpPr>
-          <p:cNvPr id="14" name="Oval 13"/>
+          <p:cNvPr id="10" name="Oval 9"/>
           <p:cNvSpPr/>
           <p:nvPr/>
         </p:nvSpPr>
         <p:spPr>
           <a:xfrm>
-            <a:off x="914400" y="2770632"/>
+            <a:off x="914400" y="2484172"/>
             <a:ext cx="438912" cy="438912"/>
           </a:xfrm>
           <a:prstGeom prst="ellipse">
@@ -13158,20 +11039,20 @@
                 </a:solidFill>
                 <a:latin typeface="Arial"/>
               </a:rPr>
-              <a:t>2</a:t>
-            </a:r>
-          </a:p>
-        </p:txBody>
-      </p:sp>
-      <p:sp>
-        <p:nvSpPr>
-          <p:cNvPr id="15" name="TextBox 14"/>
+              <a:t>1</a:t>
+            </a:r>
+          </a:p>
+        </p:txBody>
+      </p:sp>
+      <p:sp>
+        <p:nvSpPr>
+          <p:cNvPr id="11" name="TextBox 10"/>
           <p:cNvSpPr txBox="1"/>
           <p:nvPr/>
         </p:nvSpPr>
         <p:spPr>
           <a:xfrm>
-            <a:off x="1554480" y="2715768"/>
+            <a:off x="1554480" y="2429307"/>
             <a:ext cx="3840480" cy="548640"/>
           </a:xfrm>
           <a:prstGeom prst="rect">
@@ -13193,55 +11074,20 @@
                 </a:solidFill>
                 <a:latin typeface="Arial"/>
               </a:rPr>
-              <a:t>Choose the pilot</a:t>
-            </a:r>
-          </a:p>
-        </p:txBody>
-      </p:sp>
-      <p:sp>
-        <p:nvSpPr>
-          <p:cNvPr id="16" name="TextBox 15"/>
-          <p:cNvSpPr txBox="1"/>
-          <p:nvPr/>
-        </p:nvSpPr>
-        <p:spPr>
-          <a:xfrm>
-            <a:off x="5486400" y="2715768"/>
-            <a:ext cx="5760720" cy="548640"/>
-          </a:xfrm>
-          <a:prstGeom prst="rect">
-            <a:avLst/>
-          </a:prstGeom>
-          <a:noFill/>
-        </p:spPr>
-        <p:txBody>
-          <a:bodyPr wrap="square" lIns="45720" tIns="27432" rIns="45720" bIns="27432" anchor="ctr">
-            <a:spAutoFit/>
-          </a:bodyPr>
-          <a:lstStyle/>
-          <a:p>
-            <a:pPr algn="l"/>
-            <a:r>
-              <a:rPr sz="1300" b="0">
-                <a:solidFill>
-                  <a:srgbClr val="A3A3A3"/>
-                </a:solidFill>
-                <a:latin typeface="Arial"/>
-              </a:rPr>
-              <a:t>Pick one legacy system and two or three teams with an engaged owner.</a:t>
-            </a:r>
-          </a:p>
-        </p:txBody>
-      </p:sp>
-      <p:sp>
-        <p:nvSpPr>
-          <p:cNvPr id="17" name="Rectangle 16"/>
+              <a:t>Confirm goals and success metrics</a:t>
+            </a:r>
+          </a:p>
+        </p:txBody>
+      </p:sp>
+      <p:sp>
+        <p:nvSpPr>
+          <p:cNvPr id="13" name="Rectangle 12"/>
           <p:cNvSpPr/>
           <p:nvPr/>
         </p:nvSpPr>
         <p:spPr>
           <a:xfrm>
-            <a:off x="731520" y="3465576"/>
+            <a:off x="731520" y="3179116"/>
             <a:ext cx="10698480" cy="731520"/>
           </a:xfrm>
           <a:prstGeom prst="rect">
@@ -13282,13 +11128,13 @@
       </p:sp>
       <p:sp>
         <p:nvSpPr>
-          <p:cNvPr id="18" name="Oval 17"/>
+          <p:cNvPr id="14" name="Oval 13"/>
           <p:cNvSpPr/>
           <p:nvPr/>
         </p:nvSpPr>
         <p:spPr>
           <a:xfrm>
-            <a:off x="914400" y="3611880"/>
+            <a:off x="914400" y="3325420"/>
             <a:ext cx="438912" cy="438912"/>
           </a:xfrm>
           <a:prstGeom prst="ellipse">
@@ -13328,21 +11174,21 @@
                 </a:solidFill>
                 <a:latin typeface="Arial"/>
               </a:rPr>
-              <a:t>3</a:t>
-            </a:r>
-          </a:p>
-        </p:txBody>
-      </p:sp>
-      <p:sp>
-        <p:nvSpPr>
-          <p:cNvPr id="19" name="TextBox 18"/>
+              <a:t>2</a:t>
+            </a:r>
+          </a:p>
+        </p:txBody>
+      </p:sp>
+      <p:sp>
+        <p:nvSpPr>
+          <p:cNvPr id="15" name="TextBox 14"/>
           <p:cNvSpPr txBox="1"/>
           <p:nvPr/>
         </p:nvSpPr>
         <p:spPr>
           <a:xfrm>
-            <a:off x="1554480" y="3557016"/>
-            <a:ext cx="3840480" cy="548640"/>
+            <a:off x="1554480" y="3394065"/>
+            <a:ext cx="3840480" cy="301621"/>
           </a:xfrm>
           <a:prstGeom prst="rect">
             <a:avLst/>
@@ -13357,61 +11203,64 @@
           <a:p>
             <a:pPr algn="l"/>
             <a:r>
-              <a:rPr sz="1600" b="1">
+              <a:rPr lang="en-CA" sz="1600" b="1" dirty="0">
                 <a:solidFill>
                   <a:srgbClr val="F5F5F5"/>
                 </a:solidFill>
                 <a:latin typeface="Arial"/>
               </a:rPr>
-              <a:t>Decide the deployment model</a:t>
-            </a:r>
-          </a:p>
-        </p:txBody>
-      </p:sp>
-      <p:sp>
-        <p:nvSpPr>
-          <p:cNvPr id="20" name="TextBox 19"/>
-          <p:cNvSpPr txBox="1"/>
-          <p:nvPr/>
-        </p:nvSpPr>
-        <p:spPr>
-          <a:xfrm>
-            <a:off x="5486400" y="3557016"/>
-            <a:ext cx="5760720" cy="548640"/>
-          </a:xfrm>
-          <a:prstGeom prst="rect">
-            <a:avLst/>
-          </a:prstGeom>
-          <a:noFill/>
-        </p:spPr>
-        <p:txBody>
-          <a:bodyPr wrap="square" lIns="45720" tIns="27432" rIns="45720" bIns="27432" anchor="ctr">
-            <a:spAutoFit/>
-          </a:bodyPr>
-          <a:lstStyle/>
-          <a:p>
-            <a:pPr algn="l"/>
-            <a:r>
-              <a:rPr sz="1300" b="0">
-                <a:solidFill>
-                  <a:srgbClr val="A3A3A3"/>
-                </a:solidFill>
-                <a:latin typeface="Arial"/>
-              </a:rPr>
-              <a:t>Managed first, or private and air-gapped if a requirement calls for it. Start the security review.</a:t>
-            </a:r>
-          </a:p>
-        </p:txBody>
-      </p:sp>
-      <p:sp>
-        <p:nvSpPr>
-          <p:cNvPr id="21" name="Rectangle 20"/>
+              <a:t>Plan the pilot together</a:t>
+            </a:r>
+          </a:p>
+        </p:txBody>
+      </p:sp>
+      <p:pic>
+        <p:nvPicPr>
+          <p:cNvPr id="29" name="Picture 28" descr="logo_orange.png">
+            <a:extLst>
+              <a:ext uri="{FF2B5EF4-FFF2-40B4-BE49-F238E27FC236}">
+                <a16:creationId xmlns:a16="http://schemas.microsoft.com/office/drawing/2014/main" id="{FC3947C6-0E46-8649-2741-8A14509C7AFD}"/>
+              </a:ext>
+            </a:extLst>
+          </p:cNvPr>
+          <p:cNvPicPr>
+            <a:picLocks noChangeAspect="1"/>
+          </p:cNvPicPr>
+          <p:nvPr/>
+        </p:nvPicPr>
+        <p:blipFill>
+          <a:blip r:embed="rId3">
+            <a:biLevel thresh="25000"/>
+          </a:blip>
+          <a:stretch>
+            <a:fillRect/>
+          </a:stretch>
+        </p:blipFill>
+        <p:spPr>
+          <a:xfrm>
+            <a:off x="10905060" y="498348"/>
+            <a:ext cx="502920" cy="502920"/>
+          </a:xfrm>
+          <a:prstGeom prst="rect">
+            <a:avLst/>
+          </a:prstGeom>
+        </p:spPr>
+      </p:pic>
+      <p:sp>
+        <p:nvSpPr>
+          <p:cNvPr id="31" name="Rectangle 30">
+            <a:extLst>
+              <a:ext uri="{FF2B5EF4-FFF2-40B4-BE49-F238E27FC236}">
+                <a16:creationId xmlns:a16="http://schemas.microsoft.com/office/drawing/2014/main" id="{AA4989E3-A8AB-E31B-C710-10A6F7940C74}"/>
+              </a:ext>
+            </a:extLst>
+          </p:cNvPr>
           <p:cNvSpPr/>
           <p:nvPr/>
         </p:nvSpPr>
         <p:spPr>
           <a:xfrm>
-            <a:off x="731520" y="4306824"/>
+            <a:off x="746607" y="4025094"/>
             <a:ext cx="10698480" cy="731520"/>
           </a:xfrm>
           <a:prstGeom prst="rect">
@@ -13452,13 +11301,19 @@
       </p:sp>
       <p:sp>
         <p:nvSpPr>
-          <p:cNvPr id="22" name="Oval 21"/>
+          <p:cNvPr id="32" name="Oval 31">
+            <a:extLst>
+              <a:ext uri="{FF2B5EF4-FFF2-40B4-BE49-F238E27FC236}">
+                <a16:creationId xmlns:a16="http://schemas.microsoft.com/office/drawing/2014/main" id="{BF476849-5FF7-8E32-6F90-C0A918E796B5}"/>
+              </a:ext>
+            </a:extLst>
+          </p:cNvPr>
           <p:cNvSpPr/>
           <p:nvPr/>
         </p:nvSpPr>
         <p:spPr>
           <a:xfrm>
-            <a:off x="914400" y="4453128"/>
+            <a:off x="929487" y="4171398"/>
             <a:ext cx="438912" cy="438912"/>
           </a:xfrm>
           <a:prstGeom prst="ellipse">
@@ -13492,27 +11347,39 @@
           <a:p>
             <a:pPr algn="ctr"/>
             <a:r>
-              <a:rPr sz="1400" b="1">
+              <a:rPr lang="en-CA" sz="1400" b="1" dirty="0">
                 <a:solidFill>
                   <a:srgbClr val="F5F5F5"/>
                 </a:solidFill>
                 <a:latin typeface="Arial"/>
               </a:rPr>
-              <a:t>4</a:t>
-            </a:r>
-          </a:p>
-        </p:txBody>
-      </p:sp>
-      <p:sp>
-        <p:nvSpPr>
-          <p:cNvPr id="23" name="TextBox 22"/>
+              <a:t>3</a:t>
+            </a:r>
+            <a:endParaRPr sz="1400" b="1" dirty="0">
+              <a:solidFill>
+                <a:srgbClr val="F5F5F5"/>
+              </a:solidFill>
+              <a:latin typeface="Arial"/>
+            </a:endParaRPr>
+          </a:p>
+        </p:txBody>
+      </p:sp>
+      <p:sp>
+        <p:nvSpPr>
+          <p:cNvPr id="33" name="TextBox 32">
+            <a:extLst>
+              <a:ext uri="{FF2B5EF4-FFF2-40B4-BE49-F238E27FC236}">
+                <a16:creationId xmlns:a16="http://schemas.microsoft.com/office/drawing/2014/main" id="{3C9A02C2-5A9E-6101-1CBB-DF4849F80F99}"/>
+              </a:ext>
+            </a:extLst>
+          </p:cNvPr>
           <p:cNvSpPr txBox="1"/>
           <p:nvPr/>
         </p:nvSpPr>
         <p:spPr>
           <a:xfrm>
-            <a:off x="1554480" y="4398264"/>
-            <a:ext cx="3840480" cy="548640"/>
+            <a:off x="1569567" y="4240043"/>
+            <a:ext cx="3840480" cy="301621"/>
           </a:xfrm>
           <a:prstGeom prst="rect">
             <a:avLst/>
@@ -13527,218 +11394,13 @@
           <a:p>
             <a:pPr algn="l"/>
             <a:r>
-              <a:rPr sz="1600" b="1">
+              <a:rPr lang="en-CA" sz="1600" b="1" dirty="0">
                 <a:solidFill>
                   <a:srgbClr val="F5F5F5"/>
                 </a:solidFill>
                 <a:latin typeface="Arial"/>
               </a:rPr>
-              <a:t>Run a readiness assessment</a:t>
-            </a:r>
-          </a:p>
-        </p:txBody>
-      </p:sp>
-      <p:sp>
-        <p:nvSpPr>
-          <p:cNvPr id="24" name="TextBox 23"/>
-          <p:cNvSpPr txBox="1"/>
-          <p:nvPr/>
-        </p:nvSpPr>
-        <p:spPr>
-          <a:xfrm>
-            <a:off x="5486400" y="4398264"/>
-            <a:ext cx="5760720" cy="548640"/>
-          </a:xfrm>
-          <a:prstGeom prst="rect">
-            <a:avLst/>
-          </a:prstGeom>
-          <a:noFill/>
-        </p:spPr>
-        <p:txBody>
-          <a:bodyPr wrap="square" lIns="45720" tIns="27432" rIns="45720" bIns="27432" anchor="ctr">
-            <a:spAutoFit/>
-          </a:bodyPr>
-          <a:lstStyle/>
-          <a:p>
-            <a:pPr algn="l"/>
-            <a:r>
-              <a:rPr sz="1300" b="0">
-                <a:solidFill>
-                  <a:srgbClr val="A3A3A3"/>
-                </a:solidFill>
-                <a:latin typeface="Arial"/>
-              </a:rPr>
-              <a:t>Score a real repository and list the gaps before any migration begins.</a:t>
-            </a:r>
-          </a:p>
-        </p:txBody>
-      </p:sp>
-      <p:sp>
-        <p:nvSpPr>
-          <p:cNvPr id="25" name="Rectangle 24"/>
-          <p:cNvSpPr/>
-          <p:nvPr/>
-        </p:nvSpPr>
-        <p:spPr>
-          <a:xfrm>
-            <a:off x="731520" y="5148072"/>
-            <a:ext cx="10698480" cy="731520"/>
-          </a:xfrm>
-          <a:prstGeom prst="rect">
-            <a:avLst/>
-          </a:prstGeom>
-          <a:solidFill>
-            <a:srgbClr val="1A1A1A"/>
-          </a:solidFill>
-          <a:ln w="9525">
-            <a:solidFill>
-              <a:srgbClr val="2E2E2E"/>
-            </a:solidFill>
-          </a:ln>
-          <a:effectLst/>
-        </p:spPr>
-        <p:style>
-          <a:lnRef idx="1">
-            <a:schemeClr val="accent1"/>
-          </a:lnRef>
-          <a:fillRef idx="3">
-            <a:schemeClr val="accent1"/>
-          </a:fillRef>
-          <a:effectRef idx="2">
-            <a:schemeClr val="accent1"/>
-          </a:effectRef>
-          <a:fontRef idx="minor">
-            <a:schemeClr val="lt1"/>
-          </a:fontRef>
-        </p:style>
-        <p:txBody>
-          <a:bodyPr rtlCol="0" anchor="ctr"/>
-          <a:lstStyle/>
-          <a:p>
-            <a:pPr algn="ctr"/>
-            <a:endParaRPr/>
-          </a:p>
-        </p:txBody>
-      </p:sp>
-      <p:sp>
-        <p:nvSpPr>
-          <p:cNvPr id="26" name="Oval 25"/>
-          <p:cNvSpPr/>
-          <p:nvPr/>
-        </p:nvSpPr>
-        <p:spPr>
-          <a:xfrm>
-            <a:off x="914400" y="5294376"/>
-            <a:ext cx="438912" cy="438912"/>
-          </a:xfrm>
-          <a:prstGeom prst="ellipse">
-            <a:avLst/>
-          </a:prstGeom>
-          <a:solidFill>
-            <a:srgbClr val="D15010"/>
-          </a:solidFill>
-          <a:ln>
-            <a:noFill/>
-          </a:ln>
-          <a:effectLst/>
-        </p:spPr>
-        <p:style>
-          <a:lnRef idx="1">
-            <a:schemeClr val="accent1"/>
-          </a:lnRef>
-          <a:fillRef idx="3">
-            <a:schemeClr val="accent1"/>
-          </a:fillRef>
-          <a:effectRef idx="2">
-            <a:schemeClr val="accent1"/>
-          </a:effectRef>
-          <a:fontRef idx="minor">
-            <a:schemeClr val="lt1"/>
-          </a:fontRef>
-        </p:style>
-        <p:txBody>
-          <a:bodyPr rtlCol="0" anchor="ctr"/>
-          <a:lstStyle/>
-          <a:p>
-            <a:pPr algn="ctr"/>
-            <a:r>
-              <a:rPr sz="1400" b="1">
-                <a:solidFill>
-                  <a:srgbClr val="F5F5F5"/>
-                </a:solidFill>
-                <a:latin typeface="Arial"/>
-              </a:rPr>
-              <a:t>5</a:t>
-            </a:r>
-          </a:p>
-        </p:txBody>
-      </p:sp>
-      <p:sp>
-        <p:nvSpPr>
-          <p:cNvPr id="27" name="TextBox 26"/>
-          <p:cNvSpPr txBox="1"/>
-          <p:nvPr/>
-        </p:nvSpPr>
-        <p:spPr>
-          <a:xfrm>
-            <a:off x="1554480" y="5239512"/>
-            <a:ext cx="3840480" cy="548640"/>
-          </a:xfrm>
-          <a:prstGeom prst="rect">
-            <a:avLst/>
-          </a:prstGeom>
-          <a:noFill/>
-        </p:spPr>
-        <p:txBody>
-          <a:bodyPr wrap="square" lIns="45720" tIns="27432" rIns="45720" bIns="27432" anchor="ctr">
-            <a:spAutoFit/>
-          </a:bodyPr>
-          <a:lstStyle/>
-          <a:p>
-            <a:pPr algn="l"/>
-            <a:r>
-              <a:rPr sz="1600" b="1">
-                <a:solidFill>
-                  <a:srgbClr val="F5F5F5"/>
-                </a:solidFill>
-                <a:latin typeface="Arial"/>
-              </a:rPr>
-              <a:t>Plan the pilot together</a:t>
-            </a:r>
-          </a:p>
-        </p:txBody>
-      </p:sp>
-      <p:sp>
-        <p:nvSpPr>
-          <p:cNvPr id="28" name="TextBox 27"/>
-          <p:cNvSpPr txBox="1"/>
-          <p:nvPr/>
-        </p:nvSpPr>
-        <p:spPr>
-          <a:xfrm>
-            <a:off x="5486400" y="5239512"/>
-            <a:ext cx="5760720" cy="548640"/>
-          </a:xfrm>
-          <a:prstGeom prst="rect">
-            <a:avLst/>
-          </a:prstGeom>
-          <a:noFill/>
-        </p:spPr>
-        <p:txBody>
-          <a:bodyPr wrap="square" lIns="45720" tIns="27432" rIns="45720" bIns="27432" anchor="ctr">
-            <a:spAutoFit/>
-          </a:bodyPr>
-          <a:lstStyle/>
-          <a:p>
-            <a:pPr algn="l"/>
-            <a:r>
-              <a:rPr sz="1300" b="0">
-                <a:solidFill>
-                  <a:srgbClr val="A3A3A3"/>
-                </a:solidFill>
-                <a:latin typeface="Arial"/>
-              </a:rPr>
-              <a:t>Name owners, dates, and how we will measure against a baseline.</a:t>
+              <a:t>Validate success and going forward</a:t>
             </a:r>
           </a:p>
         </p:txBody>
@@ -13822,7 +11484,9 @@
           <p:nvPr/>
         </p:nvPicPr>
         <p:blipFill>
-          <a:blip r:embed="rId3"/>
+          <a:blip r:embed="rId3">
+            <a:biLevel thresh="25000"/>
+          </a:blip>
           <a:stretch>
             <a:fillRect/>
           </a:stretch>
